--- a/6 семестр/Автоматизированные системы управление элементами промышленных и административных объектов/Практическая работа №16/Презентация ВраженкоДО.pptx
+++ b/6 семестр/Автоматизированные системы управление элементами промышленных и административных объектов/Практическая работа №16/Презентация ВраженкоДО.pptx
@@ -96,7 +96,7 @@
         <p:spPr>
           <a:xfrm>
             <a:off x="0" y="-69480"/>
-            <a:ext cx="10077480" cy="5672160"/>
+            <a:ext cx="10077120" cy="5671800"/>
           </a:xfrm>
           <a:prstGeom prst="rect">
             <a:avLst/>
@@ -120,7 +120,7 @@
         <p:spPr>
           <a:xfrm>
             <a:off x="609840" y="469800"/>
-            <a:ext cx="2724480" cy="812520"/>
+            <a:ext cx="2724120" cy="812160"/>
           </a:xfrm>
           <a:prstGeom prst="rect">
             <a:avLst/>
@@ -144,7 +144,7 @@
         <p:spPr>
           <a:xfrm>
             <a:off x="0" y="0"/>
-            <a:ext cx="10077480" cy="5667480"/>
+            <a:ext cx="10077120" cy="5667120"/>
           </a:xfrm>
           <a:prstGeom prst="rect">
             <a:avLst/>
@@ -168,7 +168,7 @@
         <p:spPr>
           <a:xfrm>
             <a:off x="504000" y="225720"/>
-            <a:ext cx="9069480" cy="944280"/>
+            <a:ext cx="9069120" cy="943920"/>
           </a:xfrm>
           <a:prstGeom prst="rect">
             <a:avLst/>
@@ -227,7 +227,7 @@
         <p:spPr>
           <a:xfrm>
             <a:off x="504000" y="1326600"/>
-            <a:ext cx="9069480" cy="3285720"/>
+            <a:ext cx="9069120" cy="3285360"/>
           </a:xfrm>
           <a:prstGeom prst="rect">
             <a:avLst/>
@@ -530,7 +530,7 @@
         <p:spPr>
           <a:xfrm>
             <a:off x="0" y="-69480"/>
-            <a:ext cx="10077480" cy="5672160"/>
+            <a:ext cx="10077120" cy="5671800"/>
           </a:xfrm>
           <a:prstGeom prst="rect">
             <a:avLst/>
@@ -554,7 +554,7 @@
         <p:spPr>
           <a:xfrm>
             <a:off x="609840" y="469800"/>
-            <a:ext cx="2724480" cy="812520"/>
+            <a:ext cx="2724120" cy="812160"/>
           </a:xfrm>
           <a:prstGeom prst="rect">
             <a:avLst/>
@@ -578,7 +578,7 @@
         <p:spPr>
           <a:xfrm>
             <a:off x="494640" y="428400"/>
-            <a:ext cx="3548880" cy="711720"/>
+            <a:ext cx="3548520" cy="711360"/>
           </a:xfrm>
           <a:prstGeom prst="rect">
             <a:avLst/>
@@ -602,7 +602,7 @@
         <p:spPr>
           <a:xfrm>
             <a:off x="0" y="0"/>
-            <a:ext cx="10077480" cy="5667480"/>
+            <a:ext cx="10077120" cy="5667120"/>
           </a:xfrm>
           <a:prstGeom prst="rect">
             <a:avLst/>
@@ -626,7 +626,7 @@
         <p:spPr>
           <a:xfrm>
             <a:off x="504000" y="225720"/>
-            <a:ext cx="9069480" cy="944280"/>
+            <a:ext cx="9069120" cy="943920"/>
           </a:xfrm>
           <a:prstGeom prst="rect">
             <a:avLst/>
@@ -685,7 +685,7 @@
         <p:spPr>
           <a:xfrm>
             <a:off x="504000" y="1326600"/>
-            <a:ext cx="9069480" cy="3285720"/>
+            <a:ext cx="9069120" cy="3285360"/>
           </a:xfrm>
           <a:prstGeom prst="rect">
             <a:avLst/>
@@ -988,7 +988,7 @@
         <p:spPr>
           <a:xfrm>
             <a:off x="594720" y="5031000"/>
-            <a:ext cx="4422960" cy="160200"/>
+            <a:ext cx="4422600" cy="159840"/>
           </a:xfrm>
           <a:prstGeom prst="rect">
             <a:avLst/>
@@ -1047,7 +1047,7 @@
         <p:spPr>
           <a:xfrm>
             <a:off x="9024480" y="5043240"/>
-            <a:ext cx="617040" cy="148680"/>
+            <a:ext cx="616680" cy="148320"/>
           </a:xfrm>
           <a:prstGeom prst="rect">
             <a:avLst/>
@@ -1073,7 +1073,7 @@
                 <a:spcPct val="100000"/>
               </a:lnSpc>
             </a:pPr>
-            <a:fld id="{3D1B9BEC-47E0-44C6-8652-B978276031B4}" type="slidenum">
+            <a:fld id="{D38F3703-A336-46D6-8F60-29FD992AC558}" type="slidenum">
               <a:rPr lang="en-US" sz="700" b="0" u="none" strike="noStrike">
                 <a:solidFill>
                   <a:schemeClr val="dk1"/>
@@ -1109,7 +1109,7 @@
         <p:spPr>
           <a:xfrm>
             <a:off x="594720" y="475200"/>
-            <a:ext cx="7229880" cy="361080"/>
+            <a:ext cx="7229520" cy="360720"/>
           </a:xfrm>
           <a:prstGeom prst="rect">
             <a:avLst/>
@@ -1169,7 +1169,7 @@
         <p:spPr>
           <a:xfrm>
             <a:off x="594720" y="1625760"/>
-            <a:ext cx="4422960" cy="2713320"/>
+            <a:ext cx="4422600" cy="2712960"/>
           </a:xfrm>
           <a:prstGeom prst="rect">
             <a:avLst/>
@@ -1229,7 +1229,7 @@
         <p:spPr>
           <a:xfrm>
             <a:off x="5300640" y="1625760"/>
-            <a:ext cx="4340880" cy="2703240"/>
+            <a:ext cx="4340520" cy="2702880"/>
           </a:xfrm>
           <a:prstGeom prst="rect">
             <a:avLst/>
@@ -1532,7 +1532,7 @@
         <p:spPr>
           <a:xfrm>
             <a:off x="8492400" y="410040"/>
-            <a:ext cx="1171800" cy="348120"/>
+            <a:ext cx="1171440" cy="347760"/>
           </a:xfrm>
           <a:prstGeom prst="rect">
             <a:avLst/>
@@ -1556,7 +1556,7 @@
         <p:spPr>
           <a:xfrm>
             <a:off x="494640" y="428400"/>
-            <a:ext cx="3548880" cy="711720"/>
+            <a:ext cx="3548520" cy="711360"/>
           </a:xfrm>
           <a:prstGeom prst="rect">
             <a:avLst/>
@@ -1580,7 +1580,7 @@
         <p:spPr>
           <a:xfrm>
             <a:off x="0" y="0"/>
-            <a:ext cx="10077480" cy="5667480"/>
+            <a:ext cx="10077120" cy="5667120"/>
           </a:xfrm>
           <a:prstGeom prst="rect">
             <a:avLst/>
@@ -1604,7 +1604,7 @@
         <p:spPr>
           <a:xfrm>
             <a:off x="504000" y="225720"/>
-            <a:ext cx="9069480" cy="944280"/>
+            <a:ext cx="9069120" cy="943920"/>
           </a:xfrm>
           <a:prstGeom prst="rect">
             <a:avLst/>
@@ -1663,7 +1663,7 @@
         <p:spPr>
           <a:xfrm>
             <a:off x="504000" y="1326600"/>
-            <a:ext cx="9069480" cy="3285720"/>
+            <a:ext cx="9069120" cy="3285360"/>
           </a:xfrm>
           <a:prstGeom prst="rect">
             <a:avLst/>
@@ -1966,7 +1966,7 @@
         <p:spPr>
           <a:xfrm>
             <a:off x="594720" y="5031000"/>
-            <a:ext cx="4422960" cy="160200"/>
+            <a:ext cx="4422600" cy="159840"/>
           </a:xfrm>
           <a:prstGeom prst="rect">
             <a:avLst/>
@@ -2025,7 +2025,7 @@
         <p:spPr>
           <a:xfrm>
             <a:off x="9024480" y="5043240"/>
-            <a:ext cx="617040" cy="148680"/>
+            <a:ext cx="616680" cy="148320"/>
           </a:xfrm>
           <a:prstGeom prst="rect">
             <a:avLst/>
@@ -2051,7 +2051,7 @@
                 <a:spcPct val="100000"/>
               </a:lnSpc>
             </a:pPr>
-            <a:fld id="{590C8570-3E35-44D3-AF65-94E5BFCC549A}" type="slidenum">
+            <a:fld id="{CBA7F19E-FC90-4F22-9E1A-05D86B42700A}" type="slidenum">
               <a:rPr lang="en-US" sz="700" b="0" u="none" strike="noStrike">
                 <a:solidFill>
                   <a:schemeClr val="dk1"/>
@@ -2087,7 +2087,7 @@
         <p:spPr>
           <a:xfrm>
             <a:off x="594720" y="475200"/>
-            <a:ext cx="7229880" cy="361080"/>
+            <a:ext cx="7229520" cy="360720"/>
           </a:xfrm>
           <a:prstGeom prst="rect">
             <a:avLst/>
@@ -2147,7 +2147,7 @@
         <p:spPr>
           <a:xfrm>
             <a:off x="594720" y="1625760"/>
-            <a:ext cx="4422960" cy="1352520"/>
+            <a:ext cx="4422600" cy="1352160"/>
           </a:xfrm>
           <a:prstGeom prst="rect">
             <a:avLst/>
@@ -2211,7 +2211,7 @@
         <p:spPr>
           <a:xfrm>
             <a:off x="5300640" y="1625760"/>
-            <a:ext cx="4340880" cy="1352520"/>
+            <a:ext cx="4340520" cy="1352160"/>
           </a:xfrm>
           <a:prstGeom prst="rect">
             <a:avLst/>
@@ -2275,7 +2275,7 @@
         <p:spPr>
           <a:xfrm>
             <a:off x="594720" y="3100320"/>
-            <a:ext cx="4422960" cy="1352520"/>
+            <a:ext cx="4422600" cy="1352160"/>
           </a:xfrm>
           <a:prstGeom prst="rect">
             <a:avLst/>
@@ -2339,7 +2339,7 @@
         <p:spPr>
           <a:xfrm>
             <a:off x="5300640" y="3100320"/>
-            <a:ext cx="4340880" cy="1352520"/>
+            <a:ext cx="4340520" cy="1352160"/>
           </a:xfrm>
           <a:prstGeom prst="rect">
             <a:avLst/>
@@ -2432,7 +2432,7 @@
         <p:spPr>
           <a:xfrm>
             <a:off x="446400" y="0"/>
-            <a:ext cx="9071280" cy="871560"/>
+            <a:ext cx="9070920" cy="871200"/>
           </a:xfrm>
           <a:prstGeom prst="rect">
             <a:avLst/>
@@ -2491,7 +2491,7 @@
         <p:spPr>
           <a:xfrm>
             <a:off x="360" y="0"/>
-            <a:ext cx="40618440" cy="360"/>
+            <a:ext cx="40618080" cy="360"/>
           </a:xfrm>
           <a:prstGeom prst="rect">
             <a:avLst/>
@@ -2719,7 +2719,7 @@
         <p:spPr>
           <a:xfrm>
             <a:off x="594720" y="1625760"/>
-            <a:ext cx="4422960" cy="2018520"/>
+            <a:ext cx="4422600" cy="2018160"/>
           </a:xfrm>
           <a:prstGeom prst="rect">
             <a:avLst/>
@@ -2993,7 +2993,7 @@
         <p:spPr>
           <a:xfrm>
             <a:off x="5300640" y="1625760"/>
-            <a:ext cx="4340880" cy="2018520"/>
+            <a:ext cx="4340520" cy="2018160"/>
           </a:xfrm>
           <a:prstGeom prst="rect">
             <a:avLst/>
@@ -3267,7 +3267,7 @@
         <p:spPr>
           <a:xfrm>
             <a:off x="594720" y="5031000"/>
-            <a:ext cx="4422960" cy="160200"/>
+            <a:ext cx="4422600" cy="159840"/>
           </a:xfrm>
           <a:prstGeom prst="rect">
             <a:avLst/>
@@ -3326,7 +3326,7 @@
         <p:spPr>
           <a:xfrm>
             <a:off x="9024480" y="5043240"/>
-            <a:ext cx="617040" cy="148680"/>
+            <a:ext cx="616680" cy="148320"/>
           </a:xfrm>
           <a:prstGeom prst="rect">
             <a:avLst/>
@@ -3352,7 +3352,7 @@
                 <a:spcPct val="100000"/>
               </a:lnSpc>
             </a:pPr>
-            <a:fld id="{7C6472AD-55AC-41C3-9CD9-5C08D9545F3F}" type="slidenum">
+            <a:fld id="{213A3078-5C3D-4FEA-9619-128FAF10A977}" type="slidenum">
               <a:rPr lang="en-US" sz="700" b="0" u="none" strike="noStrike">
                 <a:solidFill>
                   <a:schemeClr val="dk1"/>
@@ -3388,7 +3388,7 @@
         <p:spPr>
           <a:xfrm>
             <a:off x="594720" y="475200"/>
-            <a:ext cx="7229880" cy="361080"/>
+            <a:ext cx="7229520" cy="360720"/>
           </a:xfrm>
           <a:prstGeom prst="rect">
             <a:avLst/>
@@ -3448,7 +3448,7 @@
         <p:spPr>
           <a:xfrm>
             <a:off x="594720" y="3835800"/>
-            <a:ext cx="4422960" cy="836640"/>
+            <a:ext cx="4422600" cy="836280"/>
           </a:xfrm>
           <a:prstGeom prst="rect">
             <a:avLst/>
@@ -3508,7 +3508,7 @@
         <p:spPr>
           <a:xfrm>
             <a:off x="5300640" y="3831840"/>
-            <a:ext cx="4340880" cy="836640"/>
+            <a:ext cx="4340520" cy="836280"/>
           </a:xfrm>
           <a:prstGeom prst="rect">
             <a:avLst/>
@@ -3597,7 +3597,7 @@
         <p:spPr>
           <a:xfrm>
             <a:off x="594720" y="1625760"/>
-            <a:ext cx="4422960" cy="3082320"/>
+            <a:ext cx="4422600" cy="3081960"/>
           </a:xfrm>
           <a:prstGeom prst="rect">
             <a:avLst/>
@@ -3660,7 +3660,7 @@
         <p:spPr>
           <a:xfrm>
             <a:off x="5300640" y="1625760"/>
-            <a:ext cx="4340880" cy="3082320"/>
+            <a:ext cx="4340520" cy="3081960"/>
           </a:xfrm>
           <a:prstGeom prst="rect">
             <a:avLst/>
@@ -3723,7 +3723,7 @@
         <p:spPr>
           <a:xfrm>
             <a:off x="594720" y="5031000"/>
-            <a:ext cx="4422960" cy="160200"/>
+            <a:ext cx="4422600" cy="159840"/>
           </a:xfrm>
           <a:prstGeom prst="rect">
             <a:avLst/>
@@ -3782,7 +3782,7 @@
         <p:spPr>
           <a:xfrm>
             <a:off x="9024480" y="5043240"/>
-            <a:ext cx="617040" cy="148680"/>
+            <a:ext cx="616680" cy="148320"/>
           </a:xfrm>
           <a:prstGeom prst="rect">
             <a:avLst/>
@@ -3808,7 +3808,7 @@
                 <a:spcPct val="100000"/>
               </a:lnSpc>
             </a:pPr>
-            <a:fld id="{B7AE3944-A6DA-42DC-BC3E-7B91A9828FA8}" type="slidenum">
+            <a:fld id="{AD6BF948-F1D2-4DE0-809E-DFA0088C86F3}" type="slidenum">
               <a:rPr lang="en-US" sz="700" b="0" u="none" strike="noStrike">
                 <a:solidFill>
                   <a:schemeClr val="dk1"/>
@@ -3844,7 +3844,7 @@
         <p:spPr>
           <a:xfrm>
             <a:off x="594720" y="475200"/>
-            <a:ext cx="7229880" cy="361080"/>
+            <a:ext cx="7229520" cy="360720"/>
           </a:xfrm>
           <a:prstGeom prst="rect">
             <a:avLst/>
@@ -4034,7 +4034,7 @@
         <p:spPr>
           <a:xfrm>
             <a:off x="9024480" y="5043240"/>
-            <a:ext cx="617040" cy="148680"/>
+            <a:ext cx="616680" cy="148320"/>
           </a:xfrm>
           <a:prstGeom prst="rect">
             <a:avLst/>
@@ -4060,7 +4060,7 @@
                 <a:spcPct val="100000"/>
               </a:lnSpc>
             </a:pPr>
-            <a:fld id="{CB7D39B5-617B-43B4-9AE7-A15BFF340745}" type="slidenum">
+            <a:fld id="{C293CB57-96F4-44C9-AE37-02E54DA0968D}" type="slidenum">
               <a:rPr lang="en-US" sz="700" b="0" u="none" strike="noStrike">
                 <a:solidFill>
                   <a:schemeClr val="dk1"/>
@@ -4118,7 +4118,7 @@
         <p:spPr>
           <a:xfrm>
             <a:off x="3745080" y="2278080"/>
-            <a:ext cx="6944400" cy="3026160"/>
+            <a:ext cx="6944040" cy="3025800"/>
           </a:xfrm>
           <a:prstGeom prst="rect">
             <a:avLst/>
@@ -4164,7 +4164,7 @@
         <p:spPr>
           <a:xfrm>
             <a:off x="198360" y="2180520"/>
-            <a:ext cx="6667200" cy="1365840"/>
+            <a:ext cx="6666840" cy="1365480"/>
           </a:xfrm>
           <a:prstGeom prst="rect">
             <a:avLst/>
@@ -4221,7 +4221,7 @@
         <p:spPr>
           <a:xfrm>
             <a:off x="5650200" y="4109400"/>
-            <a:ext cx="6282360" cy="237240"/>
+            <a:ext cx="6282000" cy="236880"/>
           </a:xfrm>
           <a:prstGeom prst="rect">
             <a:avLst/>
@@ -4273,7 +4273,7 @@
         <p:spPr>
           <a:xfrm>
             <a:off x="198360" y="4559400"/>
-            <a:ext cx="3371040" cy="790920"/>
+            <a:ext cx="3370680" cy="790560"/>
           </a:xfrm>
           <a:prstGeom prst="rect">
             <a:avLst/>
@@ -4371,7 +4371,7 @@
         <p:spPr>
           <a:xfrm>
             <a:off x="3948480" y="5306040"/>
-            <a:ext cx="2180520" cy="440280"/>
+            <a:ext cx="2180160" cy="439920"/>
           </a:xfrm>
           <a:prstGeom prst="rect">
             <a:avLst/>
@@ -4458,7 +4458,7 @@
         <p:spPr>
           <a:xfrm>
             <a:off x="210240" y="334080"/>
-            <a:ext cx="8101440" cy="464400"/>
+            <a:ext cx="8101080" cy="464040"/>
           </a:xfrm>
           <a:prstGeom prst="rect">
             <a:avLst/>
@@ -4570,7 +4570,7 @@
         <p:spPr>
           <a:xfrm>
             <a:off x="360" y="5229360"/>
-            <a:ext cx="10077480" cy="246600"/>
+            <a:ext cx="10077120" cy="246240"/>
           </a:xfrm>
           <a:prstGeom prst="rect">
             <a:avLst/>
@@ -4621,7 +4621,7 @@
         <p:spPr>
           <a:xfrm>
             <a:off x="178560" y="1156320"/>
-            <a:ext cx="9721080" cy="3277080"/>
+            <a:ext cx="9720720" cy="3277080"/>
           </a:xfrm>
           <a:prstGeom prst="rect">
             <a:avLst/>
@@ -5150,7 +5150,7 @@
         <p:spPr>
           <a:xfrm>
             <a:off x="7579440" y="1944000"/>
-            <a:ext cx="2463840" cy="2806560"/>
+            <a:ext cx="2463480" cy="2806200"/>
           </a:xfrm>
           <a:prstGeom prst="rect">
             <a:avLst/>
@@ -5174,7 +5174,7 @@
         <p:spPr>
           <a:xfrm>
             <a:off x="5328000" y="2812680"/>
-            <a:ext cx="2518560" cy="2369880"/>
+            <a:ext cx="2518200" cy="2369520"/>
           </a:xfrm>
           <a:prstGeom prst="rect">
             <a:avLst/>
@@ -5198,7 +5198,7 @@
         <p:spPr>
           <a:xfrm>
             <a:off x="3096000" y="1519200"/>
-            <a:ext cx="2482560" cy="2792160"/>
+            <a:ext cx="2482200" cy="2791800"/>
           </a:xfrm>
           <a:prstGeom prst="rect">
             <a:avLst/>
@@ -5248,7 +5248,7 @@
         <p:spPr>
           <a:xfrm>
             <a:off x="210240" y="334080"/>
-            <a:ext cx="8101440" cy="464400"/>
+            <a:ext cx="8101080" cy="464040"/>
           </a:xfrm>
           <a:prstGeom prst="rect">
             <a:avLst/>
@@ -5360,7 +5360,7 @@
         <p:spPr>
           <a:xfrm>
             <a:off x="360" y="5229360"/>
-            <a:ext cx="10077480" cy="246600"/>
+            <a:ext cx="10077120" cy="246240"/>
           </a:xfrm>
           <a:prstGeom prst="rect">
             <a:avLst/>
@@ -5415,7 +5415,7 @@
         <p:spPr>
           <a:xfrm>
             <a:off x="3960000" y="3161520"/>
-            <a:ext cx="3240000" cy="2035440"/>
+            <a:ext cx="3239640" cy="2035080"/>
           </a:xfrm>
           <a:prstGeom prst="rect">
             <a:avLst/>
@@ -5439,7 +5439,7 @@
         <p:spPr>
           <a:xfrm>
             <a:off x="180000" y="1148040"/>
-            <a:ext cx="3778560" cy="2280600"/>
+            <a:ext cx="3778200" cy="2280240"/>
           </a:xfrm>
           <a:prstGeom prst="rect">
             <a:avLst/>
@@ -5463,7 +5463,7 @@
         <p:spPr>
           <a:xfrm>
             <a:off x="6876000" y="910440"/>
-            <a:ext cx="3130560" cy="2702880"/>
+            <a:ext cx="3130200" cy="2702520"/>
           </a:xfrm>
           <a:prstGeom prst="rect">
             <a:avLst/>
@@ -5513,7 +5513,7 @@
         <p:spPr>
           <a:xfrm>
             <a:off x="210240" y="334080"/>
-            <a:ext cx="8101440" cy="464400"/>
+            <a:ext cx="8101080" cy="464040"/>
           </a:xfrm>
           <a:prstGeom prst="rect">
             <a:avLst/>
@@ -5625,7 +5625,7 @@
         <p:spPr>
           <a:xfrm>
             <a:off x="360" y="5229360"/>
-            <a:ext cx="10077480" cy="246600"/>
+            <a:ext cx="10077120" cy="246240"/>
           </a:xfrm>
           <a:prstGeom prst="rect">
             <a:avLst/>
@@ -5680,7 +5680,7 @@
         <p:spPr>
           <a:xfrm>
             <a:off x="2430360" y="1046160"/>
-            <a:ext cx="5218560" cy="3936960"/>
+            <a:ext cx="5218200" cy="3936600"/>
           </a:xfrm>
           <a:prstGeom prst="rect">
             <a:avLst/>
@@ -5730,7 +5730,7 @@
         <p:spPr>
           <a:xfrm>
             <a:off x="210240" y="334080"/>
-            <a:ext cx="8101440" cy="464400"/>
+            <a:ext cx="8101080" cy="464040"/>
           </a:xfrm>
           <a:prstGeom prst="rect">
             <a:avLst/>
@@ -5842,7 +5842,7 @@
         <p:spPr>
           <a:xfrm>
             <a:off x="360" y="5229360"/>
-            <a:ext cx="10077480" cy="246600"/>
+            <a:ext cx="10077120" cy="246240"/>
           </a:xfrm>
           <a:prstGeom prst="rect">
             <a:avLst/>
@@ -5893,7 +5893,7 @@
         <p:spPr>
           <a:xfrm>
             <a:off x="178560" y="1156320"/>
-            <a:ext cx="9721080" cy="3780360"/>
+            <a:ext cx="9720720" cy="3780360"/>
           </a:xfrm>
           <a:prstGeom prst="rect">
             <a:avLst/>
@@ -6559,7 +6559,7 @@
         <p:spPr>
           <a:xfrm>
             <a:off x="210240" y="334080"/>
-            <a:ext cx="8101440" cy="464400"/>
+            <a:ext cx="8101080" cy="464040"/>
           </a:xfrm>
           <a:prstGeom prst="rect">
             <a:avLst/>
@@ -6671,7 +6671,7 @@
         <p:spPr>
           <a:xfrm>
             <a:off x="360" y="5229360"/>
-            <a:ext cx="10077480" cy="246600"/>
+            <a:ext cx="10077120" cy="246240"/>
           </a:xfrm>
           <a:prstGeom prst="rect">
             <a:avLst/>
@@ -6722,7 +6722,7 @@
         <p:spPr>
           <a:xfrm>
             <a:off x="178560" y="1156320"/>
-            <a:ext cx="9721080" cy="3780360"/>
+            <a:ext cx="9720720" cy="3780360"/>
           </a:xfrm>
           <a:prstGeom prst="rect">
             <a:avLst/>
@@ -7399,7 +7399,7 @@
         <p:spPr>
           <a:xfrm>
             <a:off x="210240" y="334080"/>
-            <a:ext cx="8101440" cy="464400"/>
+            <a:ext cx="8101080" cy="464040"/>
           </a:xfrm>
           <a:prstGeom prst="rect">
             <a:avLst/>
@@ -7511,7 +7511,7 @@
         <p:spPr>
           <a:xfrm>
             <a:off x="360" y="5229360"/>
-            <a:ext cx="10077480" cy="246600"/>
+            <a:ext cx="10077120" cy="246240"/>
           </a:xfrm>
           <a:prstGeom prst="rect">
             <a:avLst/>
@@ -7562,7 +7562,7 @@
         <p:spPr>
           <a:xfrm>
             <a:off x="178560" y="1156320"/>
-            <a:ext cx="9721080" cy="2941560"/>
+            <a:ext cx="9720720" cy="2941560"/>
           </a:xfrm>
           <a:prstGeom prst="rect">
             <a:avLst/>
@@ -8065,7 +8065,7 @@
         <p:spPr>
           <a:xfrm>
             <a:off x="210240" y="334080"/>
-            <a:ext cx="8101440" cy="464400"/>
+            <a:ext cx="8101080" cy="464040"/>
           </a:xfrm>
           <a:prstGeom prst="rect">
             <a:avLst/>
@@ -8177,7 +8177,7 @@
         <p:spPr>
           <a:xfrm>
             <a:off x="360" y="5229360"/>
-            <a:ext cx="10077480" cy="246600"/>
+            <a:ext cx="10077120" cy="246240"/>
           </a:xfrm>
           <a:prstGeom prst="rect">
             <a:avLst/>
@@ -8228,7 +8228,7 @@
         <p:spPr>
           <a:xfrm>
             <a:off x="178560" y="1156320"/>
-            <a:ext cx="9721080" cy="1599480"/>
+            <a:ext cx="9720720" cy="1599480"/>
           </a:xfrm>
           <a:prstGeom prst="rect">
             <a:avLst/>
@@ -9062,7 +9062,7 @@
         <p:spPr>
           <a:xfrm>
             <a:off x="5184000" y="1156320"/>
-            <a:ext cx="9721080" cy="1431720"/>
+            <a:ext cx="9720720" cy="1431720"/>
           </a:xfrm>
           <a:prstGeom prst="rect">
             <a:avLst/>
@@ -9331,7 +9331,7 @@
         <p:spPr>
           <a:xfrm>
             <a:off x="210240" y="334080"/>
-            <a:ext cx="8101440" cy="464400"/>
+            <a:ext cx="8101080" cy="464040"/>
           </a:xfrm>
           <a:prstGeom prst="rect">
             <a:avLst/>
@@ -9443,7 +9443,7 @@
         <p:spPr>
           <a:xfrm>
             <a:off x="360" y="5229360"/>
-            <a:ext cx="10077480" cy="246600"/>
+            <a:ext cx="10077120" cy="246240"/>
           </a:xfrm>
           <a:prstGeom prst="rect">
             <a:avLst/>
@@ -9494,7 +9494,7 @@
         <p:spPr>
           <a:xfrm>
             <a:off x="178560" y="1156320"/>
-            <a:ext cx="9721080" cy="257400"/>
+            <a:ext cx="9720720" cy="257400"/>
           </a:xfrm>
           <a:prstGeom prst="rect">
             <a:avLst/>
@@ -9551,7 +9551,7 @@
         <p:spPr>
           <a:xfrm>
             <a:off x="180000" y="2524320"/>
-            <a:ext cx="9898920" cy="1431720"/>
+            <a:ext cx="9898560" cy="1431720"/>
           </a:xfrm>
           <a:prstGeom prst="rect">
             <a:avLst/>
@@ -10178,7 +10178,7 @@
         <p:spPr>
           <a:xfrm>
             <a:off x="4860000" y="1156680"/>
-            <a:ext cx="9898920" cy="2773800"/>
+            <a:ext cx="9898560" cy="2773800"/>
           </a:xfrm>
           <a:prstGeom prst="rect">
             <a:avLst/>
@@ -10677,7 +10677,7 @@
         <p:spPr>
           <a:xfrm>
             <a:off x="210240" y="334080"/>
-            <a:ext cx="8101440" cy="464400"/>
+            <a:ext cx="8101080" cy="464040"/>
           </a:xfrm>
           <a:prstGeom prst="rect">
             <a:avLst/>
@@ -10789,7 +10789,7 @@
         <p:spPr>
           <a:xfrm>
             <a:off x="360" y="5229360"/>
-            <a:ext cx="10077480" cy="246600"/>
+            <a:ext cx="10077120" cy="246240"/>
           </a:xfrm>
           <a:prstGeom prst="rect">
             <a:avLst/>
@@ -10840,7 +10840,7 @@
         <p:spPr>
           <a:xfrm>
             <a:off x="178560" y="1156320"/>
-            <a:ext cx="9721080" cy="3444840"/>
+            <a:ext cx="9720720" cy="3444840"/>
           </a:xfrm>
           <a:prstGeom prst="rect">
             <a:avLst/>
@@ -11421,7 +11421,7 @@
         <p:spPr>
           <a:xfrm>
             <a:off x="210240" y="334080"/>
-            <a:ext cx="8101440" cy="464400"/>
+            <a:ext cx="8101080" cy="464040"/>
           </a:xfrm>
           <a:prstGeom prst="rect">
             <a:avLst/>
@@ -11533,7 +11533,7 @@
         <p:spPr>
           <a:xfrm>
             <a:off x="360" y="5229360"/>
-            <a:ext cx="10077480" cy="246600"/>
+            <a:ext cx="10077120" cy="246240"/>
           </a:xfrm>
           <a:prstGeom prst="rect">
             <a:avLst/>
@@ -11584,7 +11584,7 @@
         <p:spPr>
           <a:xfrm>
             <a:off x="178560" y="1156320"/>
-            <a:ext cx="9721080" cy="3277080"/>
+            <a:ext cx="9720720" cy="3277080"/>
           </a:xfrm>
           <a:prstGeom prst="rect">
             <a:avLst/>
@@ -12150,7 +12150,7 @@
         <p:spPr>
           <a:xfrm>
             <a:off x="210240" y="334080"/>
-            <a:ext cx="8101440" cy="464400"/>
+            <a:ext cx="8101080" cy="464040"/>
           </a:xfrm>
           <a:prstGeom prst="rect">
             <a:avLst/>
@@ -12262,7 +12262,7 @@
         <p:spPr>
           <a:xfrm>
             <a:off x="360" y="5229360"/>
-            <a:ext cx="10077480" cy="246600"/>
+            <a:ext cx="10077120" cy="246240"/>
           </a:xfrm>
           <a:prstGeom prst="rect">
             <a:avLst/>
@@ -12316,7 +12316,7 @@
         <p:spPr>
           <a:xfrm>
             <a:off x="178560" y="1156320"/>
-            <a:ext cx="9721080" cy="2941560"/>
+            <a:ext cx="9720720" cy="2941560"/>
           </a:xfrm>
           <a:prstGeom prst="rect">
             <a:avLst/>
@@ -12793,7 +12793,7 @@
         <p:spPr>
           <a:xfrm>
             <a:off x="210240" y="334080"/>
-            <a:ext cx="8101440" cy="464400"/>
+            <a:ext cx="8101080" cy="464040"/>
           </a:xfrm>
           <a:prstGeom prst="rect">
             <a:avLst/>
@@ -12905,7 +12905,7 @@
         <p:spPr>
           <a:xfrm>
             <a:off x="360" y="5229360"/>
-            <a:ext cx="10077480" cy="246600"/>
+            <a:ext cx="10077120" cy="246240"/>
           </a:xfrm>
           <a:prstGeom prst="rect">
             <a:avLst/>
@@ -12960,7 +12960,7 @@
         <p:spPr>
           <a:xfrm>
             <a:off x="621000" y="1049760"/>
-            <a:ext cx="8837640" cy="4146120"/>
+            <a:ext cx="8837280" cy="4145760"/>
           </a:xfrm>
           <a:prstGeom prst="rect">
             <a:avLst/>
@@ -13010,7 +13010,7 @@
         <p:spPr>
           <a:xfrm>
             <a:off x="210240" y="334080"/>
-            <a:ext cx="8101440" cy="464400"/>
+            <a:ext cx="8101080" cy="464040"/>
           </a:xfrm>
           <a:prstGeom prst="rect">
             <a:avLst/>
@@ -13122,7 +13122,7 @@
         <p:spPr>
           <a:xfrm>
             <a:off x="360" y="5229360"/>
-            <a:ext cx="10077480" cy="246600"/>
+            <a:ext cx="10077120" cy="246240"/>
           </a:xfrm>
           <a:prstGeom prst="rect">
             <a:avLst/>
@@ -13173,7 +13173,7 @@
         <p:spPr>
           <a:xfrm>
             <a:off x="178560" y="1156320"/>
-            <a:ext cx="9721080" cy="2941560"/>
+            <a:ext cx="9720720" cy="2941560"/>
           </a:xfrm>
           <a:prstGeom prst="rect">
             <a:avLst/>
@@ -13687,7 +13687,7 @@
         <p:spPr>
           <a:xfrm>
             <a:off x="210240" y="334080"/>
-            <a:ext cx="8101440" cy="464400"/>
+            <a:ext cx="8101080" cy="464040"/>
           </a:xfrm>
           <a:prstGeom prst="rect">
             <a:avLst/>
@@ -13799,7 +13799,7 @@
         <p:spPr>
           <a:xfrm>
             <a:off x="360" y="5229360"/>
-            <a:ext cx="10077480" cy="246600"/>
+            <a:ext cx="10077120" cy="246240"/>
           </a:xfrm>
           <a:prstGeom prst="rect">
             <a:avLst/>
@@ -13850,7 +13850,7 @@
         <p:spPr>
           <a:xfrm>
             <a:off x="5938560" y="1156320"/>
-            <a:ext cx="9721080" cy="2773800"/>
+            <a:ext cx="9720720" cy="2773800"/>
           </a:xfrm>
           <a:prstGeom prst="rect">
             <a:avLst/>
@@ -14297,7 +14297,7 @@
         <p:spPr>
           <a:xfrm>
             <a:off x="180000" y="1156320"/>
-            <a:ext cx="4498920" cy="257400"/>
+            <a:ext cx="4498560" cy="257400"/>
           </a:xfrm>
           <a:prstGeom prst="rect">
             <a:avLst/>
@@ -15135,7 +15135,7 @@
         <p:spPr>
           <a:xfrm>
             <a:off x="210240" y="334080"/>
-            <a:ext cx="8101440" cy="464400"/>
+            <a:ext cx="8101080" cy="464040"/>
           </a:xfrm>
           <a:prstGeom prst="rect">
             <a:avLst/>
@@ -15247,7 +15247,7 @@
         <p:spPr>
           <a:xfrm>
             <a:off x="360" y="5229360"/>
-            <a:ext cx="10077480" cy="246600"/>
+            <a:ext cx="10077120" cy="246240"/>
           </a:xfrm>
           <a:prstGeom prst="rect">
             <a:avLst/>
@@ -15302,7 +15302,7 @@
         <p:spPr>
           <a:xfrm>
             <a:off x="1260000" y="1101600"/>
-            <a:ext cx="7559640" cy="4114800"/>
+            <a:ext cx="7559280" cy="4114440"/>
           </a:xfrm>
           <a:prstGeom prst="rect">
             <a:avLst/>
@@ -15352,7 +15352,7 @@
         <p:spPr>
           <a:xfrm>
             <a:off x="210240" y="334080"/>
-            <a:ext cx="8101440" cy="464400"/>
+            <a:ext cx="8101080" cy="464040"/>
           </a:xfrm>
           <a:prstGeom prst="rect">
             <a:avLst/>
@@ -15464,7 +15464,7 @@
         <p:spPr>
           <a:xfrm>
             <a:off x="360" y="5229360"/>
-            <a:ext cx="10077480" cy="246600"/>
+            <a:ext cx="10077120" cy="246240"/>
           </a:xfrm>
           <a:prstGeom prst="rect">
             <a:avLst/>
@@ -15515,7 +15515,7 @@
         <p:spPr>
           <a:xfrm>
             <a:off x="178560" y="1156320"/>
-            <a:ext cx="9721080" cy="2102760"/>
+            <a:ext cx="9720720" cy="2102760"/>
           </a:xfrm>
           <a:prstGeom prst="rect">
             <a:avLst/>
@@ -15858,7 +15858,7 @@
         <p:spPr>
           <a:xfrm>
             <a:off x="4858560" y="1156680"/>
-            <a:ext cx="9721080" cy="2438280"/>
+            <a:ext cx="9720720" cy="2438280"/>
           </a:xfrm>
           <a:prstGeom prst="rect">
             <a:avLst/>
@@ -16283,7 +16283,7 @@
         <p:spPr>
           <a:xfrm>
             <a:off x="210240" y="334080"/>
-            <a:ext cx="8101440" cy="464400"/>
+            <a:ext cx="8101080" cy="464040"/>
           </a:xfrm>
           <a:prstGeom prst="rect">
             <a:avLst/>
@@ -16395,7 +16395,7 @@
         <p:spPr>
           <a:xfrm>
             <a:off x="360" y="5229360"/>
-            <a:ext cx="10077480" cy="246600"/>
+            <a:ext cx="10077120" cy="246240"/>
           </a:xfrm>
           <a:prstGeom prst="rect">
             <a:avLst/>
@@ -16446,7 +16446,7 @@
         <p:spPr>
           <a:xfrm>
             <a:off x="178560" y="1156320"/>
-            <a:ext cx="9721080" cy="2270520"/>
+            <a:ext cx="9720720" cy="2270520"/>
           </a:xfrm>
           <a:prstGeom prst="rect">
             <a:avLst/>
@@ -16815,7 +16815,7 @@
         <p:spPr>
           <a:xfrm>
             <a:off x="4680000" y="1156320"/>
-            <a:ext cx="5398920" cy="1935000"/>
+            <a:ext cx="5398560" cy="1935000"/>
           </a:xfrm>
           <a:prstGeom prst="rect">
             <a:avLst/>
@@ -17162,7 +17162,7 @@
         <p:spPr>
           <a:xfrm>
             <a:off x="210240" y="334080"/>
-            <a:ext cx="8101440" cy="464400"/>
+            <a:ext cx="8101080" cy="464040"/>
           </a:xfrm>
           <a:prstGeom prst="rect">
             <a:avLst/>
@@ -17274,7 +17274,7 @@
         <p:spPr>
           <a:xfrm>
             <a:off x="360" y="5229360"/>
-            <a:ext cx="10077480" cy="246600"/>
+            <a:ext cx="10077120" cy="246240"/>
           </a:xfrm>
           <a:prstGeom prst="rect">
             <a:avLst/>
@@ -17325,7 +17325,7 @@
         <p:spPr>
           <a:xfrm>
             <a:off x="178560" y="1156320"/>
-            <a:ext cx="9721080" cy="3109320"/>
+            <a:ext cx="9720720" cy="3109320"/>
           </a:xfrm>
           <a:prstGeom prst="rect">
             <a:avLst/>
@@ -17854,7 +17854,7 @@
         <p:spPr>
           <a:xfrm>
             <a:off x="210240" y="334080"/>
-            <a:ext cx="8101440" cy="464400"/>
+            <a:ext cx="8101080" cy="464040"/>
           </a:xfrm>
           <a:prstGeom prst="rect">
             <a:avLst/>
@@ -17966,7 +17966,7 @@
         <p:spPr>
           <a:xfrm>
             <a:off x="360" y="5229360"/>
-            <a:ext cx="10077480" cy="246600"/>
+            <a:ext cx="10077120" cy="246240"/>
           </a:xfrm>
           <a:prstGeom prst="rect">
             <a:avLst/>
@@ -18017,7 +18017,7 @@
         <p:spPr>
           <a:xfrm>
             <a:off x="178560" y="1156320"/>
-            <a:ext cx="9721080" cy="4115880"/>
+            <a:ext cx="9720720" cy="4115880"/>
           </a:xfrm>
           <a:prstGeom prst="rect">
             <a:avLst/>
@@ -19183,7 +19183,7 @@
         <p:spPr>
           <a:xfrm>
             <a:off x="210240" y="334080"/>
-            <a:ext cx="8101440" cy="464400"/>
+            <a:ext cx="8101080" cy="464040"/>
           </a:xfrm>
           <a:prstGeom prst="rect">
             <a:avLst/>
@@ -19295,7 +19295,7 @@
         <p:spPr>
           <a:xfrm>
             <a:off x="360" y="5229360"/>
-            <a:ext cx="10077480" cy="246600"/>
+            <a:ext cx="10077120" cy="246240"/>
           </a:xfrm>
           <a:prstGeom prst="rect">
             <a:avLst/>
@@ -19346,7 +19346,7 @@
         <p:spPr>
           <a:xfrm>
             <a:off x="178560" y="1156320"/>
-            <a:ext cx="9721080" cy="3948120"/>
+            <a:ext cx="9720720" cy="3948120"/>
           </a:xfrm>
           <a:prstGeom prst="rect">
             <a:avLst/>
@@ -19964,7 +19964,7 @@
         <p:spPr>
           <a:xfrm>
             <a:off x="4680000" y="1156320"/>
-            <a:ext cx="4139280" cy="928440"/>
+            <a:ext cx="4138920" cy="928440"/>
           </a:xfrm>
           <a:prstGeom prst="rect">
             <a:avLst/>
@@ -20129,7 +20129,7 @@
         <p:spPr>
           <a:xfrm>
             <a:off x="2412000" y="2116800"/>
-            <a:ext cx="6047280" cy="3030480"/>
+            <a:ext cx="6046920" cy="3030120"/>
           </a:xfrm>
           <a:prstGeom prst="rect">
             <a:avLst/>
@@ -20179,7 +20179,7 @@
         <p:spPr>
           <a:xfrm>
             <a:off x="210240" y="334080"/>
-            <a:ext cx="8101440" cy="464400"/>
+            <a:ext cx="8101080" cy="464040"/>
           </a:xfrm>
           <a:prstGeom prst="rect">
             <a:avLst/>
@@ -20291,7 +20291,7 @@
         <p:spPr>
           <a:xfrm>
             <a:off x="360" y="5229360"/>
-            <a:ext cx="10077480" cy="246600"/>
+            <a:ext cx="10077120" cy="246240"/>
           </a:xfrm>
           <a:prstGeom prst="rect">
             <a:avLst/>
@@ -20342,7 +20342,7 @@
         <p:spPr>
           <a:xfrm>
             <a:off x="178560" y="1156320"/>
-            <a:ext cx="9721080" cy="2438280"/>
+            <a:ext cx="9720720" cy="2438280"/>
           </a:xfrm>
           <a:prstGeom prst="rect">
             <a:avLst/>
@@ -20741,7 +20741,7 @@
         <p:spPr>
           <a:xfrm>
             <a:off x="3024000" y="1548000"/>
-            <a:ext cx="2879280" cy="2538360"/>
+            <a:ext cx="2878920" cy="2538000"/>
           </a:xfrm>
           <a:prstGeom prst="rect">
             <a:avLst/>
@@ -20765,7 +20765,7 @@
         <p:spPr>
           <a:xfrm>
             <a:off x="5976000" y="2750400"/>
-            <a:ext cx="3383280" cy="2393640"/>
+            <a:ext cx="3382920" cy="2393280"/>
           </a:xfrm>
           <a:prstGeom prst="rect">
             <a:avLst/>
@@ -20789,7 +20789,7 @@
         <p:spPr>
           <a:xfrm>
             <a:off x="5148000" y="180000"/>
-            <a:ext cx="2879280" cy="2538000"/>
+            <a:ext cx="2878920" cy="2537640"/>
           </a:xfrm>
           <a:prstGeom prst="rect">
             <a:avLst/>
@@ -20839,7 +20839,7 @@
         <p:spPr>
           <a:xfrm>
             <a:off x="210240" y="334080"/>
-            <a:ext cx="8101440" cy="464400"/>
+            <a:ext cx="8101080" cy="464040"/>
           </a:xfrm>
           <a:prstGeom prst="rect">
             <a:avLst/>
@@ -20951,7 +20951,7 @@
         <p:spPr>
           <a:xfrm>
             <a:off x="360" y="5229360"/>
-            <a:ext cx="10077480" cy="246600"/>
+            <a:ext cx="10077120" cy="246240"/>
           </a:xfrm>
           <a:prstGeom prst="rect">
             <a:avLst/>
@@ -21002,7 +21002,7 @@
         <p:spPr>
           <a:xfrm>
             <a:off x="178560" y="1156320"/>
-            <a:ext cx="9721080" cy="3612600"/>
+            <a:ext cx="9720720" cy="3612600"/>
           </a:xfrm>
           <a:prstGeom prst="rect">
             <a:avLst/>
@@ -21583,7 +21583,7 @@
         <p:spPr>
           <a:xfrm>
             <a:off x="6300000" y="985320"/>
-            <a:ext cx="1813320" cy="3873240"/>
+            <a:ext cx="1812960" cy="3872880"/>
           </a:xfrm>
           <a:prstGeom prst="rect">
             <a:avLst/>
@@ -21633,7 +21633,7 @@
         <p:spPr>
           <a:xfrm>
             <a:off x="210240" y="334080"/>
-            <a:ext cx="8101440" cy="464400"/>
+            <a:ext cx="8101080" cy="464040"/>
           </a:xfrm>
           <a:prstGeom prst="rect">
             <a:avLst/>
@@ -21745,7 +21745,7 @@
         <p:spPr>
           <a:xfrm>
             <a:off x="360" y="5229360"/>
-            <a:ext cx="10077480" cy="246600"/>
+            <a:ext cx="10077120" cy="246240"/>
           </a:xfrm>
           <a:prstGeom prst="rect">
             <a:avLst/>
@@ -21796,7 +21796,7 @@
         <p:spPr>
           <a:xfrm>
             <a:off x="178560" y="1156320"/>
-            <a:ext cx="9721080" cy="3780360"/>
+            <a:ext cx="9720720" cy="3780360"/>
           </a:xfrm>
           <a:prstGeom prst="rect">
             <a:avLst/>
@@ -22436,7 +22436,7 @@
         <p:spPr>
           <a:xfrm>
             <a:off x="3420000" y="1493280"/>
-            <a:ext cx="6634080" cy="3177360"/>
+            <a:ext cx="6633720" cy="3177000"/>
           </a:xfrm>
           <a:prstGeom prst="rect">
             <a:avLst/>
@@ -22486,7 +22486,7 @@
         <p:spPr>
           <a:xfrm>
             <a:off x="210240" y="334080"/>
-            <a:ext cx="8101440" cy="464400"/>
+            <a:ext cx="8101080" cy="464040"/>
           </a:xfrm>
           <a:prstGeom prst="rect">
             <a:avLst/>
@@ -22598,7 +22598,7 @@
         <p:spPr>
           <a:xfrm>
             <a:off x="360" y="5229360"/>
-            <a:ext cx="10077480" cy="246600"/>
+            <a:ext cx="10077120" cy="246240"/>
           </a:xfrm>
           <a:prstGeom prst="rect">
             <a:avLst/>
@@ -22649,7 +22649,7 @@
         <p:spPr>
           <a:xfrm>
             <a:off x="178560" y="1156320"/>
-            <a:ext cx="9721080" cy="3109320"/>
+            <a:ext cx="9720720" cy="3109320"/>
           </a:xfrm>
           <a:prstGeom prst="rect">
             <a:avLst/>
@@ -23185,7 +23185,7 @@
         <p:spPr>
           <a:xfrm>
             <a:off x="3420000" y="1492920"/>
-            <a:ext cx="6634080" cy="3177720"/>
+            <a:ext cx="6633720" cy="3177360"/>
           </a:xfrm>
           <a:prstGeom prst="rect">
             <a:avLst/>
@@ -23235,7 +23235,7 @@
         <p:spPr>
           <a:xfrm>
             <a:off x="210240" y="334080"/>
-            <a:ext cx="8101440" cy="464400"/>
+            <a:ext cx="8101080" cy="464040"/>
           </a:xfrm>
           <a:prstGeom prst="rect">
             <a:avLst/>
@@ -23347,7 +23347,7 @@
         <p:spPr>
           <a:xfrm>
             <a:off x="360" y="5229360"/>
-            <a:ext cx="10077480" cy="246600"/>
+            <a:ext cx="10077120" cy="246240"/>
           </a:xfrm>
           <a:prstGeom prst="rect">
             <a:avLst/>
@@ -23398,7 +23398,7 @@
         <p:spPr>
           <a:xfrm>
             <a:off x="178560" y="1156320"/>
-            <a:ext cx="9721080" cy="3612600"/>
+            <a:ext cx="9720720" cy="3612600"/>
           </a:xfrm>
           <a:prstGeom prst="rect">
             <a:avLst/>
@@ -24001,7 +24001,7 @@
         <p:spPr>
           <a:xfrm>
             <a:off x="3420000" y="1492920"/>
-            <a:ext cx="6652440" cy="3186360"/>
+            <a:ext cx="6652080" cy="3186000"/>
           </a:xfrm>
           <a:prstGeom prst="rect">
             <a:avLst/>
@@ -24051,7 +24051,7 @@
         <p:spPr>
           <a:xfrm>
             <a:off x="210240" y="334080"/>
-            <a:ext cx="8101440" cy="464400"/>
+            <a:ext cx="8101080" cy="464040"/>
           </a:xfrm>
           <a:prstGeom prst="rect">
             <a:avLst/>
@@ -24163,7 +24163,7 @@
         <p:spPr>
           <a:xfrm>
             <a:off x="360" y="5229360"/>
-            <a:ext cx="10077480" cy="246600"/>
+            <a:ext cx="10077120" cy="246240"/>
           </a:xfrm>
           <a:prstGeom prst="rect">
             <a:avLst/>
@@ -24214,7 +24214,7 @@
         <p:spPr>
           <a:xfrm>
             <a:off x="178920" y="1156680"/>
-            <a:ext cx="9721080" cy="4115880"/>
+            <a:ext cx="9720720" cy="4115880"/>
           </a:xfrm>
           <a:prstGeom prst="rect">
             <a:avLst/>
@@ -24921,7 +24921,7 @@
         <p:spPr>
           <a:xfrm>
             <a:off x="210240" y="334080"/>
-            <a:ext cx="8101440" cy="464400"/>
+            <a:ext cx="8101080" cy="464040"/>
           </a:xfrm>
           <a:prstGeom prst="rect">
             <a:avLst/>
@@ -25033,7 +25033,7 @@
         <p:spPr>
           <a:xfrm>
             <a:off x="360" y="5229360"/>
-            <a:ext cx="10077480" cy="246600"/>
+            <a:ext cx="10077120" cy="246240"/>
           </a:xfrm>
           <a:prstGeom prst="rect">
             <a:avLst/>
@@ -25084,7 +25084,7 @@
         <p:spPr>
           <a:xfrm>
             <a:off x="178560" y="1156320"/>
-            <a:ext cx="9721080" cy="2773800"/>
+            <a:ext cx="9720720" cy="2773800"/>
           </a:xfrm>
           <a:prstGeom prst="rect">
             <a:avLst/>
@@ -25535,7 +25535,7 @@
         <p:spPr>
           <a:xfrm>
             <a:off x="2858760" y="1260000"/>
-            <a:ext cx="4772520" cy="2159280"/>
+            <a:ext cx="4772160" cy="2158920"/>
           </a:xfrm>
           <a:prstGeom prst="rect">
             <a:avLst/>
@@ -25562,7 +25562,7 @@
         <p:spPr>
           <a:xfrm>
             <a:off x="3384000" y="3492360"/>
-            <a:ext cx="1460160" cy="1618920"/>
+            <a:ext cx="1459800" cy="1618560"/>
           </a:xfrm>
           <a:prstGeom prst="rect">
             <a:avLst/>
@@ -25589,7 +25589,7 @@
         <p:spPr>
           <a:xfrm>
             <a:off x="5240880" y="3493080"/>
-            <a:ext cx="1438920" cy="1618200"/>
+            <a:ext cx="1438560" cy="1617840"/>
           </a:xfrm>
           <a:prstGeom prst="rect">
             <a:avLst/>
@@ -25641,7 +25641,7 @@
         <p:spPr>
           <a:xfrm>
             <a:off x="210240" y="334080"/>
-            <a:ext cx="8101440" cy="464400"/>
+            <a:ext cx="8101080" cy="464040"/>
           </a:xfrm>
           <a:prstGeom prst="rect">
             <a:avLst/>
@@ -25753,7 +25753,7 @@
         <p:spPr>
           <a:xfrm>
             <a:off x="360" y="5229360"/>
-            <a:ext cx="10077480" cy="246600"/>
+            <a:ext cx="10077120" cy="246240"/>
           </a:xfrm>
           <a:prstGeom prst="rect">
             <a:avLst/>
@@ -25804,7 +25804,7 @@
         <p:spPr>
           <a:xfrm>
             <a:off x="178560" y="1156320"/>
-            <a:ext cx="9721080" cy="2941560"/>
+            <a:ext cx="9720720" cy="2941560"/>
           </a:xfrm>
           <a:prstGeom prst="rect">
             <a:avLst/>
@@ -26292,7 +26292,7 @@
         <p:spPr>
           <a:xfrm>
             <a:off x="3578760" y="1156320"/>
-            <a:ext cx="4700520" cy="2126880"/>
+            <a:ext cx="4700160" cy="2126520"/>
           </a:xfrm>
           <a:prstGeom prst="rect">
             <a:avLst/>
@@ -26318,7 +26318,7 @@
         <p:spPr>
           <a:xfrm>
             <a:off x="5040000" y="2712600"/>
-            <a:ext cx="4520520" cy="2146680"/>
+            <a:ext cx="4520160" cy="2146320"/>
           </a:xfrm>
           <a:prstGeom prst="rect">
             <a:avLst/>
@@ -26370,7 +26370,7 @@
         <p:spPr>
           <a:xfrm>
             <a:off x="210240" y="334080"/>
-            <a:ext cx="8101440" cy="464400"/>
+            <a:ext cx="8101080" cy="464040"/>
           </a:xfrm>
           <a:prstGeom prst="rect">
             <a:avLst/>
@@ -26482,7 +26482,7 @@
         <p:spPr>
           <a:xfrm>
             <a:off x="360" y="5229360"/>
-            <a:ext cx="10077480" cy="246600"/>
+            <a:ext cx="10077120" cy="246240"/>
           </a:xfrm>
           <a:prstGeom prst="rect">
             <a:avLst/>
@@ -26536,8 +26536,8 @@
         </p:blipFill>
         <p:spPr>
           <a:xfrm>
-            <a:off x="1635480" y="1053360"/>
-            <a:ext cx="6809760" cy="4140000"/>
+            <a:off x="1657800" y="1093680"/>
+            <a:ext cx="6765480" cy="4131720"/>
           </a:xfrm>
           <a:prstGeom prst="rect">
             <a:avLst/>
@@ -26587,7 +26587,7 @@
         <p:spPr>
           <a:xfrm>
             <a:off x="210240" y="334080"/>
-            <a:ext cx="8101440" cy="464400"/>
+            <a:ext cx="8101080" cy="464040"/>
           </a:xfrm>
           <a:prstGeom prst="rect">
             <a:avLst/>
@@ -26699,7 +26699,7 @@
         <p:spPr>
           <a:xfrm>
             <a:off x="360" y="5229360"/>
-            <a:ext cx="10077480" cy="246600"/>
+            <a:ext cx="10077120" cy="246240"/>
           </a:xfrm>
           <a:prstGeom prst="rect">
             <a:avLst/>
@@ -26750,7 +26750,7 @@
         <p:spPr>
           <a:xfrm>
             <a:off x="178560" y="1156320"/>
-            <a:ext cx="9721080" cy="3948840"/>
+            <a:ext cx="9720720" cy="3948120"/>
           </a:xfrm>
           <a:prstGeom prst="rect">
             <a:avLst/>
@@ -27423,7 +27423,7 @@
         <p:spPr>
           <a:xfrm>
             <a:off x="4680000" y="1156320"/>
-            <a:ext cx="3600000" cy="929160"/>
+            <a:ext cx="3599640" cy="928440"/>
           </a:xfrm>
           <a:prstGeom prst="rect">
             <a:avLst/>
@@ -27614,7 +27614,7 @@
         <p:spPr>
           <a:xfrm>
             <a:off x="210240" y="334080"/>
-            <a:ext cx="8101440" cy="464400"/>
+            <a:ext cx="8101080" cy="464040"/>
           </a:xfrm>
           <a:prstGeom prst="rect">
             <a:avLst/>
@@ -27726,7 +27726,7 @@
         <p:spPr>
           <a:xfrm>
             <a:off x="360" y="5229360"/>
-            <a:ext cx="10077480" cy="246600"/>
+            <a:ext cx="10077120" cy="246240"/>
           </a:xfrm>
           <a:prstGeom prst="rect">
             <a:avLst/>
@@ -27777,7 +27777,7 @@
         <p:spPr>
           <a:xfrm>
             <a:off x="178560" y="1156320"/>
-            <a:ext cx="9721080" cy="3780360"/>
+            <a:ext cx="9720720" cy="3780360"/>
           </a:xfrm>
           <a:prstGeom prst="rect">
             <a:avLst/>
@@ -28454,7 +28454,7 @@
         <p:spPr>
           <a:xfrm>
             <a:off x="210240" y="334080"/>
-            <a:ext cx="8101440" cy="464400"/>
+            <a:ext cx="8101080" cy="464040"/>
           </a:xfrm>
           <a:prstGeom prst="rect">
             <a:avLst/>
@@ -28566,7 +28566,7 @@
         <p:spPr>
           <a:xfrm>
             <a:off x="360" y="5229360"/>
-            <a:ext cx="10077480" cy="246600"/>
+            <a:ext cx="10077120" cy="246240"/>
           </a:xfrm>
           <a:prstGeom prst="rect">
             <a:avLst/>
@@ -28617,7 +28617,7 @@
         <p:spPr>
           <a:xfrm>
             <a:off x="178560" y="1156320"/>
-            <a:ext cx="9721080" cy="2102760"/>
+            <a:ext cx="9720720" cy="2102760"/>
           </a:xfrm>
           <a:prstGeom prst="rect">
             <a:avLst/>
@@ -28949,7 +28949,7 @@
         <p:spPr>
           <a:xfrm>
             <a:off x="4680000" y="1156320"/>
-            <a:ext cx="4679640" cy="3948120"/>
+            <a:ext cx="4679280" cy="3948120"/>
           </a:xfrm>
           <a:prstGeom prst="rect">
             <a:avLst/>
@@ -29652,7 +29652,7 @@
         <p:spPr>
           <a:xfrm>
             <a:off x="210240" y="334080"/>
-            <a:ext cx="8101440" cy="464400"/>
+            <a:ext cx="8101080" cy="464040"/>
           </a:xfrm>
           <a:prstGeom prst="rect">
             <a:avLst/>
@@ -29764,7 +29764,7 @@
         <p:spPr>
           <a:xfrm>
             <a:off x="360" y="5229360"/>
-            <a:ext cx="10077480" cy="246600"/>
+            <a:ext cx="10077120" cy="246240"/>
           </a:xfrm>
           <a:prstGeom prst="rect">
             <a:avLst/>
@@ -29815,7 +29815,7 @@
         <p:spPr>
           <a:xfrm>
             <a:off x="178560" y="1156320"/>
-            <a:ext cx="9721080" cy="3277080"/>
+            <a:ext cx="9720720" cy="3277080"/>
           </a:xfrm>
           <a:prstGeom prst="rect">
             <a:avLst/>
@@ -30370,7 +30370,7 @@
         <p:spPr>
           <a:xfrm>
             <a:off x="210240" y="334080"/>
-            <a:ext cx="8101440" cy="464400"/>
+            <a:ext cx="8101080" cy="464040"/>
           </a:xfrm>
           <a:prstGeom prst="rect">
             <a:avLst/>
@@ -30482,7 +30482,7 @@
         <p:spPr>
           <a:xfrm>
             <a:off x="360" y="5229360"/>
-            <a:ext cx="10077480" cy="246600"/>
+            <a:ext cx="10077120" cy="246240"/>
           </a:xfrm>
           <a:prstGeom prst="rect">
             <a:avLst/>
@@ -30533,7 +30533,7 @@
         <p:spPr>
           <a:xfrm>
             <a:off x="178560" y="1156320"/>
-            <a:ext cx="9721080" cy="3444840"/>
+            <a:ext cx="9720720" cy="3444840"/>
           </a:xfrm>
           <a:prstGeom prst="rect">
             <a:avLst/>
@@ -30974,7 +30974,7 @@
         <p:spPr>
           <a:xfrm>
             <a:off x="4680000" y="1156320"/>
-            <a:ext cx="3239640" cy="1599480"/>
+            <a:ext cx="3239280" cy="1599480"/>
           </a:xfrm>
           <a:prstGeom prst="rect">
             <a:avLst/>
@@ -31779,7 +31779,7 @@
         <p:spPr>
           <a:xfrm>
             <a:off x="210240" y="334080"/>
-            <a:ext cx="8101440" cy="464400"/>
+            <a:ext cx="8101080" cy="464040"/>
           </a:xfrm>
           <a:prstGeom prst="rect">
             <a:avLst/>
@@ -31891,7 +31891,7 @@
         <p:spPr>
           <a:xfrm>
             <a:off x="360" y="5229360"/>
-            <a:ext cx="10077480" cy="246600"/>
+            <a:ext cx="10077120" cy="246240"/>
           </a:xfrm>
           <a:prstGeom prst="rect">
             <a:avLst/>
@@ -31942,7 +31942,7 @@
         <p:spPr>
           <a:xfrm>
             <a:off x="178560" y="1156320"/>
-            <a:ext cx="9721080" cy="3109320"/>
+            <a:ext cx="9720720" cy="3109320"/>
           </a:xfrm>
           <a:prstGeom prst="rect">
             <a:avLst/>
@@ -32482,7 +32482,7 @@
         <p:spPr>
           <a:xfrm>
             <a:off x="210240" y="334080"/>
-            <a:ext cx="8101440" cy="464400"/>
+            <a:ext cx="8101080" cy="464040"/>
           </a:xfrm>
           <a:prstGeom prst="rect">
             <a:avLst/>
@@ -32594,7 +32594,7 @@
         <p:spPr>
           <a:xfrm>
             <a:off x="360" y="5229360"/>
-            <a:ext cx="10077480" cy="246600"/>
+            <a:ext cx="10077120" cy="246240"/>
           </a:xfrm>
           <a:prstGeom prst="rect">
             <a:avLst/>
@@ -32645,7 +32645,7 @@
         <p:spPr>
           <a:xfrm>
             <a:off x="178560" y="1156320"/>
-            <a:ext cx="9721080" cy="2102760"/>
+            <a:ext cx="9720720" cy="2102760"/>
           </a:xfrm>
           <a:prstGeom prst="rect">
             <a:avLst/>
@@ -32999,7 +32999,7 @@
         <p:spPr>
           <a:xfrm>
             <a:off x="4680000" y="1156320"/>
-            <a:ext cx="4319640" cy="2270520"/>
+            <a:ext cx="4319280" cy="2270520"/>
           </a:xfrm>
           <a:prstGeom prst="rect">
             <a:avLst/>
@@ -33398,7 +33398,7 @@
         <p:spPr>
           <a:xfrm>
             <a:off x="210240" y="334080"/>
-            <a:ext cx="8101440" cy="464400"/>
+            <a:ext cx="8101080" cy="464040"/>
           </a:xfrm>
           <a:prstGeom prst="rect">
             <a:avLst/>
@@ -33510,7 +33510,7 @@
         <p:spPr>
           <a:xfrm>
             <a:off x="360" y="5229360"/>
-            <a:ext cx="10077480" cy="246600"/>
+            <a:ext cx="10077120" cy="246240"/>
           </a:xfrm>
           <a:prstGeom prst="rect">
             <a:avLst/>
@@ -33561,7 +33561,7 @@
         <p:spPr>
           <a:xfrm>
             <a:off x="178560" y="1156320"/>
-            <a:ext cx="9721080" cy="4115880"/>
+            <a:ext cx="9720720" cy="4115880"/>
           </a:xfrm>
           <a:prstGeom prst="rect">
             <a:avLst/>
@@ -34901,7 +34901,7 @@
         <p:spPr>
           <a:xfrm>
             <a:off x="210240" y="334080"/>
-            <a:ext cx="8101440" cy="464400"/>
+            <a:ext cx="8101080" cy="464040"/>
           </a:xfrm>
           <a:prstGeom prst="rect">
             <a:avLst/>
@@ -35013,7 +35013,7 @@
         <p:spPr>
           <a:xfrm>
             <a:off x="360" y="5229360"/>
-            <a:ext cx="10077480" cy="246600"/>
+            <a:ext cx="10077120" cy="246240"/>
           </a:xfrm>
           <a:prstGeom prst="rect">
             <a:avLst/>
@@ -35064,7 +35064,7 @@
         <p:spPr>
           <a:xfrm>
             <a:off x="178560" y="1156320"/>
-            <a:ext cx="9721080" cy="2773800"/>
+            <a:ext cx="9720720" cy="2773800"/>
           </a:xfrm>
           <a:prstGeom prst="rect">
             <a:avLst/>
@@ -35541,7 +35541,7 @@
         <p:spPr>
           <a:xfrm>
             <a:off x="3745080" y="2278080"/>
-            <a:ext cx="6944400" cy="3026160"/>
+            <a:ext cx="6944040" cy="3025800"/>
           </a:xfrm>
           <a:prstGeom prst="rect">
             <a:avLst/>
@@ -35587,7 +35587,7 @@
         <p:spPr>
           <a:xfrm>
             <a:off x="302760" y="2390400"/>
-            <a:ext cx="5344920" cy="1158120"/>
+            <a:ext cx="5344560" cy="1157760"/>
           </a:xfrm>
           <a:prstGeom prst="rect">
             <a:avLst/>
@@ -35670,7 +35670,7 @@
         <p:spPr>
           <a:xfrm>
             <a:off x="5650200" y="4109400"/>
-            <a:ext cx="6282360" cy="237240"/>
+            <a:ext cx="6282000" cy="236880"/>
           </a:xfrm>
           <a:prstGeom prst="rect">
             <a:avLst/>
@@ -35722,9 +35722,9 @@
         <p:grpSpPr>
           <a:xfrm>
             <a:off x="396720" y="4254840"/>
-            <a:ext cx="5352480" cy="1325520"/>
+            <a:ext cx="5352120" cy="1325160"/>
             <a:chOff x="396720" y="4254840"/>
-            <a:chExt cx="5352480" cy="1325520"/>
+            <a:chExt cx="5352120" cy="1325160"/>
           </a:xfrm>
         </p:grpSpPr>
         <p:sp>
@@ -35736,7 +35736,7 @@
           <p:spPr>
             <a:xfrm>
               <a:off x="396720" y="4254840"/>
-              <a:ext cx="5352480" cy="244800"/>
+              <a:ext cx="5352120" cy="244440"/>
             </a:xfrm>
             <a:prstGeom prst="rect">
               <a:avLst/>
@@ -35825,7 +35825,7 @@
           <p:spPr>
             <a:xfrm>
               <a:off x="396720" y="4738320"/>
-              <a:ext cx="5352480" cy="842040"/>
+              <a:ext cx="5352120" cy="841680"/>
             </a:xfrm>
             <a:prstGeom prst="rect">
               <a:avLst/>
@@ -35923,7 +35923,7 @@
         <p:spPr>
           <a:xfrm>
             <a:off x="210240" y="334080"/>
-            <a:ext cx="8101440" cy="464400"/>
+            <a:ext cx="8101080" cy="464040"/>
           </a:xfrm>
           <a:prstGeom prst="rect">
             <a:avLst/>
@@ -36035,7 +36035,7 @@
         <p:spPr>
           <a:xfrm>
             <a:off x="360" y="5229360"/>
-            <a:ext cx="10077480" cy="246600"/>
+            <a:ext cx="10077120" cy="246240"/>
           </a:xfrm>
           <a:prstGeom prst="rect">
             <a:avLst/>
@@ -36086,7 +36086,7 @@
         <p:spPr>
           <a:xfrm>
             <a:off x="178560" y="1156320"/>
-            <a:ext cx="9721080" cy="3948120"/>
+            <a:ext cx="9720720" cy="3948120"/>
           </a:xfrm>
           <a:prstGeom prst="rect">
             <a:avLst/>
@@ -36800,7 +36800,7 @@
         <p:spPr>
           <a:xfrm>
             <a:off x="210240" y="334080"/>
-            <a:ext cx="8101440" cy="464400"/>
+            <a:ext cx="8101080" cy="464040"/>
           </a:xfrm>
           <a:prstGeom prst="rect">
             <a:avLst/>
@@ -36912,7 +36912,7 @@
         <p:spPr>
           <a:xfrm>
             <a:off x="360" y="5229360"/>
-            <a:ext cx="10077480" cy="246600"/>
+            <a:ext cx="10077120" cy="246240"/>
           </a:xfrm>
           <a:prstGeom prst="rect">
             <a:avLst/>
@@ -36963,7 +36963,7 @@
         <p:spPr>
           <a:xfrm>
             <a:off x="178560" y="1156320"/>
-            <a:ext cx="9721080" cy="2941560"/>
+            <a:ext cx="9720720" cy="2941560"/>
           </a:xfrm>
           <a:prstGeom prst="rect">
             <a:avLst/>
@@ -37466,7 +37466,7 @@
         <p:spPr>
           <a:xfrm>
             <a:off x="210240" y="334080"/>
-            <a:ext cx="8101440" cy="464400"/>
+            <a:ext cx="8101080" cy="464040"/>
           </a:xfrm>
           <a:prstGeom prst="rect">
             <a:avLst/>
@@ -37578,7 +37578,7 @@
         <p:spPr>
           <a:xfrm>
             <a:off x="360" y="5229360"/>
-            <a:ext cx="10077480" cy="246600"/>
+            <a:ext cx="10077120" cy="246240"/>
           </a:xfrm>
           <a:prstGeom prst="rect">
             <a:avLst/>
@@ -37629,7 +37629,7 @@
         <p:spPr>
           <a:xfrm>
             <a:off x="178560" y="1156320"/>
-            <a:ext cx="9721080" cy="2941560"/>
+            <a:ext cx="9720720" cy="2941560"/>
           </a:xfrm>
           <a:prstGeom prst="rect">
             <a:avLst/>
@@ -38165,7 +38165,7 @@
         <p:spPr>
           <a:xfrm>
             <a:off x="210240" y="334080"/>
-            <a:ext cx="8101440" cy="464400"/>
+            <a:ext cx="8101080" cy="464040"/>
           </a:xfrm>
           <a:prstGeom prst="rect">
             <a:avLst/>
@@ -38277,7 +38277,7 @@
         <p:spPr>
           <a:xfrm>
             <a:off x="360" y="5229360"/>
-            <a:ext cx="10077480" cy="246600"/>
+            <a:ext cx="10077120" cy="246240"/>
           </a:xfrm>
           <a:prstGeom prst="rect">
             <a:avLst/>
@@ -38328,7 +38328,7 @@
         <p:spPr>
           <a:xfrm>
             <a:off x="178560" y="1156320"/>
-            <a:ext cx="9721080" cy="3780360"/>
+            <a:ext cx="9720720" cy="3780360"/>
           </a:xfrm>
           <a:prstGeom prst="rect">
             <a:avLst/>
@@ -38953,7 +38953,7 @@
         <p:spPr>
           <a:xfrm>
             <a:off x="5398920" y="1156680"/>
-            <a:ext cx="9721080" cy="1096200"/>
+            <a:ext cx="9720720" cy="1096200"/>
           </a:xfrm>
           <a:prstGeom prst="rect">
             <a:avLst/>
@@ -39170,7 +39170,7 @@
         <p:spPr>
           <a:xfrm>
             <a:off x="210240" y="334080"/>
-            <a:ext cx="8101440" cy="464400"/>
+            <a:ext cx="8101080" cy="464040"/>
           </a:xfrm>
           <a:prstGeom prst="rect">
             <a:avLst/>
@@ -39282,7 +39282,7 @@
         <p:spPr>
           <a:xfrm>
             <a:off x="360" y="5229360"/>
-            <a:ext cx="10077480" cy="246600"/>
+            <a:ext cx="10077120" cy="246240"/>
           </a:xfrm>
           <a:prstGeom prst="rect">
             <a:avLst/>
@@ -39333,7 +39333,7 @@
         <p:spPr>
           <a:xfrm>
             <a:off x="178560" y="1156320"/>
-            <a:ext cx="9721080" cy="257400"/>
+            <a:ext cx="9720720" cy="257400"/>
           </a:xfrm>
           <a:prstGeom prst="rect">
             <a:avLst/>
@@ -40510,7 +40510,7 @@
         <p:spPr>
           <a:xfrm>
             <a:off x="178920" y="3676680"/>
-            <a:ext cx="9721080" cy="1096200"/>
+            <a:ext cx="9720720" cy="1096200"/>
           </a:xfrm>
           <a:prstGeom prst="rect">
             <a:avLst/>

--- a/6 семестр/Автоматизированные системы управление элементами промышленных и административных объектов/Практическая работа №16/Презентация ВраженкоДО.pptx
+++ b/6 семестр/Автоматизированные системы управление элементами промышленных и административных объектов/Практическая работа №16/Презентация ВраженкоДО.pptx
@@ -96,7 +96,7 @@
         <p:spPr>
           <a:xfrm>
             <a:off x="0" y="-69480"/>
-            <a:ext cx="10077120" cy="5671800"/>
+            <a:ext cx="10076760" cy="5671440"/>
           </a:xfrm>
           <a:prstGeom prst="rect">
             <a:avLst/>
@@ -120,7 +120,7 @@
         <p:spPr>
           <a:xfrm>
             <a:off x="609840" y="469800"/>
-            <a:ext cx="2724120" cy="812160"/>
+            <a:ext cx="2723760" cy="811800"/>
           </a:xfrm>
           <a:prstGeom prst="rect">
             <a:avLst/>
@@ -144,7 +144,7 @@
         <p:spPr>
           <a:xfrm>
             <a:off x="0" y="0"/>
-            <a:ext cx="10077120" cy="5667120"/>
+            <a:ext cx="10076760" cy="5666760"/>
           </a:xfrm>
           <a:prstGeom prst="rect">
             <a:avLst/>
@@ -168,7 +168,7 @@
         <p:spPr>
           <a:xfrm>
             <a:off x="504000" y="225720"/>
-            <a:ext cx="9069120" cy="943920"/>
+            <a:ext cx="9068760" cy="943560"/>
           </a:xfrm>
           <a:prstGeom prst="rect">
             <a:avLst/>
@@ -227,7 +227,7 @@
         <p:spPr>
           <a:xfrm>
             <a:off x="504000" y="1326600"/>
-            <a:ext cx="9069120" cy="3285360"/>
+            <a:ext cx="9068760" cy="3285000"/>
           </a:xfrm>
           <a:prstGeom prst="rect">
             <a:avLst/>
@@ -530,7 +530,7 @@
         <p:spPr>
           <a:xfrm>
             <a:off x="0" y="-69480"/>
-            <a:ext cx="10077120" cy="5671800"/>
+            <a:ext cx="10076760" cy="5671440"/>
           </a:xfrm>
           <a:prstGeom prst="rect">
             <a:avLst/>
@@ -554,7 +554,7 @@
         <p:spPr>
           <a:xfrm>
             <a:off x="609840" y="469800"/>
-            <a:ext cx="2724120" cy="812160"/>
+            <a:ext cx="2723760" cy="811800"/>
           </a:xfrm>
           <a:prstGeom prst="rect">
             <a:avLst/>
@@ -578,7 +578,7 @@
         <p:spPr>
           <a:xfrm>
             <a:off x="494640" y="428400"/>
-            <a:ext cx="3548520" cy="711360"/>
+            <a:ext cx="3548160" cy="711000"/>
           </a:xfrm>
           <a:prstGeom prst="rect">
             <a:avLst/>
@@ -602,7 +602,7 @@
         <p:spPr>
           <a:xfrm>
             <a:off x="0" y="0"/>
-            <a:ext cx="10077120" cy="5667120"/>
+            <a:ext cx="10076760" cy="5666760"/>
           </a:xfrm>
           <a:prstGeom prst="rect">
             <a:avLst/>
@@ -626,7 +626,7 @@
         <p:spPr>
           <a:xfrm>
             <a:off x="504000" y="225720"/>
-            <a:ext cx="9069120" cy="943920"/>
+            <a:ext cx="9068760" cy="943560"/>
           </a:xfrm>
           <a:prstGeom prst="rect">
             <a:avLst/>
@@ -685,7 +685,7 @@
         <p:spPr>
           <a:xfrm>
             <a:off x="504000" y="1326600"/>
-            <a:ext cx="9069120" cy="3285360"/>
+            <a:ext cx="9068760" cy="3285000"/>
           </a:xfrm>
           <a:prstGeom prst="rect">
             <a:avLst/>
@@ -988,7 +988,7 @@
         <p:spPr>
           <a:xfrm>
             <a:off x="594720" y="5031000"/>
-            <a:ext cx="4422600" cy="159840"/>
+            <a:ext cx="4422240" cy="159480"/>
           </a:xfrm>
           <a:prstGeom prst="rect">
             <a:avLst/>
@@ -1047,7 +1047,7 @@
         <p:spPr>
           <a:xfrm>
             <a:off x="9024480" y="5043240"/>
-            <a:ext cx="616680" cy="148320"/>
+            <a:ext cx="616320" cy="147960"/>
           </a:xfrm>
           <a:prstGeom prst="rect">
             <a:avLst/>
@@ -1073,7 +1073,7 @@
                 <a:spcPct val="100000"/>
               </a:lnSpc>
             </a:pPr>
-            <a:fld id="{D38F3703-A336-46D6-8F60-29FD992AC558}" type="slidenum">
+            <a:fld id="{94624DC8-1168-4A9D-AC7B-E0534A5F3DBD}" type="slidenum">
               <a:rPr lang="en-US" sz="700" b="0" u="none" strike="noStrike">
                 <a:solidFill>
                   <a:schemeClr val="dk1"/>
@@ -1109,7 +1109,7 @@
         <p:spPr>
           <a:xfrm>
             <a:off x="594720" y="475200"/>
-            <a:ext cx="7229520" cy="360720"/>
+            <a:ext cx="7229160" cy="360360"/>
           </a:xfrm>
           <a:prstGeom prst="rect">
             <a:avLst/>
@@ -1169,7 +1169,7 @@
         <p:spPr>
           <a:xfrm>
             <a:off x="594720" y="1625760"/>
-            <a:ext cx="4422600" cy="2712960"/>
+            <a:ext cx="4422240" cy="2712600"/>
           </a:xfrm>
           <a:prstGeom prst="rect">
             <a:avLst/>
@@ -1229,7 +1229,7 @@
         <p:spPr>
           <a:xfrm>
             <a:off x="5300640" y="1625760"/>
-            <a:ext cx="4340520" cy="2702880"/>
+            <a:ext cx="4340160" cy="2702520"/>
           </a:xfrm>
           <a:prstGeom prst="rect">
             <a:avLst/>
@@ -1532,7 +1532,7 @@
         <p:spPr>
           <a:xfrm>
             <a:off x="8492400" y="410040"/>
-            <a:ext cx="1171440" cy="347760"/>
+            <a:ext cx="1171080" cy="347400"/>
           </a:xfrm>
           <a:prstGeom prst="rect">
             <a:avLst/>
@@ -1556,7 +1556,7 @@
         <p:spPr>
           <a:xfrm>
             <a:off x="494640" y="428400"/>
-            <a:ext cx="3548520" cy="711360"/>
+            <a:ext cx="3548160" cy="711000"/>
           </a:xfrm>
           <a:prstGeom prst="rect">
             <a:avLst/>
@@ -1580,7 +1580,7 @@
         <p:spPr>
           <a:xfrm>
             <a:off x="0" y="0"/>
-            <a:ext cx="10077120" cy="5667120"/>
+            <a:ext cx="10076760" cy="5666760"/>
           </a:xfrm>
           <a:prstGeom prst="rect">
             <a:avLst/>
@@ -1604,7 +1604,7 @@
         <p:spPr>
           <a:xfrm>
             <a:off x="504000" y="225720"/>
-            <a:ext cx="9069120" cy="943920"/>
+            <a:ext cx="9068760" cy="943560"/>
           </a:xfrm>
           <a:prstGeom prst="rect">
             <a:avLst/>
@@ -1663,7 +1663,7 @@
         <p:spPr>
           <a:xfrm>
             <a:off x="504000" y="1326600"/>
-            <a:ext cx="9069120" cy="3285360"/>
+            <a:ext cx="9068760" cy="3285000"/>
           </a:xfrm>
           <a:prstGeom prst="rect">
             <a:avLst/>
@@ -1966,7 +1966,7 @@
         <p:spPr>
           <a:xfrm>
             <a:off x="594720" y="5031000"/>
-            <a:ext cx="4422600" cy="159840"/>
+            <a:ext cx="4422240" cy="159480"/>
           </a:xfrm>
           <a:prstGeom prst="rect">
             <a:avLst/>
@@ -2025,7 +2025,7 @@
         <p:spPr>
           <a:xfrm>
             <a:off x="9024480" y="5043240"/>
-            <a:ext cx="616680" cy="148320"/>
+            <a:ext cx="616320" cy="147960"/>
           </a:xfrm>
           <a:prstGeom prst="rect">
             <a:avLst/>
@@ -2051,7 +2051,7 @@
                 <a:spcPct val="100000"/>
               </a:lnSpc>
             </a:pPr>
-            <a:fld id="{CBA7F19E-FC90-4F22-9E1A-05D86B42700A}" type="slidenum">
+            <a:fld id="{F2A618F4-54C6-4872-8719-BC4856781C2E}" type="slidenum">
               <a:rPr lang="en-US" sz="700" b="0" u="none" strike="noStrike">
                 <a:solidFill>
                   <a:schemeClr val="dk1"/>
@@ -2087,7 +2087,7 @@
         <p:spPr>
           <a:xfrm>
             <a:off x="594720" y="475200"/>
-            <a:ext cx="7229520" cy="360720"/>
+            <a:ext cx="7229160" cy="360360"/>
           </a:xfrm>
           <a:prstGeom prst="rect">
             <a:avLst/>
@@ -2147,7 +2147,7 @@
         <p:spPr>
           <a:xfrm>
             <a:off x="594720" y="1625760"/>
-            <a:ext cx="4422600" cy="1352160"/>
+            <a:ext cx="4422240" cy="1351800"/>
           </a:xfrm>
           <a:prstGeom prst="rect">
             <a:avLst/>
@@ -2211,7 +2211,7 @@
         <p:spPr>
           <a:xfrm>
             <a:off x="5300640" y="1625760"/>
-            <a:ext cx="4340520" cy="1352160"/>
+            <a:ext cx="4340160" cy="1351800"/>
           </a:xfrm>
           <a:prstGeom prst="rect">
             <a:avLst/>
@@ -2275,7 +2275,7 @@
         <p:spPr>
           <a:xfrm>
             <a:off x="594720" y="3100320"/>
-            <a:ext cx="4422600" cy="1352160"/>
+            <a:ext cx="4422240" cy="1351800"/>
           </a:xfrm>
           <a:prstGeom prst="rect">
             <a:avLst/>
@@ -2339,7 +2339,7 @@
         <p:spPr>
           <a:xfrm>
             <a:off x="5300640" y="3100320"/>
-            <a:ext cx="4340520" cy="1352160"/>
+            <a:ext cx="4340160" cy="1351800"/>
           </a:xfrm>
           <a:prstGeom prst="rect">
             <a:avLst/>
@@ -2432,7 +2432,7 @@
         <p:spPr>
           <a:xfrm>
             <a:off x="446400" y="0"/>
-            <a:ext cx="9070920" cy="871200"/>
+            <a:ext cx="9070560" cy="870840"/>
           </a:xfrm>
           <a:prstGeom prst="rect">
             <a:avLst/>
@@ -2491,7 +2491,7 @@
         <p:spPr>
           <a:xfrm>
             <a:off x="360" y="0"/>
-            <a:ext cx="40618080" cy="360"/>
+            <a:ext cx="40617720" cy="360"/>
           </a:xfrm>
           <a:prstGeom prst="rect">
             <a:avLst/>
@@ -2719,7 +2719,7 @@
         <p:spPr>
           <a:xfrm>
             <a:off x="594720" y="1625760"/>
-            <a:ext cx="4422600" cy="2018160"/>
+            <a:ext cx="4422240" cy="2017800"/>
           </a:xfrm>
           <a:prstGeom prst="rect">
             <a:avLst/>
@@ -2993,7 +2993,7 @@
         <p:spPr>
           <a:xfrm>
             <a:off x="5300640" y="1625760"/>
-            <a:ext cx="4340520" cy="2018160"/>
+            <a:ext cx="4340160" cy="2017800"/>
           </a:xfrm>
           <a:prstGeom prst="rect">
             <a:avLst/>
@@ -3267,7 +3267,7 @@
         <p:spPr>
           <a:xfrm>
             <a:off x="594720" y="5031000"/>
-            <a:ext cx="4422600" cy="159840"/>
+            <a:ext cx="4422240" cy="159480"/>
           </a:xfrm>
           <a:prstGeom prst="rect">
             <a:avLst/>
@@ -3326,7 +3326,7 @@
         <p:spPr>
           <a:xfrm>
             <a:off x="9024480" y="5043240"/>
-            <a:ext cx="616680" cy="148320"/>
+            <a:ext cx="616320" cy="147960"/>
           </a:xfrm>
           <a:prstGeom prst="rect">
             <a:avLst/>
@@ -3352,7 +3352,7 @@
                 <a:spcPct val="100000"/>
               </a:lnSpc>
             </a:pPr>
-            <a:fld id="{213A3078-5C3D-4FEA-9619-128FAF10A977}" type="slidenum">
+            <a:fld id="{0A0BC0AE-391E-4B5A-A04C-058B30DD0F7F}" type="slidenum">
               <a:rPr lang="en-US" sz="700" b="0" u="none" strike="noStrike">
                 <a:solidFill>
                   <a:schemeClr val="dk1"/>
@@ -3388,7 +3388,7 @@
         <p:spPr>
           <a:xfrm>
             <a:off x="594720" y="475200"/>
-            <a:ext cx="7229520" cy="360720"/>
+            <a:ext cx="7229160" cy="360360"/>
           </a:xfrm>
           <a:prstGeom prst="rect">
             <a:avLst/>
@@ -3448,7 +3448,7 @@
         <p:spPr>
           <a:xfrm>
             <a:off x="594720" y="3835800"/>
-            <a:ext cx="4422600" cy="836280"/>
+            <a:ext cx="4422240" cy="835920"/>
           </a:xfrm>
           <a:prstGeom prst="rect">
             <a:avLst/>
@@ -3508,7 +3508,7 @@
         <p:spPr>
           <a:xfrm>
             <a:off x="5300640" y="3831840"/>
-            <a:ext cx="4340520" cy="836280"/>
+            <a:ext cx="4340160" cy="835920"/>
           </a:xfrm>
           <a:prstGeom prst="rect">
             <a:avLst/>
@@ -3597,7 +3597,7 @@
         <p:spPr>
           <a:xfrm>
             <a:off x="594720" y="1625760"/>
-            <a:ext cx="4422600" cy="3081960"/>
+            <a:ext cx="4422240" cy="3081600"/>
           </a:xfrm>
           <a:prstGeom prst="rect">
             <a:avLst/>
@@ -3660,7 +3660,7 @@
         <p:spPr>
           <a:xfrm>
             <a:off x="5300640" y="1625760"/>
-            <a:ext cx="4340520" cy="3081960"/>
+            <a:ext cx="4340160" cy="3081600"/>
           </a:xfrm>
           <a:prstGeom prst="rect">
             <a:avLst/>
@@ -3723,7 +3723,7 @@
         <p:spPr>
           <a:xfrm>
             <a:off x="594720" y="5031000"/>
-            <a:ext cx="4422600" cy="159840"/>
+            <a:ext cx="4422240" cy="159480"/>
           </a:xfrm>
           <a:prstGeom prst="rect">
             <a:avLst/>
@@ -3782,7 +3782,7 @@
         <p:spPr>
           <a:xfrm>
             <a:off x="9024480" y="5043240"/>
-            <a:ext cx="616680" cy="148320"/>
+            <a:ext cx="616320" cy="147960"/>
           </a:xfrm>
           <a:prstGeom prst="rect">
             <a:avLst/>
@@ -3808,7 +3808,7 @@
                 <a:spcPct val="100000"/>
               </a:lnSpc>
             </a:pPr>
-            <a:fld id="{AD6BF948-F1D2-4DE0-809E-DFA0088C86F3}" type="slidenum">
+            <a:fld id="{92AB686F-A190-4DD1-9E5E-868B7CD007B9}" type="slidenum">
               <a:rPr lang="en-US" sz="700" b="0" u="none" strike="noStrike">
                 <a:solidFill>
                   <a:schemeClr val="dk1"/>
@@ -3844,7 +3844,7 @@
         <p:spPr>
           <a:xfrm>
             <a:off x="594720" y="475200"/>
-            <a:ext cx="7229520" cy="360720"/>
+            <a:ext cx="7229160" cy="360360"/>
           </a:xfrm>
           <a:prstGeom prst="rect">
             <a:avLst/>
@@ -4034,7 +4034,7 @@
         <p:spPr>
           <a:xfrm>
             <a:off x="9024480" y="5043240"/>
-            <a:ext cx="616680" cy="148320"/>
+            <a:ext cx="616320" cy="147960"/>
           </a:xfrm>
           <a:prstGeom prst="rect">
             <a:avLst/>
@@ -4060,7 +4060,7 @@
                 <a:spcPct val="100000"/>
               </a:lnSpc>
             </a:pPr>
-            <a:fld id="{C293CB57-96F4-44C9-AE37-02E54DA0968D}" type="slidenum">
+            <a:fld id="{1037613D-E108-45F9-9152-316C0B109F14}" type="slidenum">
               <a:rPr lang="en-US" sz="700" b="0" u="none" strike="noStrike">
                 <a:solidFill>
                   <a:schemeClr val="dk1"/>
@@ -4118,7 +4118,7 @@
         <p:spPr>
           <a:xfrm>
             <a:off x="3745080" y="2278080"/>
-            <a:ext cx="6944040" cy="3025800"/>
+            <a:ext cx="6943680" cy="3025440"/>
           </a:xfrm>
           <a:prstGeom prst="rect">
             <a:avLst/>
@@ -4164,7 +4164,7 @@
         <p:spPr>
           <a:xfrm>
             <a:off x="198360" y="2180520"/>
-            <a:ext cx="6666840" cy="1365480"/>
+            <a:ext cx="6666480" cy="1365120"/>
           </a:xfrm>
           <a:prstGeom prst="rect">
             <a:avLst/>
@@ -4221,7 +4221,7 @@
         <p:spPr>
           <a:xfrm>
             <a:off x="5650200" y="4109400"/>
-            <a:ext cx="6282000" cy="236880"/>
+            <a:ext cx="6281640" cy="236520"/>
           </a:xfrm>
           <a:prstGeom prst="rect">
             <a:avLst/>
@@ -4273,7 +4273,7 @@
         <p:spPr>
           <a:xfrm>
             <a:off x="198360" y="4559400"/>
-            <a:ext cx="3370680" cy="790560"/>
+            <a:ext cx="3370320" cy="790200"/>
           </a:xfrm>
           <a:prstGeom prst="rect">
             <a:avLst/>
@@ -4371,7 +4371,7 @@
         <p:spPr>
           <a:xfrm>
             <a:off x="3948480" y="5306040"/>
-            <a:ext cx="2180160" cy="439920"/>
+            <a:ext cx="2179800" cy="439560"/>
           </a:xfrm>
           <a:prstGeom prst="rect">
             <a:avLst/>
@@ -4458,7 +4458,7 @@
         <p:spPr>
           <a:xfrm>
             <a:off x="210240" y="334080"/>
-            <a:ext cx="8101080" cy="464040"/>
+            <a:ext cx="8100720" cy="463680"/>
           </a:xfrm>
           <a:prstGeom prst="rect">
             <a:avLst/>
@@ -4570,7 +4570,7 @@
         <p:spPr>
           <a:xfrm>
             <a:off x="360" y="5229360"/>
-            <a:ext cx="10077120" cy="246240"/>
+            <a:ext cx="10076760" cy="245880"/>
           </a:xfrm>
           <a:prstGeom prst="rect">
             <a:avLst/>
@@ -4621,7 +4621,7 @@
         <p:spPr>
           <a:xfrm>
             <a:off x="178560" y="1156320"/>
-            <a:ext cx="9720720" cy="3277080"/>
+            <a:ext cx="9720360" cy="3277080"/>
           </a:xfrm>
           <a:prstGeom prst="rect">
             <a:avLst/>
@@ -5150,7 +5150,7 @@
         <p:spPr>
           <a:xfrm>
             <a:off x="7579440" y="1944000"/>
-            <a:ext cx="2463480" cy="2806200"/>
+            <a:ext cx="2463120" cy="2805840"/>
           </a:xfrm>
           <a:prstGeom prst="rect">
             <a:avLst/>
@@ -5174,7 +5174,7 @@
         <p:spPr>
           <a:xfrm>
             <a:off x="5328000" y="2812680"/>
-            <a:ext cx="2518200" cy="2369520"/>
+            <a:ext cx="2517840" cy="2369160"/>
           </a:xfrm>
           <a:prstGeom prst="rect">
             <a:avLst/>
@@ -5198,7 +5198,7 @@
         <p:spPr>
           <a:xfrm>
             <a:off x="3096000" y="1519200"/>
-            <a:ext cx="2482200" cy="2791800"/>
+            <a:ext cx="2481840" cy="2791440"/>
           </a:xfrm>
           <a:prstGeom prst="rect">
             <a:avLst/>
@@ -5248,7 +5248,7 @@
         <p:spPr>
           <a:xfrm>
             <a:off x="210240" y="334080"/>
-            <a:ext cx="8101080" cy="464040"/>
+            <a:ext cx="8100720" cy="463680"/>
           </a:xfrm>
           <a:prstGeom prst="rect">
             <a:avLst/>
@@ -5360,7 +5360,7 @@
         <p:spPr>
           <a:xfrm>
             <a:off x="360" y="5229360"/>
-            <a:ext cx="10077120" cy="246240"/>
+            <a:ext cx="10076760" cy="245880"/>
           </a:xfrm>
           <a:prstGeom prst="rect">
             <a:avLst/>
@@ -5415,7 +5415,7 @@
         <p:spPr>
           <a:xfrm>
             <a:off x="3960000" y="3161520"/>
-            <a:ext cx="3239640" cy="2035080"/>
+            <a:ext cx="3239280" cy="2034720"/>
           </a:xfrm>
           <a:prstGeom prst="rect">
             <a:avLst/>
@@ -5439,7 +5439,7 @@
         <p:spPr>
           <a:xfrm>
             <a:off x="180000" y="1148040"/>
-            <a:ext cx="3778200" cy="2280240"/>
+            <a:ext cx="3777840" cy="2279880"/>
           </a:xfrm>
           <a:prstGeom prst="rect">
             <a:avLst/>
@@ -5463,7 +5463,7 @@
         <p:spPr>
           <a:xfrm>
             <a:off x="6876000" y="910440"/>
-            <a:ext cx="3130200" cy="2702520"/>
+            <a:ext cx="3129840" cy="2702160"/>
           </a:xfrm>
           <a:prstGeom prst="rect">
             <a:avLst/>
@@ -5513,7 +5513,7 @@
         <p:spPr>
           <a:xfrm>
             <a:off x="210240" y="334080"/>
-            <a:ext cx="8101080" cy="464040"/>
+            <a:ext cx="8100720" cy="463680"/>
           </a:xfrm>
           <a:prstGeom prst="rect">
             <a:avLst/>
@@ -5625,7 +5625,7 @@
         <p:spPr>
           <a:xfrm>
             <a:off x="360" y="5229360"/>
-            <a:ext cx="10077120" cy="246240"/>
+            <a:ext cx="10076760" cy="245880"/>
           </a:xfrm>
           <a:prstGeom prst="rect">
             <a:avLst/>
@@ -5680,7 +5680,7 @@
         <p:spPr>
           <a:xfrm>
             <a:off x="2430360" y="1046160"/>
-            <a:ext cx="5218200" cy="3936600"/>
+            <a:ext cx="5217840" cy="3936240"/>
           </a:xfrm>
           <a:prstGeom prst="rect">
             <a:avLst/>
@@ -5730,7 +5730,7 @@
         <p:spPr>
           <a:xfrm>
             <a:off x="210240" y="334080"/>
-            <a:ext cx="8101080" cy="464040"/>
+            <a:ext cx="8100720" cy="463680"/>
           </a:xfrm>
           <a:prstGeom prst="rect">
             <a:avLst/>
@@ -5842,7 +5842,7 @@
         <p:spPr>
           <a:xfrm>
             <a:off x="360" y="5229360"/>
-            <a:ext cx="10077120" cy="246240"/>
+            <a:ext cx="10076760" cy="245880"/>
           </a:xfrm>
           <a:prstGeom prst="rect">
             <a:avLst/>
@@ -5893,7 +5893,7 @@
         <p:spPr>
           <a:xfrm>
             <a:off x="178560" y="1156320"/>
-            <a:ext cx="9720720" cy="3780360"/>
+            <a:ext cx="9720360" cy="3780360"/>
           </a:xfrm>
           <a:prstGeom prst="rect">
             <a:avLst/>
@@ -6559,7 +6559,7 @@
         <p:spPr>
           <a:xfrm>
             <a:off x="210240" y="334080"/>
-            <a:ext cx="8101080" cy="464040"/>
+            <a:ext cx="8100720" cy="463680"/>
           </a:xfrm>
           <a:prstGeom prst="rect">
             <a:avLst/>
@@ -6671,7 +6671,7 @@
         <p:spPr>
           <a:xfrm>
             <a:off x="360" y="5229360"/>
-            <a:ext cx="10077120" cy="246240"/>
+            <a:ext cx="10076760" cy="245880"/>
           </a:xfrm>
           <a:prstGeom prst="rect">
             <a:avLst/>
@@ -6722,7 +6722,7 @@
         <p:spPr>
           <a:xfrm>
             <a:off x="178560" y="1156320"/>
-            <a:ext cx="9720720" cy="3780360"/>
+            <a:ext cx="9720360" cy="3780360"/>
           </a:xfrm>
           <a:prstGeom prst="rect">
             <a:avLst/>
@@ -7399,7 +7399,7 @@
         <p:spPr>
           <a:xfrm>
             <a:off x="210240" y="334080"/>
-            <a:ext cx="8101080" cy="464040"/>
+            <a:ext cx="8100720" cy="463680"/>
           </a:xfrm>
           <a:prstGeom prst="rect">
             <a:avLst/>
@@ -7511,7 +7511,7 @@
         <p:spPr>
           <a:xfrm>
             <a:off x="360" y="5229360"/>
-            <a:ext cx="10077120" cy="246240"/>
+            <a:ext cx="10076760" cy="245880"/>
           </a:xfrm>
           <a:prstGeom prst="rect">
             <a:avLst/>
@@ -7562,7 +7562,7 @@
         <p:spPr>
           <a:xfrm>
             <a:off x="178560" y="1156320"/>
-            <a:ext cx="9720720" cy="2941560"/>
+            <a:ext cx="9720360" cy="2941560"/>
           </a:xfrm>
           <a:prstGeom prst="rect">
             <a:avLst/>
@@ -8065,7 +8065,7 @@
         <p:spPr>
           <a:xfrm>
             <a:off x="210240" y="334080"/>
-            <a:ext cx="8101080" cy="464040"/>
+            <a:ext cx="8100720" cy="463680"/>
           </a:xfrm>
           <a:prstGeom prst="rect">
             <a:avLst/>
@@ -8177,7 +8177,7 @@
         <p:spPr>
           <a:xfrm>
             <a:off x="360" y="5229360"/>
-            <a:ext cx="10077120" cy="246240"/>
+            <a:ext cx="10076760" cy="245880"/>
           </a:xfrm>
           <a:prstGeom prst="rect">
             <a:avLst/>
@@ -8228,7 +8228,7 @@
         <p:spPr>
           <a:xfrm>
             <a:off x="178560" y="1156320"/>
-            <a:ext cx="9720720" cy="1599480"/>
+            <a:ext cx="9720360" cy="1599480"/>
           </a:xfrm>
           <a:prstGeom prst="rect">
             <a:avLst/>
@@ -9062,7 +9062,7 @@
         <p:spPr>
           <a:xfrm>
             <a:off x="5184000" y="1156320"/>
-            <a:ext cx="9720720" cy="1431720"/>
+            <a:ext cx="9720360" cy="1431720"/>
           </a:xfrm>
           <a:prstGeom prst="rect">
             <a:avLst/>
@@ -9331,7 +9331,7 @@
         <p:spPr>
           <a:xfrm>
             <a:off x="210240" y="334080"/>
-            <a:ext cx="8101080" cy="464040"/>
+            <a:ext cx="8100720" cy="463680"/>
           </a:xfrm>
           <a:prstGeom prst="rect">
             <a:avLst/>
@@ -9443,7 +9443,7 @@
         <p:spPr>
           <a:xfrm>
             <a:off x="360" y="5229360"/>
-            <a:ext cx="10077120" cy="246240"/>
+            <a:ext cx="10076760" cy="245880"/>
           </a:xfrm>
           <a:prstGeom prst="rect">
             <a:avLst/>
@@ -9494,7 +9494,7 @@
         <p:spPr>
           <a:xfrm>
             <a:off x="178560" y="1156320"/>
-            <a:ext cx="9720720" cy="257400"/>
+            <a:ext cx="9720360" cy="257400"/>
           </a:xfrm>
           <a:prstGeom prst="rect">
             <a:avLst/>
@@ -9551,7 +9551,7 @@
         <p:spPr>
           <a:xfrm>
             <a:off x="180000" y="2524320"/>
-            <a:ext cx="9898560" cy="1431720"/>
+            <a:ext cx="9898200" cy="1431720"/>
           </a:xfrm>
           <a:prstGeom prst="rect">
             <a:avLst/>
@@ -10178,7 +10178,7 @@
         <p:spPr>
           <a:xfrm>
             <a:off x="4860000" y="1156680"/>
-            <a:ext cx="9898560" cy="2773800"/>
+            <a:ext cx="9898200" cy="2773800"/>
           </a:xfrm>
           <a:prstGeom prst="rect">
             <a:avLst/>
@@ -10677,7 +10677,7 @@
         <p:spPr>
           <a:xfrm>
             <a:off x="210240" y="334080"/>
-            <a:ext cx="8101080" cy="464040"/>
+            <a:ext cx="8100720" cy="463680"/>
           </a:xfrm>
           <a:prstGeom prst="rect">
             <a:avLst/>
@@ -10789,7 +10789,7 @@
         <p:spPr>
           <a:xfrm>
             <a:off x="360" y="5229360"/>
-            <a:ext cx="10077120" cy="246240"/>
+            <a:ext cx="10076760" cy="245880"/>
           </a:xfrm>
           <a:prstGeom prst="rect">
             <a:avLst/>
@@ -10840,7 +10840,7 @@
         <p:spPr>
           <a:xfrm>
             <a:off x="178560" y="1156320"/>
-            <a:ext cx="9720720" cy="3444840"/>
+            <a:ext cx="9720360" cy="3444840"/>
           </a:xfrm>
           <a:prstGeom prst="rect">
             <a:avLst/>
@@ -11421,7 +11421,7 @@
         <p:spPr>
           <a:xfrm>
             <a:off x="210240" y="334080"/>
-            <a:ext cx="8101080" cy="464040"/>
+            <a:ext cx="8100720" cy="463680"/>
           </a:xfrm>
           <a:prstGeom prst="rect">
             <a:avLst/>
@@ -11533,7 +11533,7 @@
         <p:spPr>
           <a:xfrm>
             <a:off x="360" y="5229360"/>
-            <a:ext cx="10077120" cy="246240"/>
+            <a:ext cx="10076760" cy="245880"/>
           </a:xfrm>
           <a:prstGeom prst="rect">
             <a:avLst/>
@@ -11584,7 +11584,7 @@
         <p:spPr>
           <a:xfrm>
             <a:off x="178560" y="1156320"/>
-            <a:ext cx="9720720" cy="3277080"/>
+            <a:ext cx="9720360" cy="3277080"/>
           </a:xfrm>
           <a:prstGeom prst="rect">
             <a:avLst/>
@@ -12150,7 +12150,7 @@
         <p:spPr>
           <a:xfrm>
             <a:off x="210240" y="334080"/>
-            <a:ext cx="8101080" cy="464040"/>
+            <a:ext cx="8100720" cy="463680"/>
           </a:xfrm>
           <a:prstGeom prst="rect">
             <a:avLst/>
@@ -12262,7 +12262,7 @@
         <p:spPr>
           <a:xfrm>
             <a:off x="360" y="5229360"/>
-            <a:ext cx="10077120" cy="246240"/>
+            <a:ext cx="10076760" cy="245880"/>
           </a:xfrm>
           <a:prstGeom prst="rect">
             <a:avLst/>
@@ -12316,7 +12316,7 @@
         <p:spPr>
           <a:xfrm>
             <a:off x="178560" y="1156320"/>
-            <a:ext cx="9720720" cy="2941560"/>
+            <a:ext cx="9720360" cy="2941560"/>
           </a:xfrm>
           <a:prstGeom prst="rect">
             <a:avLst/>
@@ -12793,7 +12793,7 @@
         <p:spPr>
           <a:xfrm>
             <a:off x="210240" y="334080"/>
-            <a:ext cx="8101080" cy="464040"/>
+            <a:ext cx="8100720" cy="463680"/>
           </a:xfrm>
           <a:prstGeom prst="rect">
             <a:avLst/>
@@ -12905,7 +12905,7 @@
         <p:spPr>
           <a:xfrm>
             <a:off x="360" y="5229360"/>
-            <a:ext cx="10077120" cy="246240"/>
+            <a:ext cx="10076760" cy="245880"/>
           </a:xfrm>
           <a:prstGeom prst="rect">
             <a:avLst/>
@@ -12960,7 +12960,7 @@
         <p:spPr>
           <a:xfrm>
             <a:off x="621000" y="1049760"/>
-            <a:ext cx="8837280" cy="4145760"/>
+            <a:ext cx="8836920" cy="4145400"/>
           </a:xfrm>
           <a:prstGeom prst="rect">
             <a:avLst/>
@@ -13010,7 +13010,7 @@
         <p:spPr>
           <a:xfrm>
             <a:off x="210240" y="334080"/>
-            <a:ext cx="8101080" cy="464040"/>
+            <a:ext cx="8100720" cy="463680"/>
           </a:xfrm>
           <a:prstGeom prst="rect">
             <a:avLst/>
@@ -13122,7 +13122,7 @@
         <p:spPr>
           <a:xfrm>
             <a:off x="360" y="5229360"/>
-            <a:ext cx="10077120" cy="246240"/>
+            <a:ext cx="10076760" cy="245880"/>
           </a:xfrm>
           <a:prstGeom prst="rect">
             <a:avLst/>
@@ -13173,7 +13173,7 @@
         <p:spPr>
           <a:xfrm>
             <a:off x="178560" y="1156320"/>
-            <a:ext cx="9720720" cy="2941560"/>
+            <a:ext cx="9720360" cy="2941560"/>
           </a:xfrm>
           <a:prstGeom prst="rect">
             <a:avLst/>
@@ -13687,7 +13687,7 @@
         <p:spPr>
           <a:xfrm>
             <a:off x="210240" y="334080"/>
-            <a:ext cx="8101080" cy="464040"/>
+            <a:ext cx="8100720" cy="463680"/>
           </a:xfrm>
           <a:prstGeom prst="rect">
             <a:avLst/>
@@ -13799,7 +13799,7 @@
         <p:spPr>
           <a:xfrm>
             <a:off x="360" y="5229360"/>
-            <a:ext cx="10077120" cy="246240"/>
+            <a:ext cx="10076760" cy="245880"/>
           </a:xfrm>
           <a:prstGeom prst="rect">
             <a:avLst/>
@@ -13850,7 +13850,7 @@
         <p:spPr>
           <a:xfrm>
             <a:off x="5938560" y="1156320"/>
-            <a:ext cx="9720720" cy="2773800"/>
+            <a:ext cx="9720360" cy="2773800"/>
           </a:xfrm>
           <a:prstGeom prst="rect">
             <a:avLst/>
@@ -14297,7 +14297,7 @@
         <p:spPr>
           <a:xfrm>
             <a:off x="180000" y="1156320"/>
-            <a:ext cx="4498560" cy="257400"/>
+            <a:ext cx="4498200" cy="257400"/>
           </a:xfrm>
           <a:prstGeom prst="rect">
             <a:avLst/>
@@ -15135,7 +15135,7 @@
         <p:spPr>
           <a:xfrm>
             <a:off x="210240" y="334080"/>
-            <a:ext cx="8101080" cy="464040"/>
+            <a:ext cx="8100720" cy="463680"/>
           </a:xfrm>
           <a:prstGeom prst="rect">
             <a:avLst/>
@@ -15247,7 +15247,7 @@
         <p:spPr>
           <a:xfrm>
             <a:off x="360" y="5229360"/>
-            <a:ext cx="10077120" cy="246240"/>
+            <a:ext cx="10076760" cy="245880"/>
           </a:xfrm>
           <a:prstGeom prst="rect">
             <a:avLst/>
@@ -15302,7 +15302,7 @@
         <p:spPr>
           <a:xfrm>
             <a:off x="1260000" y="1101600"/>
-            <a:ext cx="7559280" cy="4114440"/>
+            <a:ext cx="7558920" cy="4114080"/>
           </a:xfrm>
           <a:prstGeom prst="rect">
             <a:avLst/>
@@ -15352,7 +15352,7 @@
         <p:spPr>
           <a:xfrm>
             <a:off x="210240" y="334080"/>
-            <a:ext cx="8101080" cy="464040"/>
+            <a:ext cx="8100720" cy="463680"/>
           </a:xfrm>
           <a:prstGeom prst="rect">
             <a:avLst/>
@@ -15464,7 +15464,7 @@
         <p:spPr>
           <a:xfrm>
             <a:off x="360" y="5229360"/>
-            <a:ext cx="10077120" cy="246240"/>
+            <a:ext cx="10076760" cy="245880"/>
           </a:xfrm>
           <a:prstGeom prst="rect">
             <a:avLst/>
@@ -15515,7 +15515,7 @@
         <p:spPr>
           <a:xfrm>
             <a:off x="178560" y="1156320"/>
-            <a:ext cx="9720720" cy="2102760"/>
+            <a:ext cx="9720360" cy="2102760"/>
           </a:xfrm>
           <a:prstGeom prst="rect">
             <a:avLst/>
@@ -15858,7 +15858,7 @@
         <p:spPr>
           <a:xfrm>
             <a:off x="4858560" y="1156680"/>
-            <a:ext cx="9720720" cy="2438280"/>
+            <a:ext cx="9720360" cy="2438280"/>
           </a:xfrm>
           <a:prstGeom prst="rect">
             <a:avLst/>
@@ -16283,7 +16283,7 @@
         <p:spPr>
           <a:xfrm>
             <a:off x="210240" y="334080"/>
-            <a:ext cx="8101080" cy="464040"/>
+            <a:ext cx="8100720" cy="463680"/>
           </a:xfrm>
           <a:prstGeom prst="rect">
             <a:avLst/>
@@ -16395,7 +16395,7 @@
         <p:spPr>
           <a:xfrm>
             <a:off x="360" y="5229360"/>
-            <a:ext cx="10077120" cy="246240"/>
+            <a:ext cx="10076760" cy="245880"/>
           </a:xfrm>
           <a:prstGeom prst="rect">
             <a:avLst/>
@@ -16446,7 +16446,7 @@
         <p:spPr>
           <a:xfrm>
             <a:off x="178560" y="1156320"/>
-            <a:ext cx="9720720" cy="2270520"/>
+            <a:ext cx="9720360" cy="2270520"/>
           </a:xfrm>
           <a:prstGeom prst="rect">
             <a:avLst/>
@@ -16815,7 +16815,7 @@
         <p:spPr>
           <a:xfrm>
             <a:off x="4680000" y="1156320"/>
-            <a:ext cx="5398560" cy="1935000"/>
+            <a:ext cx="5398200" cy="1935000"/>
           </a:xfrm>
           <a:prstGeom prst="rect">
             <a:avLst/>
@@ -17162,7 +17162,7 @@
         <p:spPr>
           <a:xfrm>
             <a:off x="210240" y="334080"/>
-            <a:ext cx="8101080" cy="464040"/>
+            <a:ext cx="8100720" cy="463680"/>
           </a:xfrm>
           <a:prstGeom prst="rect">
             <a:avLst/>
@@ -17274,7 +17274,7 @@
         <p:spPr>
           <a:xfrm>
             <a:off x="360" y="5229360"/>
-            <a:ext cx="10077120" cy="246240"/>
+            <a:ext cx="10076760" cy="245880"/>
           </a:xfrm>
           <a:prstGeom prst="rect">
             <a:avLst/>
@@ -17325,7 +17325,7 @@
         <p:spPr>
           <a:xfrm>
             <a:off x="178560" y="1156320"/>
-            <a:ext cx="9720720" cy="3109320"/>
+            <a:ext cx="9720360" cy="3109320"/>
           </a:xfrm>
           <a:prstGeom prst="rect">
             <a:avLst/>
@@ -17854,7 +17854,7 @@
         <p:spPr>
           <a:xfrm>
             <a:off x="210240" y="334080"/>
-            <a:ext cx="8101080" cy="464040"/>
+            <a:ext cx="8100720" cy="463680"/>
           </a:xfrm>
           <a:prstGeom prst="rect">
             <a:avLst/>
@@ -17966,7 +17966,7 @@
         <p:spPr>
           <a:xfrm>
             <a:off x="360" y="5229360"/>
-            <a:ext cx="10077120" cy="246240"/>
+            <a:ext cx="10076760" cy="245880"/>
           </a:xfrm>
           <a:prstGeom prst="rect">
             <a:avLst/>
@@ -18017,7 +18017,7 @@
         <p:spPr>
           <a:xfrm>
             <a:off x="178560" y="1156320"/>
-            <a:ext cx="9720720" cy="4115880"/>
+            <a:ext cx="9720360" cy="4115880"/>
           </a:xfrm>
           <a:prstGeom prst="rect">
             <a:avLst/>
@@ -19183,7 +19183,7 @@
         <p:spPr>
           <a:xfrm>
             <a:off x="210240" y="334080"/>
-            <a:ext cx="8101080" cy="464040"/>
+            <a:ext cx="8100720" cy="463680"/>
           </a:xfrm>
           <a:prstGeom prst="rect">
             <a:avLst/>
@@ -19295,7 +19295,7 @@
         <p:spPr>
           <a:xfrm>
             <a:off x="360" y="5229360"/>
-            <a:ext cx="10077120" cy="246240"/>
+            <a:ext cx="10076760" cy="245880"/>
           </a:xfrm>
           <a:prstGeom prst="rect">
             <a:avLst/>
@@ -19346,7 +19346,7 @@
         <p:spPr>
           <a:xfrm>
             <a:off x="178560" y="1156320"/>
-            <a:ext cx="9720720" cy="3948120"/>
+            <a:ext cx="9720360" cy="3948120"/>
           </a:xfrm>
           <a:prstGeom prst="rect">
             <a:avLst/>
@@ -19964,7 +19964,7 @@
         <p:spPr>
           <a:xfrm>
             <a:off x="4680000" y="1156320"/>
-            <a:ext cx="4138920" cy="928440"/>
+            <a:ext cx="4138560" cy="928440"/>
           </a:xfrm>
           <a:prstGeom prst="rect">
             <a:avLst/>
@@ -20129,7 +20129,7 @@
         <p:spPr>
           <a:xfrm>
             <a:off x="2412000" y="2116800"/>
-            <a:ext cx="6046920" cy="3030120"/>
+            <a:ext cx="6046560" cy="3029760"/>
           </a:xfrm>
           <a:prstGeom prst="rect">
             <a:avLst/>
@@ -20179,7 +20179,7 @@
         <p:spPr>
           <a:xfrm>
             <a:off x="210240" y="334080"/>
-            <a:ext cx="8101080" cy="464040"/>
+            <a:ext cx="8100720" cy="463680"/>
           </a:xfrm>
           <a:prstGeom prst="rect">
             <a:avLst/>
@@ -20291,7 +20291,7 @@
         <p:spPr>
           <a:xfrm>
             <a:off x="360" y="5229360"/>
-            <a:ext cx="10077120" cy="246240"/>
+            <a:ext cx="10076760" cy="245880"/>
           </a:xfrm>
           <a:prstGeom prst="rect">
             <a:avLst/>
@@ -20342,7 +20342,7 @@
         <p:spPr>
           <a:xfrm>
             <a:off x="178560" y="1156320"/>
-            <a:ext cx="9720720" cy="2438280"/>
+            <a:ext cx="9720360" cy="2438280"/>
           </a:xfrm>
           <a:prstGeom prst="rect">
             <a:avLst/>
@@ -20741,7 +20741,7 @@
         <p:spPr>
           <a:xfrm>
             <a:off x="3024000" y="1548000"/>
-            <a:ext cx="2878920" cy="2538000"/>
+            <a:ext cx="2878560" cy="2537640"/>
           </a:xfrm>
           <a:prstGeom prst="rect">
             <a:avLst/>
@@ -20765,7 +20765,7 @@
         <p:spPr>
           <a:xfrm>
             <a:off x="5976000" y="2750400"/>
-            <a:ext cx="3382920" cy="2393280"/>
+            <a:ext cx="3382560" cy="2392920"/>
           </a:xfrm>
           <a:prstGeom prst="rect">
             <a:avLst/>
@@ -20789,7 +20789,7 @@
         <p:spPr>
           <a:xfrm>
             <a:off x="5148000" y="180000"/>
-            <a:ext cx="2878920" cy="2537640"/>
+            <a:ext cx="2878560" cy="2537280"/>
           </a:xfrm>
           <a:prstGeom prst="rect">
             <a:avLst/>
@@ -20839,7 +20839,7 @@
         <p:spPr>
           <a:xfrm>
             <a:off x="210240" y="334080"/>
-            <a:ext cx="8101080" cy="464040"/>
+            <a:ext cx="8100720" cy="463680"/>
           </a:xfrm>
           <a:prstGeom prst="rect">
             <a:avLst/>
@@ -20951,7 +20951,7 @@
         <p:spPr>
           <a:xfrm>
             <a:off x="360" y="5229360"/>
-            <a:ext cx="10077120" cy="246240"/>
+            <a:ext cx="10076760" cy="245880"/>
           </a:xfrm>
           <a:prstGeom prst="rect">
             <a:avLst/>
@@ -21002,7 +21002,7 @@
         <p:spPr>
           <a:xfrm>
             <a:off x="178560" y="1156320"/>
-            <a:ext cx="9720720" cy="3612600"/>
+            <a:ext cx="9720360" cy="3612600"/>
           </a:xfrm>
           <a:prstGeom prst="rect">
             <a:avLst/>
@@ -21583,7 +21583,7 @@
         <p:spPr>
           <a:xfrm>
             <a:off x="6300000" y="985320"/>
-            <a:ext cx="1812960" cy="3872880"/>
+            <a:ext cx="1812600" cy="3872520"/>
           </a:xfrm>
           <a:prstGeom prst="rect">
             <a:avLst/>
@@ -21633,7 +21633,7 @@
         <p:spPr>
           <a:xfrm>
             <a:off x="210240" y="334080"/>
-            <a:ext cx="8101080" cy="464040"/>
+            <a:ext cx="8100720" cy="463680"/>
           </a:xfrm>
           <a:prstGeom prst="rect">
             <a:avLst/>
@@ -21745,7 +21745,7 @@
         <p:spPr>
           <a:xfrm>
             <a:off x="360" y="5229360"/>
-            <a:ext cx="10077120" cy="246240"/>
+            <a:ext cx="10076760" cy="245880"/>
           </a:xfrm>
           <a:prstGeom prst="rect">
             <a:avLst/>
@@ -21796,7 +21796,7 @@
         <p:spPr>
           <a:xfrm>
             <a:off x="178560" y="1156320"/>
-            <a:ext cx="9720720" cy="3780360"/>
+            <a:ext cx="9720360" cy="3780360"/>
           </a:xfrm>
           <a:prstGeom prst="rect">
             <a:avLst/>
@@ -22436,7 +22436,7 @@
         <p:spPr>
           <a:xfrm>
             <a:off x="3420000" y="1493280"/>
-            <a:ext cx="6633720" cy="3177000"/>
+            <a:ext cx="6633360" cy="3176640"/>
           </a:xfrm>
           <a:prstGeom prst="rect">
             <a:avLst/>
@@ -22486,7 +22486,7 @@
         <p:spPr>
           <a:xfrm>
             <a:off x="210240" y="334080"/>
-            <a:ext cx="8101080" cy="464040"/>
+            <a:ext cx="8100720" cy="463680"/>
           </a:xfrm>
           <a:prstGeom prst="rect">
             <a:avLst/>
@@ -22598,7 +22598,7 @@
         <p:spPr>
           <a:xfrm>
             <a:off x="360" y="5229360"/>
-            <a:ext cx="10077120" cy="246240"/>
+            <a:ext cx="10076760" cy="245880"/>
           </a:xfrm>
           <a:prstGeom prst="rect">
             <a:avLst/>
@@ -22649,7 +22649,7 @@
         <p:spPr>
           <a:xfrm>
             <a:off x="178560" y="1156320"/>
-            <a:ext cx="9720720" cy="3109320"/>
+            <a:ext cx="9720360" cy="3109320"/>
           </a:xfrm>
           <a:prstGeom prst="rect">
             <a:avLst/>
@@ -23185,7 +23185,7 @@
         <p:spPr>
           <a:xfrm>
             <a:off x="3420000" y="1492920"/>
-            <a:ext cx="6633720" cy="3177360"/>
+            <a:ext cx="6633360" cy="3177000"/>
           </a:xfrm>
           <a:prstGeom prst="rect">
             <a:avLst/>
@@ -23235,7 +23235,7 @@
         <p:spPr>
           <a:xfrm>
             <a:off x="210240" y="334080"/>
-            <a:ext cx="8101080" cy="464040"/>
+            <a:ext cx="8100720" cy="463680"/>
           </a:xfrm>
           <a:prstGeom prst="rect">
             <a:avLst/>
@@ -23347,7 +23347,7 @@
         <p:spPr>
           <a:xfrm>
             <a:off x="360" y="5229360"/>
-            <a:ext cx="10077120" cy="246240"/>
+            <a:ext cx="10076760" cy="245880"/>
           </a:xfrm>
           <a:prstGeom prst="rect">
             <a:avLst/>
@@ -23398,7 +23398,7 @@
         <p:spPr>
           <a:xfrm>
             <a:off x="178560" y="1156320"/>
-            <a:ext cx="9720720" cy="3612600"/>
+            <a:ext cx="9720360" cy="3612600"/>
           </a:xfrm>
           <a:prstGeom prst="rect">
             <a:avLst/>
@@ -24001,7 +24001,7 @@
         <p:spPr>
           <a:xfrm>
             <a:off x="3420000" y="1492920"/>
-            <a:ext cx="6652080" cy="3186000"/>
+            <a:ext cx="6651720" cy="3185640"/>
           </a:xfrm>
           <a:prstGeom prst="rect">
             <a:avLst/>
@@ -24051,7 +24051,7 @@
         <p:spPr>
           <a:xfrm>
             <a:off x="210240" y="334080"/>
-            <a:ext cx="8101080" cy="464040"/>
+            <a:ext cx="8100720" cy="463680"/>
           </a:xfrm>
           <a:prstGeom prst="rect">
             <a:avLst/>
@@ -24163,7 +24163,7 @@
         <p:spPr>
           <a:xfrm>
             <a:off x="360" y="5229360"/>
-            <a:ext cx="10077120" cy="246240"/>
+            <a:ext cx="10076760" cy="245880"/>
           </a:xfrm>
           <a:prstGeom prst="rect">
             <a:avLst/>
@@ -24214,7 +24214,7 @@
         <p:spPr>
           <a:xfrm>
             <a:off x="178920" y="1156680"/>
-            <a:ext cx="9720720" cy="4115880"/>
+            <a:ext cx="9720360" cy="4115880"/>
           </a:xfrm>
           <a:prstGeom prst="rect">
             <a:avLst/>
@@ -24921,7 +24921,7 @@
         <p:spPr>
           <a:xfrm>
             <a:off x="210240" y="334080"/>
-            <a:ext cx="8101080" cy="464040"/>
+            <a:ext cx="8100720" cy="463680"/>
           </a:xfrm>
           <a:prstGeom prst="rect">
             <a:avLst/>
@@ -25033,7 +25033,7 @@
         <p:spPr>
           <a:xfrm>
             <a:off x="360" y="5229360"/>
-            <a:ext cx="10077120" cy="246240"/>
+            <a:ext cx="10076760" cy="245880"/>
           </a:xfrm>
           <a:prstGeom prst="rect">
             <a:avLst/>
@@ -25084,7 +25084,7 @@
         <p:spPr>
           <a:xfrm>
             <a:off x="178560" y="1156320"/>
-            <a:ext cx="9720720" cy="2773800"/>
+            <a:ext cx="9720360" cy="2773800"/>
           </a:xfrm>
           <a:prstGeom prst="rect">
             <a:avLst/>
@@ -25535,7 +25535,7 @@
         <p:spPr>
           <a:xfrm>
             <a:off x="2858760" y="1260000"/>
-            <a:ext cx="4772160" cy="2158920"/>
+            <a:ext cx="4771800" cy="2158560"/>
           </a:xfrm>
           <a:prstGeom prst="rect">
             <a:avLst/>
@@ -25562,7 +25562,7 @@
         <p:spPr>
           <a:xfrm>
             <a:off x="3384000" y="3492360"/>
-            <a:ext cx="1459800" cy="1618560"/>
+            <a:ext cx="1459440" cy="1618200"/>
           </a:xfrm>
           <a:prstGeom prst="rect">
             <a:avLst/>
@@ -25589,7 +25589,7 @@
         <p:spPr>
           <a:xfrm>
             <a:off x="5240880" y="3493080"/>
-            <a:ext cx="1438560" cy="1617840"/>
+            <a:ext cx="1438200" cy="1617480"/>
           </a:xfrm>
           <a:prstGeom prst="rect">
             <a:avLst/>
@@ -25641,7 +25641,7 @@
         <p:spPr>
           <a:xfrm>
             <a:off x="210240" y="334080"/>
-            <a:ext cx="8101080" cy="464040"/>
+            <a:ext cx="8100720" cy="463680"/>
           </a:xfrm>
           <a:prstGeom prst="rect">
             <a:avLst/>
@@ -25753,7 +25753,7 @@
         <p:spPr>
           <a:xfrm>
             <a:off x="360" y="5229360"/>
-            <a:ext cx="10077120" cy="246240"/>
+            <a:ext cx="10076760" cy="245880"/>
           </a:xfrm>
           <a:prstGeom prst="rect">
             <a:avLst/>
@@ -25804,7 +25804,7 @@
         <p:spPr>
           <a:xfrm>
             <a:off x="178560" y="1156320"/>
-            <a:ext cx="9720720" cy="2941560"/>
+            <a:ext cx="9720360" cy="2941560"/>
           </a:xfrm>
           <a:prstGeom prst="rect">
             <a:avLst/>
@@ -26292,7 +26292,7 @@
         <p:spPr>
           <a:xfrm>
             <a:off x="3578760" y="1156320"/>
-            <a:ext cx="4700160" cy="2126520"/>
+            <a:ext cx="4699800" cy="2126160"/>
           </a:xfrm>
           <a:prstGeom prst="rect">
             <a:avLst/>
@@ -26318,7 +26318,7 @@
         <p:spPr>
           <a:xfrm>
             <a:off x="5040000" y="2712600"/>
-            <a:ext cx="4520160" cy="2146320"/>
+            <a:ext cx="4519800" cy="2145960"/>
           </a:xfrm>
           <a:prstGeom prst="rect">
             <a:avLst/>
@@ -26370,7 +26370,7 @@
         <p:spPr>
           <a:xfrm>
             <a:off x="210240" y="334080"/>
-            <a:ext cx="8101080" cy="464040"/>
+            <a:ext cx="8100720" cy="463680"/>
           </a:xfrm>
           <a:prstGeom prst="rect">
             <a:avLst/>
@@ -26482,7 +26482,7 @@
         <p:spPr>
           <a:xfrm>
             <a:off x="360" y="5229360"/>
-            <a:ext cx="10077120" cy="246240"/>
+            <a:ext cx="10076760" cy="245880"/>
           </a:xfrm>
           <a:prstGeom prst="rect">
             <a:avLst/>
@@ -26536,8 +26536,8 @@
         </p:blipFill>
         <p:spPr>
           <a:xfrm>
-            <a:off x="1657800" y="1093680"/>
-            <a:ext cx="6765480" cy="4131720"/>
+            <a:off x="1624320" y="1041120"/>
+            <a:ext cx="6832080" cy="4164480"/>
           </a:xfrm>
           <a:prstGeom prst="rect">
             <a:avLst/>
@@ -26587,7 +26587,7 @@
         <p:spPr>
           <a:xfrm>
             <a:off x="210240" y="334080"/>
-            <a:ext cx="8101080" cy="464040"/>
+            <a:ext cx="8100720" cy="463680"/>
           </a:xfrm>
           <a:prstGeom prst="rect">
             <a:avLst/>
@@ -26699,7 +26699,7 @@
         <p:spPr>
           <a:xfrm>
             <a:off x="360" y="5229360"/>
-            <a:ext cx="10077120" cy="246240"/>
+            <a:ext cx="10076760" cy="245880"/>
           </a:xfrm>
           <a:prstGeom prst="rect">
             <a:avLst/>
@@ -26750,7 +26750,7 @@
         <p:spPr>
           <a:xfrm>
             <a:off x="178560" y="1156320"/>
-            <a:ext cx="9720720" cy="3948120"/>
+            <a:ext cx="9720360" cy="3948120"/>
           </a:xfrm>
           <a:prstGeom prst="rect">
             <a:avLst/>
@@ -27423,7 +27423,7 @@
         <p:spPr>
           <a:xfrm>
             <a:off x="4680000" y="1156320"/>
-            <a:ext cx="3599640" cy="928440"/>
+            <a:ext cx="3599280" cy="928440"/>
           </a:xfrm>
           <a:prstGeom prst="rect">
             <a:avLst/>
@@ -27614,7 +27614,7 @@
         <p:spPr>
           <a:xfrm>
             <a:off x="210240" y="334080"/>
-            <a:ext cx="8101080" cy="464040"/>
+            <a:ext cx="8100720" cy="463680"/>
           </a:xfrm>
           <a:prstGeom prst="rect">
             <a:avLst/>
@@ -27726,7 +27726,7 @@
         <p:spPr>
           <a:xfrm>
             <a:off x="360" y="5229360"/>
-            <a:ext cx="10077120" cy="246240"/>
+            <a:ext cx="10076760" cy="245880"/>
           </a:xfrm>
           <a:prstGeom prst="rect">
             <a:avLst/>
@@ -27777,7 +27777,7 @@
         <p:spPr>
           <a:xfrm>
             <a:off x="178560" y="1156320"/>
-            <a:ext cx="9720720" cy="3780360"/>
+            <a:ext cx="9720360" cy="3780360"/>
           </a:xfrm>
           <a:prstGeom prst="rect">
             <a:avLst/>
@@ -28454,7 +28454,7 @@
         <p:spPr>
           <a:xfrm>
             <a:off x="210240" y="334080"/>
-            <a:ext cx="8101080" cy="464040"/>
+            <a:ext cx="8100720" cy="463680"/>
           </a:xfrm>
           <a:prstGeom prst="rect">
             <a:avLst/>
@@ -28566,7 +28566,7 @@
         <p:spPr>
           <a:xfrm>
             <a:off x="360" y="5229360"/>
-            <a:ext cx="10077120" cy="246240"/>
+            <a:ext cx="10076760" cy="245880"/>
           </a:xfrm>
           <a:prstGeom prst="rect">
             <a:avLst/>
@@ -28617,7 +28617,7 @@
         <p:spPr>
           <a:xfrm>
             <a:off x="178560" y="1156320"/>
-            <a:ext cx="9720720" cy="2102760"/>
+            <a:ext cx="9720360" cy="2102760"/>
           </a:xfrm>
           <a:prstGeom prst="rect">
             <a:avLst/>
@@ -28949,7 +28949,7 @@
         <p:spPr>
           <a:xfrm>
             <a:off x="4680000" y="1156320"/>
-            <a:ext cx="4679280" cy="3948120"/>
+            <a:ext cx="4678920" cy="3948120"/>
           </a:xfrm>
           <a:prstGeom prst="rect">
             <a:avLst/>
@@ -29652,7 +29652,7 @@
         <p:spPr>
           <a:xfrm>
             <a:off x="210240" y="334080"/>
-            <a:ext cx="8101080" cy="464040"/>
+            <a:ext cx="8100720" cy="463680"/>
           </a:xfrm>
           <a:prstGeom prst="rect">
             <a:avLst/>
@@ -29764,7 +29764,7 @@
         <p:spPr>
           <a:xfrm>
             <a:off x="360" y="5229360"/>
-            <a:ext cx="10077120" cy="246240"/>
+            <a:ext cx="10076760" cy="245880"/>
           </a:xfrm>
           <a:prstGeom prst="rect">
             <a:avLst/>
@@ -29815,7 +29815,7 @@
         <p:spPr>
           <a:xfrm>
             <a:off x="178560" y="1156320"/>
-            <a:ext cx="9720720" cy="3277080"/>
+            <a:ext cx="9720360" cy="3277080"/>
           </a:xfrm>
           <a:prstGeom prst="rect">
             <a:avLst/>
@@ -30370,7 +30370,7 @@
         <p:spPr>
           <a:xfrm>
             <a:off x="210240" y="334080"/>
-            <a:ext cx="8101080" cy="464040"/>
+            <a:ext cx="8100720" cy="463680"/>
           </a:xfrm>
           <a:prstGeom prst="rect">
             <a:avLst/>
@@ -30482,7 +30482,7 @@
         <p:spPr>
           <a:xfrm>
             <a:off x="360" y="5229360"/>
-            <a:ext cx="10077120" cy="246240"/>
+            <a:ext cx="10076760" cy="245880"/>
           </a:xfrm>
           <a:prstGeom prst="rect">
             <a:avLst/>
@@ -30533,7 +30533,7 @@
         <p:spPr>
           <a:xfrm>
             <a:off x="178560" y="1156320"/>
-            <a:ext cx="9720720" cy="3444840"/>
+            <a:ext cx="9720360" cy="3444840"/>
           </a:xfrm>
           <a:prstGeom prst="rect">
             <a:avLst/>
@@ -30974,7 +30974,7 @@
         <p:spPr>
           <a:xfrm>
             <a:off x="4680000" y="1156320"/>
-            <a:ext cx="3239280" cy="1599480"/>
+            <a:ext cx="3238920" cy="1599480"/>
           </a:xfrm>
           <a:prstGeom prst="rect">
             <a:avLst/>
@@ -31779,7 +31779,7 @@
         <p:spPr>
           <a:xfrm>
             <a:off x="210240" y="334080"/>
-            <a:ext cx="8101080" cy="464040"/>
+            <a:ext cx="8100720" cy="463680"/>
           </a:xfrm>
           <a:prstGeom prst="rect">
             <a:avLst/>
@@ -31891,7 +31891,7 @@
         <p:spPr>
           <a:xfrm>
             <a:off x="360" y="5229360"/>
-            <a:ext cx="10077120" cy="246240"/>
+            <a:ext cx="10076760" cy="245880"/>
           </a:xfrm>
           <a:prstGeom prst="rect">
             <a:avLst/>
@@ -31942,7 +31942,7 @@
         <p:spPr>
           <a:xfrm>
             <a:off x="178560" y="1156320"/>
-            <a:ext cx="9720720" cy="3109320"/>
+            <a:ext cx="9720360" cy="3109320"/>
           </a:xfrm>
           <a:prstGeom prst="rect">
             <a:avLst/>
@@ -32482,7 +32482,7 @@
         <p:spPr>
           <a:xfrm>
             <a:off x="210240" y="334080"/>
-            <a:ext cx="8101080" cy="464040"/>
+            <a:ext cx="8100720" cy="463680"/>
           </a:xfrm>
           <a:prstGeom prst="rect">
             <a:avLst/>
@@ -32594,7 +32594,7 @@
         <p:spPr>
           <a:xfrm>
             <a:off x="360" y="5229360"/>
-            <a:ext cx="10077120" cy="246240"/>
+            <a:ext cx="10076760" cy="245880"/>
           </a:xfrm>
           <a:prstGeom prst="rect">
             <a:avLst/>
@@ -32645,7 +32645,7 @@
         <p:spPr>
           <a:xfrm>
             <a:off x="178560" y="1156320"/>
-            <a:ext cx="9720720" cy="2102760"/>
+            <a:ext cx="9720360" cy="2102760"/>
           </a:xfrm>
           <a:prstGeom prst="rect">
             <a:avLst/>
@@ -32999,7 +32999,7 @@
         <p:spPr>
           <a:xfrm>
             <a:off x="4680000" y="1156320"/>
-            <a:ext cx="4319280" cy="2270520"/>
+            <a:ext cx="4318920" cy="2270520"/>
           </a:xfrm>
           <a:prstGeom prst="rect">
             <a:avLst/>
@@ -33398,7 +33398,7 @@
         <p:spPr>
           <a:xfrm>
             <a:off x="210240" y="334080"/>
-            <a:ext cx="8101080" cy="464040"/>
+            <a:ext cx="8100720" cy="463680"/>
           </a:xfrm>
           <a:prstGeom prst="rect">
             <a:avLst/>
@@ -33510,7 +33510,7 @@
         <p:spPr>
           <a:xfrm>
             <a:off x="360" y="5229360"/>
-            <a:ext cx="10077120" cy="246240"/>
+            <a:ext cx="10076760" cy="245880"/>
           </a:xfrm>
           <a:prstGeom prst="rect">
             <a:avLst/>
@@ -33561,7 +33561,7 @@
         <p:spPr>
           <a:xfrm>
             <a:off x="178560" y="1156320"/>
-            <a:ext cx="9720720" cy="4115880"/>
+            <a:ext cx="9720360" cy="4115880"/>
           </a:xfrm>
           <a:prstGeom prst="rect">
             <a:avLst/>
@@ -34901,7 +34901,7 @@
         <p:spPr>
           <a:xfrm>
             <a:off x="210240" y="334080"/>
-            <a:ext cx="8101080" cy="464040"/>
+            <a:ext cx="8100720" cy="463680"/>
           </a:xfrm>
           <a:prstGeom prst="rect">
             <a:avLst/>
@@ -35013,7 +35013,7 @@
         <p:spPr>
           <a:xfrm>
             <a:off x="360" y="5229360"/>
-            <a:ext cx="10077120" cy="246240"/>
+            <a:ext cx="10076760" cy="245880"/>
           </a:xfrm>
           <a:prstGeom prst="rect">
             <a:avLst/>
@@ -35064,7 +35064,7 @@
         <p:spPr>
           <a:xfrm>
             <a:off x="178560" y="1156320"/>
-            <a:ext cx="9720720" cy="2773800"/>
+            <a:ext cx="9720360" cy="2773800"/>
           </a:xfrm>
           <a:prstGeom prst="rect">
             <a:avLst/>
@@ -35541,7 +35541,7 @@
         <p:spPr>
           <a:xfrm>
             <a:off x="3745080" y="2278080"/>
-            <a:ext cx="6944040" cy="3025800"/>
+            <a:ext cx="6943680" cy="3025440"/>
           </a:xfrm>
           <a:prstGeom prst="rect">
             <a:avLst/>
@@ -35587,7 +35587,7 @@
         <p:spPr>
           <a:xfrm>
             <a:off x="302760" y="2390400"/>
-            <a:ext cx="5344560" cy="1157760"/>
+            <a:ext cx="5344200" cy="1157400"/>
           </a:xfrm>
           <a:prstGeom prst="rect">
             <a:avLst/>
@@ -35670,7 +35670,7 @@
         <p:spPr>
           <a:xfrm>
             <a:off x="5650200" y="4109400"/>
-            <a:ext cx="6282000" cy="236880"/>
+            <a:ext cx="6281640" cy="236520"/>
           </a:xfrm>
           <a:prstGeom prst="rect">
             <a:avLst/>
@@ -35722,9 +35722,9 @@
         <p:grpSpPr>
           <a:xfrm>
             <a:off x="396720" y="4254840"/>
-            <a:ext cx="5352120" cy="1325160"/>
+            <a:ext cx="5351760" cy="1324800"/>
             <a:chOff x="396720" y="4254840"/>
-            <a:chExt cx="5352120" cy="1325160"/>
+            <a:chExt cx="5351760" cy="1324800"/>
           </a:xfrm>
         </p:grpSpPr>
         <p:sp>
@@ -35736,7 +35736,7 @@
           <p:spPr>
             <a:xfrm>
               <a:off x="396720" y="4254840"/>
-              <a:ext cx="5352120" cy="244440"/>
+              <a:ext cx="5351760" cy="244080"/>
             </a:xfrm>
             <a:prstGeom prst="rect">
               <a:avLst/>
@@ -35825,7 +35825,7 @@
           <p:spPr>
             <a:xfrm>
               <a:off x="396720" y="4738320"/>
-              <a:ext cx="5352120" cy="841680"/>
+              <a:ext cx="5351760" cy="841320"/>
             </a:xfrm>
             <a:prstGeom prst="rect">
               <a:avLst/>
@@ -35923,7 +35923,7 @@
         <p:spPr>
           <a:xfrm>
             <a:off x="210240" y="334080"/>
-            <a:ext cx="8101080" cy="464040"/>
+            <a:ext cx="8100720" cy="463680"/>
           </a:xfrm>
           <a:prstGeom prst="rect">
             <a:avLst/>
@@ -36035,7 +36035,7 @@
         <p:spPr>
           <a:xfrm>
             <a:off x="360" y="5229360"/>
-            <a:ext cx="10077120" cy="246240"/>
+            <a:ext cx="10076760" cy="245880"/>
           </a:xfrm>
           <a:prstGeom prst="rect">
             <a:avLst/>
@@ -36086,7 +36086,7 @@
         <p:spPr>
           <a:xfrm>
             <a:off x="178560" y="1156320"/>
-            <a:ext cx="9720720" cy="3948120"/>
+            <a:ext cx="9720360" cy="3948120"/>
           </a:xfrm>
           <a:prstGeom prst="rect">
             <a:avLst/>
@@ -36800,7 +36800,7 @@
         <p:spPr>
           <a:xfrm>
             <a:off x="210240" y="334080"/>
-            <a:ext cx="8101080" cy="464040"/>
+            <a:ext cx="8100720" cy="463680"/>
           </a:xfrm>
           <a:prstGeom prst="rect">
             <a:avLst/>
@@ -36912,7 +36912,7 @@
         <p:spPr>
           <a:xfrm>
             <a:off x="360" y="5229360"/>
-            <a:ext cx="10077120" cy="246240"/>
+            <a:ext cx="10076760" cy="245880"/>
           </a:xfrm>
           <a:prstGeom prst="rect">
             <a:avLst/>
@@ -36963,7 +36963,7 @@
         <p:spPr>
           <a:xfrm>
             <a:off x="178560" y="1156320"/>
-            <a:ext cx="9720720" cy="2941560"/>
+            <a:ext cx="9720360" cy="2941560"/>
           </a:xfrm>
           <a:prstGeom prst="rect">
             <a:avLst/>
@@ -37466,7 +37466,7 @@
         <p:spPr>
           <a:xfrm>
             <a:off x="210240" y="334080"/>
-            <a:ext cx="8101080" cy="464040"/>
+            <a:ext cx="8100720" cy="463680"/>
           </a:xfrm>
           <a:prstGeom prst="rect">
             <a:avLst/>
@@ -37578,7 +37578,7 @@
         <p:spPr>
           <a:xfrm>
             <a:off x="360" y="5229360"/>
-            <a:ext cx="10077120" cy="246240"/>
+            <a:ext cx="10076760" cy="245880"/>
           </a:xfrm>
           <a:prstGeom prst="rect">
             <a:avLst/>
@@ -37629,7 +37629,7 @@
         <p:spPr>
           <a:xfrm>
             <a:off x="178560" y="1156320"/>
-            <a:ext cx="9720720" cy="2941560"/>
+            <a:ext cx="9720360" cy="2941560"/>
           </a:xfrm>
           <a:prstGeom prst="rect">
             <a:avLst/>
@@ -38165,7 +38165,7 @@
         <p:spPr>
           <a:xfrm>
             <a:off x="210240" y="334080"/>
-            <a:ext cx="8101080" cy="464040"/>
+            <a:ext cx="8100720" cy="463680"/>
           </a:xfrm>
           <a:prstGeom prst="rect">
             <a:avLst/>
@@ -38277,7 +38277,7 @@
         <p:spPr>
           <a:xfrm>
             <a:off x="360" y="5229360"/>
-            <a:ext cx="10077120" cy="246240"/>
+            <a:ext cx="10076760" cy="245880"/>
           </a:xfrm>
           <a:prstGeom prst="rect">
             <a:avLst/>
@@ -38328,7 +38328,7 @@
         <p:spPr>
           <a:xfrm>
             <a:off x="178560" y="1156320"/>
-            <a:ext cx="9720720" cy="3780360"/>
+            <a:ext cx="9720360" cy="3780360"/>
           </a:xfrm>
           <a:prstGeom prst="rect">
             <a:avLst/>
@@ -38953,7 +38953,7 @@
         <p:spPr>
           <a:xfrm>
             <a:off x="5398920" y="1156680"/>
-            <a:ext cx="9720720" cy="1096200"/>
+            <a:ext cx="9720360" cy="1096200"/>
           </a:xfrm>
           <a:prstGeom prst="rect">
             <a:avLst/>
@@ -39170,7 +39170,7 @@
         <p:spPr>
           <a:xfrm>
             <a:off x="210240" y="334080"/>
-            <a:ext cx="8101080" cy="464040"/>
+            <a:ext cx="8100720" cy="463680"/>
           </a:xfrm>
           <a:prstGeom prst="rect">
             <a:avLst/>
@@ -39282,7 +39282,7 @@
         <p:spPr>
           <a:xfrm>
             <a:off x="360" y="5229360"/>
-            <a:ext cx="10077120" cy="246240"/>
+            <a:ext cx="10076760" cy="245880"/>
           </a:xfrm>
           <a:prstGeom prst="rect">
             <a:avLst/>
@@ -39333,7 +39333,7 @@
         <p:spPr>
           <a:xfrm>
             <a:off x="178560" y="1156320"/>
-            <a:ext cx="9720720" cy="257400"/>
+            <a:ext cx="9720360" cy="257400"/>
           </a:xfrm>
           <a:prstGeom prst="rect">
             <a:avLst/>
@@ -40510,7 +40510,7 @@
         <p:spPr>
           <a:xfrm>
             <a:off x="178920" y="3676680"/>
-            <a:ext cx="9720720" cy="1096200"/>
+            <a:ext cx="9720360" cy="1096200"/>
           </a:xfrm>
           <a:prstGeom prst="rect">
             <a:avLst/>

--- a/6 семестр/Автоматизированные системы управление элементами промышленных и административных объектов/Практическая работа №16/Презентация ВраженкоДО.pptx
+++ b/6 семестр/Автоматизированные системы управление элементами промышленных и административных объектов/Практическая работа №16/Презентация ВраженкоДО.pptx
@@ -96,7 +96,7 @@
         <p:spPr>
           <a:xfrm>
             <a:off x="0" y="-69480"/>
-            <a:ext cx="10076760" cy="5671440"/>
+            <a:ext cx="10076400" cy="5671080"/>
           </a:xfrm>
           <a:prstGeom prst="rect">
             <a:avLst/>
@@ -120,7 +120,7 @@
         <p:spPr>
           <a:xfrm>
             <a:off x="609840" y="469800"/>
-            <a:ext cx="2723760" cy="811800"/>
+            <a:ext cx="2723400" cy="811440"/>
           </a:xfrm>
           <a:prstGeom prst="rect">
             <a:avLst/>
@@ -144,7 +144,7 @@
         <p:spPr>
           <a:xfrm>
             <a:off x="0" y="0"/>
-            <a:ext cx="10076760" cy="5666760"/>
+            <a:ext cx="10076400" cy="5666400"/>
           </a:xfrm>
           <a:prstGeom prst="rect">
             <a:avLst/>
@@ -168,7 +168,7 @@
         <p:spPr>
           <a:xfrm>
             <a:off x="504000" y="225720"/>
-            <a:ext cx="9068760" cy="943560"/>
+            <a:ext cx="9068400" cy="943200"/>
           </a:xfrm>
           <a:prstGeom prst="rect">
             <a:avLst/>
@@ -227,7 +227,7 @@
         <p:spPr>
           <a:xfrm>
             <a:off x="504000" y="1326600"/>
-            <a:ext cx="9068760" cy="3285000"/>
+            <a:ext cx="9068400" cy="3284640"/>
           </a:xfrm>
           <a:prstGeom prst="rect">
             <a:avLst/>
@@ -530,7 +530,7 @@
         <p:spPr>
           <a:xfrm>
             <a:off x="0" y="-69480"/>
-            <a:ext cx="10076760" cy="5671440"/>
+            <a:ext cx="10076400" cy="5671080"/>
           </a:xfrm>
           <a:prstGeom prst="rect">
             <a:avLst/>
@@ -554,7 +554,7 @@
         <p:spPr>
           <a:xfrm>
             <a:off x="609840" y="469800"/>
-            <a:ext cx="2723760" cy="811800"/>
+            <a:ext cx="2723400" cy="811440"/>
           </a:xfrm>
           <a:prstGeom prst="rect">
             <a:avLst/>
@@ -578,7 +578,7 @@
         <p:spPr>
           <a:xfrm>
             <a:off x="494640" y="428400"/>
-            <a:ext cx="3548160" cy="711000"/>
+            <a:ext cx="3547800" cy="710640"/>
           </a:xfrm>
           <a:prstGeom prst="rect">
             <a:avLst/>
@@ -602,7 +602,7 @@
         <p:spPr>
           <a:xfrm>
             <a:off x="0" y="0"/>
-            <a:ext cx="10076760" cy="5666760"/>
+            <a:ext cx="10076400" cy="5666400"/>
           </a:xfrm>
           <a:prstGeom prst="rect">
             <a:avLst/>
@@ -626,7 +626,7 @@
         <p:spPr>
           <a:xfrm>
             <a:off x="504000" y="225720"/>
-            <a:ext cx="9068760" cy="943560"/>
+            <a:ext cx="9068400" cy="943200"/>
           </a:xfrm>
           <a:prstGeom prst="rect">
             <a:avLst/>
@@ -685,7 +685,7 @@
         <p:spPr>
           <a:xfrm>
             <a:off x="504000" y="1326600"/>
-            <a:ext cx="9068760" cy="3285000"/>
+            <a:ext cx="9068400" cy="3284640"/>
           </a:xfrm>
           <a:prstGeom prst="rect">
             <a:avLst/>
@@ -988,7 +988,7 @@
         <p:spPr>
           <a:xfrm>
             <a:off x="594720" y="5031000"/>
-            <a:ext cx="4422240" cy="159480"/>
+            <a:ext cx="4421880" cy="159120"/>
           </a:xfrm>
           <a:prstGeom prst="rect">
             <a:avLst/>
@@ -1047,7 +1047,7 @@
         <p:spPr>
           <a:xfrm>
             <a:off x="9024480" y="5043240"/>
-            <a:ext cx="616320" cy="147960"/>
+            <a:ext cx="615960" cy="147600"/>
           </a:xfrm>
           <a:prstGeom prst="rect">
             <a:avLst/>
@@ -1073,7 +1073,7 @@
                 <a:spcPct val="100000"/>
               </a:lnSpc>
             </a:pPr>
-            <a:fld id="{94624DC8-1168-4A9D-AC7B-E0534A5F3DBD}" type="slidenum">
+            <a:fld id="{C9CBD2BE-37CF-41A7-9433-338608537DCD}" type="slidenum">
               <a:rPr lang="en-US" sz="700" b="0" u="none" strike="noStrike">
                 <a:solidFill>
                   <a:schemeClr val="dk1"/>
@@ -1109,7 +1109,7 @@
         <p:spPr>
           <a:xfrm>
             <a:off x="594720" y="475200"/>
-            <a:ext cx="7229160" cy="360360"/>
+            <a:ext cx="7228800" cy="360000"/>
           </a:xfrm>
           <a:prstGeom prst="rect">
             <a:avLst/>
@@ -1169,7 +1169,7 @@
         <p:spPr>
           <a:xfrm>
             <a:off x="594720" y="1625760"/>
-            <a:ext cx="4422240" cy="2712600"/>
+            <a:ext cx="4421880" cy="2712240"/>
           </a:xfrm>
           <a:prstGeom prst="rect">
             <a:avLst/>
@@ -1229,7 +1229,7 @@
         <p:spPr>
           <a:xfrm>
             <a:off x="5300640" y="1625760"/>
-            <a:ext cx="4340160" cy="2702520"/>
+            <a:ext cx="4339800" cy="2702160"/>
           </a:xfrm>
           <a:prstGeom prst="rect">
             <a:avLst/>
@@ -1532,7 +1532,7 @@
         <p:spPr>
           <a:xfrm>
             <a:off x="8492400" y="410040"/>
-            <a:ext cx="1171080" cy="347400"/>
+            <a:ext cx="1170720" cy="347040"/>
           </a:xfrm>
           <a:prstGeom prst="rect">
             <a:avLst/>
@@ -1556,7 +1556,7 @@
         <p:spPr>
           <a:xfrm>
             <a:off x="494640" y="428400"/>
-            <a:ext cx="3548160" cy="711000"/>
+            <a:ext cx="3547800" cy="710640"/>
           </a:xfrm>
           <a:prstGeom prst="rect">
             <a:avLst/>
@@ -1580,7 +1580,7 @@
         <p:spPr>
           <a:xfrm>
             <a:off x="0" y="0"/>
-            <a:ext cx="10076760" cy="5666760"/>
+            <a:ext cx="10076400" cy="5666400"/>
           </a:xfrm>
           <a:prstGeom prst="rect">
             <a:avLst/>
@@ -1604,7 +1604,7 @@
         <p:spPr>
           <a:xfrm>
             <a:off x="504000" y="225720"/>
-            <a:ext cx="9068760" cy="943560"/>
+            <a:ext cx="9068400" cy="943200"/>
           </a:xfrm>
           <a:prstGeom prst="rect">
             <a:avLst/>
@@ -1663,7 +1663,7 @@
         <p:spPr>
           <a:xfrm>
             <a:off x="504000" y="1326600"/>
-            <a:ext cx="9068760" cy="3285000"/>
+            <a:ext cx="9068400" cy="3284640"/>
           </a:xfrm>
           <a:prstGeom prst="rect">
             <a:avLst/>
@@ -1966,7 +1966,7 @@
         <p:spPr>
           <a:xfrm>
             <a:off x="594720" y="5031000"/>
-            <a:ext cx="4422240" cy="159480"/>
+            <a:ext cx="4421880" cy="159120"/>
           </a:xfrm>
           <a:prstGeom prst="rect">
             <a:avLst/>
@@ -2025,7 +2025,7 @@
         <p:spPr>
           <a:xfrm>
             <a:off x="9024480" y="5043240"/>
-            <a:ext cx="616320" cy="147960"/>
+            <a:ext cx="615960" cy="147600"/>
           </a:xfrm>
           <a:prstGeom prst="rect">
             <a:avLst/>
@@ -2051,7 +2051,7 @@
                 <a:spcPct val="100000"/>
               </a:lnSpc>
             </a:pPr>
-            <a:fld id="{F2A618F4-54C6-4872-8719-BC4856781C2E}" type="slidenum">
+            <a:fld id="{63D77263-B0B1-4A5C-BA11-829A47132E47}" type="slidenum">
               <a:rPr lang="en-US" sz="700" b="0" u="none" strike="noStrike">
                 <a:solidFill>
                   <a:schemeClr val="dk1"/>
@@ -2087,7 +2087,7 @@
         <p:spPr>
           <a:xfrm>
             <a:off x="594720" y="475200"/>
-            <a:ext cx="7229160" cy="360360"/>
+            <a:ext cx="7228800" cy="360000"/>
           </a:xfrm>
           <a:prstGeom prst="rect">
             <a:avLst/>
@@ -2147,7 +2147,7 @@
         <p:spPr>
           <a:xfrm>
             <a:off x="594720" y="1625760"/>
-            <a:ext cx="4422240" cy="1351800"/>
+            <a:ext cx="4421880" cy="1351440"/>
           </a:xfrm>
           <a:prstGeom prst="rect">
             <a:avLst/>
@@ -2211,7 +2211,7 @@
         <p:spPr>
           <a:xfrm>
             <a:off x="5300640" y="1625760"/>
-            <a:ext cx="4340160" cy="1351800"/>
+            <a:ext cx="4339800" cy="1351440"/>
           </a:xfrm>
           <a:prstGeom prst="rect">
             <a:avLst/>
@@ -2275,7 +2275,7 @@
         <p:spPr>
           <a:xfrm>
             <a:off x="594720" y="3100320"/>
-            <a:ext cx="4422240" cy="1351800"/>
+            <a:ext cx="4421880" cy="1351440"/>
           </a:xfrm>
           <a:prstGeom prst="rect">
             <a:avLst/>
@@ -2339,7 +2339,7 @@
         <p:spPr>
           <a:xfrm>
             <a:off x="5300640" y="3100320"/>
-            <a:ext cx="4340160" cy="1351800"/>
+            <a:ext cx="4339800" cy="1351440"/>
           </a:xfrm>
           <a:prstGeom prst="rect">
             <a:avLst/>
@@ -2432,7 +2432,7 @@
         <p:spPr>
           <a:xfrm>
             <a:off x="446400" y="0"/>
-            <a:ext cx="9070560" cy="870840"/>
+            <a:ext cx="9070200" cy="870480"/>
           </a:xfrm>
           <a:prstGeom prst="rect">
             <a:avLst/>
@@ -2491,7 +2491,7 @@
         <p:spPr>
           <a:xfrm>
             <a:off x="360" y="0"/>
-            <a:ext cx="40617720" cy="360"/>
+            <a:ext cx="40617360" cy="360"/>
           </a:xfrm>
           <a:prstGeom prst="rect">
             <a:avLst/>
@@ -2719,7 +2719,7 @@
         <p:spPr>
           <a:xfrm>
             <a:off x="594720" y="1625760"/>
-            <a:ext cx="4422240" cy="2017800"/>
+            <a:ext cx="4421880" cy="2017440"/>
           </a:xfrm>
           <a:prstGeom prst="rect">
             <a:avLst/>
@@ -2993,7 +2993,7 @@
         <p:spPr>
           <a:xfrm>
             <a:off x="5300640" y="1625760"/>
-            <a:ext cx="4340160" cy="2017800"/>
+            <a:ext cx="4339800" cy="2017440"/>
           </a:xfrm>
           <a:prstGeom prst="rect">
             <a:avLst/>
@@ -3267,7 +3267,7 @@
         <p:spPr>
           <a:xfrm>
             <a:off x="594720" y="5031000"/>
-            <a:ext cx="4422240" cy="159480"/>
+            <a:ext cx="4421880" cy="159120"/>
           </a:xfrm>
           <a:prstGeom prst="rect">
             <a:avLst/>
@@ -3326,7 +3326,7 @@
         <p:spPr>
           <a:xfrm>
             <a:off x="9024480" y="5043240"/>
-            <a:ext cx="616320" cy="147960"/>
+            <a:ext cx="615960" cy="147600"/>
           </a:xfrm>
           <a:prstGeom prst="rect">
             <a:avLst/>
@@ -3352,7 +3352,7 @@
                 <a:spcPct val="100000"/>
               </a:lnSpc>
             </a:pPr>
-            <a:fld id="{0A0BC0AE-391E-4B5A-A04C-058B30DD0F7F}" type="slidenum">
+            <a:fld id="{C623A673-DF96-437C-A8C3-09809BF3D321}" type="slidenum">
               <a:rPr lang="en-US" sz="700" b="0" u="none" strike="noStrike">
                 <a:solidFill>
                   <a:schemeClr val="dk1"/>
@@ -3388,7 +3388,7 @@
         <p:spPr>
           <a:xfrm>
             <a:off x="594720" y="475200"/>
-            <a:ext cx="7229160" cy="360360"/>
+            <a:ext cx="7228800" cy="360000"/>
           </a:xfrm>
           <a:prstGeom prst="rect">
             <a:avLst/>
@@ -3448,7 +3448,7 @@
         <p:spPr>
           <a:xfrm>
             <a:off x="594720" y="3835800"/>
-            <a:ext cx="4422240" cy="835920"/>
+            <a:ext cx="4421880" cy="835560"/>
           </a:xfrm>
           <a:prstGeom prst="rect">
             <a:avLst/>
@@ -3508,7 +3508,7 @@
         <p:spPr>
           <a:xfrm>
             <a:off x="5300640" y="3831840"/>
-            <a:ext cx="4340160" cy="835920"/>
+            <a:ext cx="4339800" cy="835560"/>
           </a:xfrm>
           <a:prstGeom prst="rect">
             <a:avLst/>
@@ -3597,7 +3597,7 @@
         <p:spPr>
           <a:xfrm>
             <a:off x="594720" y="1625760"/>
-            <a:ext cx="4422240" cy="3081600"/>
+            <a:ext cx="4421880" cy="3081240"/>
           </a:xfrm>
           <a:prstGeom prst="rect">
             <a:avLst/>
@@ -3660,7 +3660,7 @@
         <p:spPr>
           <a:xfrm>
             <a:off x="5300640" y="1625760"/>
-            <a:ext cx="4340160" cy="3081600"/>
+            <a:ext cx="4339800" cy="3081240"/>
           </a:xfrm>
           <a:prstGeom prst="rect">
             <a:avLst/>
@@ -3723,7 +3723,7 @@
         <p:spPr>
           <a:xfrm>
             <a:off x="594720" y="5031000"/>
-            <a:ext cx="4422240" cy="159480"/>
+            <a:ext cx="4421880" cy="159120"/>
           </a:xfrm>
           <a:prstGeom prst="rect">
             <a:avLst/>
@@ -3782,7 +3782,7 @@
         <p:spPr>
           <a:xfrm>
             <a:off x="9024480" y="5043240"/>
-            <a:ext cx="616320" cy="147960"/>
+            <a:ext cx="615960" cy="147600"/>
           </a:xfrm>
           <a:prstGeom prst="rect">
             <a:avLst/>
@@ -3808,7 +3808,7 @@
                 <a:spcPct val="100000"/>
               </a:lnSpc>
             </a:pPr>
-            <a:fld id="{92AB686F-A190-4DD1-9E5E-868B7CD007B9}" type="slidenum">
+            <a:fld id="{0C180728-D4D5-46CC-B112-ADC7851F7E9D}" type="slidenum">
               <a:rPr lang="en-US" sz="700" b="0" u="none" strike="noStrike">
                 <a:solidFill>
                   <a:schemeClr val="dk1"/>
@@ -3844,7 +3844,7 @@
         <p:spPr>
           <a:xfrm>
             <a:off x="594720" y="475200"/>
-            <a:ext cx="7229160" cy="360360"/>
+            <a:ext cx="7228800" cy="360000"/>
           </a:xfrm>
           <a:prstGeom prst="rect">
             <a:avLst/>
@@ -4034,7 +4034,7 @@
         <p:spPr>
           <a:xfrm>
             <a:off x="9024480" y="5043240"/>
-            <a:ext cx="616320" cy="147960"/>
+            <a:ext cx="615960" cy="147600"/>
           </a:xfrm>
           <a:prstGeom prst="rect">
             <a:avLst/>
@@ -4060,7 +4060,7 @@
                 <a:spcPct val="100000"/>
               </a:lnSpc>
             </a:pPr>
-            <a:fld id="{1037613D-E108-45F9-9152-316C0B109F14}" type="slidenum">
+            <a:fld id="{2C4212EC-7433-40CA-B8F6-346666BB8DD5}" type="slidenum">
               <a:rPr lang="en-US" sz="700" b="0" u="none" strike="noStrike">
                 <a:solidFill>
                   <a:schemeClr val="dk1"/>
@@ -4118,7 +4118,7 @@
         <p:spPr>
           <a:xfrm>
             <a:off x="3745080" y="2278080"/>
-            <a:ext cx="6943680" cy="3025440"/>
+            <a:ext cx="6943320" cy="3025080"/>
           </a:xfrm>
           <a:prstGeom prst="rect">
             <a:avLst/>
@@ -4164,7 +4164,7 @@
         <p:spPr>
           <a:xfrm>
             <a:off x="198360" y="2180520"/>
-            <a:ext cx="6666480" cy="1365120"/>
+            <a:ext cx="6666120" cy="1364760"/>
           </a:xfrm>
           <a:prstGeom prst="rect">
             <a:avLst/>
@@ -4221,7 +4221,7 @@
         <p:spPr>
           <a:xfrm>
             <a:off x="5650200" y="4109400"/>
-            <a:ext cx="6281640" cy="236520"/>
+            <a:ext cx="6281280" cy="236160"/>
           </a:xfrm>
           <a:prstGeom prst="rect">
             <a:avLst/>
@@ -4273,7 +4273,7 @@
         <p:spPr>
           <a:xfrm>
             <a:off x="198360" y="4559400"/>
-            <a:ext cx="3370320" cy="790200"/>
+            <a:ext cx="3369960" cy="789840"/>
           </a:xfrm>
           <a:prstGeom prst="rect">
             <a:avLst/>
@@ -4371,7 +4371,7 @@
         <p:spPr>
           <a:xfrm>
             <a:off x="3948480" y="5306040"/>
-            <a:ext cx="2179800" cy="439560"/>
+            <a:ext cx="2179440" cy="439200"/>
           </a:xfrm>
           <a:prstGeom prst="rect">
             <a:avLst/>
@@ -4458,7 +4458,7 @@
         <p:spPr>
           <a:xfrm>
             <a:off x="210240" y="334080"/>
-            <a:ext cx="8100720" cy="463680"/>
+            <a:ext cx="8100360" cy="463320"/>
           </a:xfrm>
           <a:prstGeom prst="rect">
             <a:avLst/>
@@ -4570,7 +4570,7 @@
         <p:spPr>
           <a:xfrm>
             <a:off x="360" y="5229360"/>
-            <a:ext cx="10076760" cy="245880"/>
+            <a:ext cx="10076400" cy="245520"/>
           </a:xfrm>
           <a:prstGeom prst="rect">
             <a:avLst/>
@@ -4621,7 +4621,7 @@
         <p:spPr>
           <a:xfrm>
             <a:off x="178560" y="1156320"/>
-            <a:ext cx="9720360" cy="3277080"/>
+            <a:ext cx="9720000" cy="3277080"/>
           </a:xfrm>
           <a:prstGeom prst="rect">
             <a:avLst/>
@@ -5150,7 +5150,7 @@
         <p:spPr>
           <a:xfrm>
             <a:off x="7579440" y="1944000"/>
-            <a:ext cx="2463120" cy="2805840"/>
+            <a:ext cx="2462760" cy="2805480"/>
           </a:xfrm>
           <a:prstGeom prst="rect">
             <a:avLst/>
@@ -5174,7 +5174,7 @@
         <p:spPr>
           <a:xfrm>
             <a:off x="5328000" y="2812680"/>
-            <a:ext cx="2517840" cy="2369160"/>
+            <a:ext cx="2517480" cy="2368800"/>
           </a:xfrm>
           <a:prstGeom prst="rect">
             <a:avLst/>
@@ -5198,7 +5198,7 @@
         <p:spPr>
           <a:xfrm>
             <a:off x="3096000" y="1519200"/>
-            <a:ext cx="2481840" cy="2791440"/>
+            <a:ext cx="2481480" cy="2791080"/>
           </a:xfrm>
           <a:prstGeom prst="rect">
             <a:avLst/>
@@ -5248,7 +5248,7 @@
         <p:spPr>
           <a:xfrm>
             <a:off x="210240" y="334080"/>
-            <a:ext cx="8100720" cy="463680"/>
+            <a:ext cx="8100360" cy="463320"/>
           </a:xfrm>
           <a:prstGeom prst="rect">
             <a:avLst/>
@@ -5360,7 +5360,7 @@
         <p:spPr>
           <a:xfrm>
             <a:off x="360" y="5229360"/>
-            <a:ext cx="10076760" cy="245880"/>
+            <a:ext cx="10076400" cy="245520"/>
           </a:xfrm>
           <a:prstGeom prst="rect">
             <a:avLst/>
@@ -5414,8 +5414,8 @@
         </p:blipFill>
         <p:spPr>
           <a:xfrm>
-            <a:off x="3960000" y="3161520"/>
-            <a:ext cx="3239280" cy="2034720"/>
+            <a:off x="180000" y="1162800"/>
+            <a:ext cx="3780000" cy="2527560"/>
           </a:xfrm>
           <a:prstGeom prst="rect">
             <a:avLst/>
@@ -5438,8 +5438,8 @@
         </p:blipFill>
         <p:spPr>
           <a:xfrm>
-            <a:off x="180000" y="1148040"/>
-            <a:ext cx="3777840" cy="2279880"/>
+            <a:off x="3960000" y="3161520"/>
+            <a:ext cx="3238920" cy="2034360"/>
           </a:xfrm>
           <a:prstGeom prst="rect">
             <a:avLst/>
@@ -5463,7 +5463,7 @@
         <p:spPr>
           <a:xfrm>
             <a:off x="6876000" y="910440"/>
-            <a:ext cx="3129840" cy="2702160"/>
+            <a:ext cx="3129480" cy="2701800"/>
           </a:xfrm>
           <a:prstGeom prst="rect">
             <a:avLst/>
@@ -5513,7 +5513,7 @@
         <p:spPr>
           <a:xfrm>
             <a:off x="210240" y="334080"/>
-            <a:ext cx="8100720" cy="463680"/>
+            <a:ext cx="8100360" cy="463320"/>
           </a:xfrm>
           <a:prstGeom prst="rect">
             <a:avLst/>
@@ -5625,7 +5625,7 @@
         <p:spPr>
           <a:xfrm>
             <a:off x="360" y="5229360"/>
-            <a:ext cx="10076760" cy="245880"/>
+            <a:ext cx="10076400" cy="245520"/>
           </a:xfrm>
           <a:prstGeom prst="rect">
             <a:avLst/>
@@ -5680,7 +5680,7 @@
         <p:spPr>
           <a:xfrm>
             <a:off x="2430360" y="1046160"/>
-            <a:ext cx="5217840" cy="3936240"/>
+            <a:ext cx="5217480" cy="3935880"/>
           </a:xfrm>
           <a:prstGeom prst="rect">
             <a:avLst/>
@@ -5730,7 +5730,7 @@
         <p:spPr>
           <a:xfrm>
             <a:off x="210240" y="334080"/>
-            <a:ext cx="8100720" cy="463680"/>
+            <a:ext cx="8100360" cy="463320"/>
           </a:xfrm>
           <a:prstGeom prst="rect">
             <a:avLst/>
@@ -5842,7 +5842,7 @@
         <p:spPr>
           <a:xfrm>
             <a:off x="360" y="5229360"/>
-            <a:ext cx="10076760" cy="245880"/>
+            <a:ext cx="10076400" cy="245520"/>
           </a:xfrm>
           <a:prstGeom prst="rect">
             <a:avLst/>
@@ -5893,7 +5893,7 @@
         <p:spPr>
           <a:xfrm>
             <a:off x="178560" y="1156320"/>
-            <a:ext cx="9720360" cy="3780360"/>
+            <a:ext cx="9720000" cy="3780360"/>
           </a:xfrm>
           <a:prstGeom prst="rect">
             <a:avLst/>
@@ -6559,7 +6559,7 @@
         <p:spPr>
           <a:xfrm>
             <a:off x="210240" y="334080"/>
-            <a:ext cx="8100720" cy="463680"/>
+            <a:ext cx="8100360" cy="463320"/>
           </a:xfrm>
           <a:prstGeom prst="rect">
             <a:avLst/>
@@ -6671,7 +6671,7 @@
         <p:spPr>
           <a:xfrm>
             <a:off x="360" y="5229360"/>
-            <a:ext cx="10076760" cy="245880"/>
+            <a:ext cx="10076400" cy="245520"/>
           </a:xfrm>
           <a:prstGeom prst="rect">
             <a:avLst/>
@@ -6722,7 +6722,7 @@
         <p:spPr>
           <a:xfrm>
             <a:off x="178560" y="1156320"/>
-            <a:ext cx="9720360" cy="3780360"/>
+            <a:ext cx="9720000" cy="3780360"/>
           </a:xfrm>
           <a:prstGeom prst="rect">
             <a:avLst/>
@@ -7399,7 +7399,7 @@
         <p:spPr>
           <a:xfrm>
             <a:off x="210240" y="334080"/>
-            <a:ext cx="8100720" cy="463680"/>
+            <a:ext cx="8100360" cy="463320"/>
           </a:xfrm>
           <a:prstGeom prst="rect">
             <a:avLst/>
@@ -7511,7 +7511,7 @@
         <p:spPr>
           <a:xfrm>
             <a:off x="360" y="5229360"/>
-            <a:ext cx="10076760" cy="245880"/>
+            <a:ext cx="10076400" cy="245520"/>
           </a:xfrm>
           <a:prstGeom prst="rect">
             <a:avLst/>
@@ -7562,7 +7562,7 @@
         <p:spPr>
           <a:xfrm>
             <a:off x="178560" y="1156320"/>
-            <a:ext cx="9720360" cy="2941560"/>
+            <a:ext cx="9720000" cy="2941560"/>
           </a:xfrm>
           <a:prstGeom prst="rect">
             <a:avLst/>
@@ -8065,7 +8065,7 @@
         <p:spPr>
           <a:xfrm>
             <a:off x="210240" y="334080"/>
-            <a:ext cx="8100720" cy="463680"/>
+            <a:ext cx="8100360" cy="463320"/>
           </a:xfrm>
           <a:prstGeom prst="rect">
             <a:avLst/>
@@ -8177,7 +8177,7 @@
         <p:spPr>
           <a:xfrm>
             <a:off x="360" y="5229360"/>
-            <a:ext cx="10076760" cy="245880"/>
+            <a:ext cx="10076400" cy="245520"/>
           </a:xfrm>
           <a:prstGeom prst="rect">
             <a:avLst/>
@@ -8228,7 +8228,7 @@
         <p:spPr>
           <a:xfrm>
             <a:off x="178560" y="1156320"/>
-            <a:ext cx="9720360" cy="1599480"/>
+            <a:ext cx="9720000" cy="1599480"/>
           </a:xfrm>
           <a:prstGeom prst="rect">
             <a:avLst/>
@@ -9062,7 +9062,7 @@
         <p:spPr>
           <a:xfrm>
             <a:off x="5184000" y="1156320"/>
-            <a:ext cx="9720360" cy="1431720"/>
+            <a:ext cx="9720000" cy="1431720"/>
           </a:xfrm>
           <a:prstGeom prst="rect">
             <a:avLst/>
@@ -9331,7 +9331,7 @@
         <p:spPr>
           <a:xfrm>
             <a:off x="210240" y="334080"/>
-            <a:ext cx="8100720" cy="463680"/>
+            <a:ext cx="8100360" cy="463320"/>
           </a:xfrm>
           <a:prstGeom prst="rect">
             <a:avLst/>
@@ -9443,7 +9443,7 @@
         <p:spPr>
           <a:xfrm>
             <a:off x="360" y="5229360"/>
-            <a:ext cx="10076760" cy="245880"/>
+            <a:ext cx="10076400" cy="245520"/>
           </a:xfrm>
           <a:prstGeom prst="rect">
             <a:avLst/>
@@ -9494,7 +9494,7 @@
         <p:spPr>
           <a:xfrm>
             <a:off x="178560" y="1156320"/>
-            <a:ext cx="9720360" cy="257400"/>
+            <a:ext cx="9720000" cy="257400"/>
           </a:xfrm>
           <a:prstGeom prst="rect">
             <a:avLst/>
@@ -9551,7 +9551,7 @@
         <p:spPr>
           <a:xfrm>
             <a:off x="180000" y="2524320"/>
-            <a:ext cx="9898200" cy="1431720"/>
+            <a:ext cx="9897840" cy="1431720"/>
           </a:xfrm>
           <a:prstGeom prst="rect">
             <a:avLst/>
@@ -10178,7 +10178,7 @@
         <p:spPr>
           <a:xfrm>
             <a:off x="4860000" y="1156680"/>
-            <a:ext cx="9898200" cy="2773800"/>
+            <a:ext cx="9897840" cy="2773800"/>
           </a:xfrm>
           <a:prstGeom prst="rect">
             <a:avLst/>
@@ -10677,7 +10677,7 @@
         <p:spPr>
           <a:xfrm>
             <a:off x="210240" y="334080"/>
-            <a:ext cx="8100720" cy="463680"/>
+            <a:ext cx="8100360" cy="463320"/>
           </a:xfrm>
           <a:prstGeom prst="rect">
             <a:avLst/>
@@ -10789,7 +10789,7 @@
         <p:spPr>
           <a:xfrm>
             <a:off x="360" y="5229360"/>
-            <a:ext cx="10076760" cy="245880"/>
+            <a:ext cx="10076400" cy="245520"/>
           </a:xfrm>
           <a:prstGeom prst="rect">
             <a:avLst/>
@@ -10840,7 +10840,7 @@
         <p:spPr>
           <a:xfrm>
             <a:off x="178560" y="1156320"/>
-            <a:ext cx="9720360" cy="3444840"/>
+            <a:ext cx="9720000" cy="3444840"/>
           </a:xfrm>
           <a:prstGeom prst="rect">
             <a:avLst/>
@@ -11421,7 +11421,7 @@
         <p:spPr>
           <a:xfrm>
             <a:off x="210240" y="334080"/>
-            <a:ext cx="8100720" cy="463680"/>
+            <a:ext cx="8100360" cy="463320"/>
           </a:xfrm>
           <a:prstGeom prst="rect">
             <a:avLst/>
@@ -11533,7 +11533,7 @@
         <p:spPr>
           <a:xfrm>
             <a:off x="360" y="5229360"/>
-            <a:ext cx="10076760" cy="245880"/>
+            <a:ext cx="10076400" cy="245520"/>
           </a:xfrm>
           <a:prstGeom prst="rect">
             <a:avLst/>
@@ -11584,7 +11584,7 @@
         <p:spPr>
           <a:xfrm>
             <a:off x="178560" y="1156320"/>
-            <a:ext cx="9720360" cy="3277080"/>
+            <a:ext cx="9720000" cy="3277080"/>
           </a:xfrm>
           <a:prstGeom prst="rect">
             <a:avLst/>
@@ -12150,7 +12150,7 @@
         <p:spPr>
           <a:xfrm>
             <a:off x="210240" y="334080"/>
-            <a:ext cx="8100720" cy="463680"/>
+            <a:ext cx="8100360" cy="463320"/>
           </a:xfrm>
           <a:prstGeom prst="rect">
             <a:avLst/>
@@ -12262,7 +12262,7 @@
         <p:spPr>
           <a:xfrm>
             <a:off x="360" y="5229360"/>
-            <a:ext cx="10076760" cy="245880"/>
+            <a:ext cx="10076400" cy="245520"/>
           </a:xfrm>
           <a:prstGeom prst="rect">
             <a:avLst/>
@@ -12316,7 +12316,7 @@
         <p:spPr>
           <a:xfrm>
             <a:off x="178560" y="1156320"/>
-            <a:ext cx="9720360" cy="2941560"/>
+            <a:ext cx="9720000" cy="2941560"/>
           </a:xfrm>
           <a:prstGeom prst="rect">
             <a:avLst/>
@@ -12793,7 +12793,7 @@
         <p:spPr>
           <a:xfrm>
             <a:off x="210240" y="334080"/>
-            <a:ext cx="8100720" cy="463680"/>
+            <a:ext cx="8100360" cy="463320"/>
           </a:xfrm>
           <a:prstGeom prst="rect">
             <a:avLst/>
@@ -12905,7 +12905,7 @@
         <p:spPr>
           <a:xfrm>
             <a:off x="360" y="5229360"/>
-            <a:ext cx="10076760" cy="245880"/>
+            <a:ext cx="10076400" cy="245520"/>
           </a:xfrm>
           <a:prstGeom prst="rect">
             <a:avLst/>
@@ -12960,7 +12960,7 @@
         <p:spPr>
           <a:xfrm>
             <a:off x="621000" y="1049760"/>
-            <a:ext cx="8836920" cy="4145400"/>
+            <a:ext cx="8836560" cy="4145040"/>
           </a:xfrm>
           <a:prstGeom prst="rect">
             <a:avLst/>
@@ -13010,7 +13010,7 @@
         <p:spPr>
           <a:xfrm>
             <a:off x="210240" y="334080"/>
-            <a:ext cx="8100720" cy="463680"/>
+            <a:ext cx="8100360" cy="463320"/>
           </a:xfrm>
           <a:prstGeom prst="rect">
             <a:avLst/>
@@ -13122,7 +13122,7 @@
         <p:spPr>
           <a:xfrm>
             <a:off x="360" y="5229360"/>
-            <a:ext cx="10076760" cy="245880"/>
+            <a:ext cx="10076400" cy="245520"/>
           </a:xfrm>
           <a:prstGeom prst="rect">
             <a:avLst/>
@@ -13173,7 +13173,7 @@
         <p:spPr>
           <a:xfrm>
             <a:off x="178560" y="1156320"/>
-            <a:ext cx="9720360" cy="2941560"/>
+            <a:ext cx="9720000" cy="2941560"/>
           </a:xfrm>
           <a:prstGeom prst="rect">
             <a:avLst/>
@@ -13687,7 +13687,7 @@
         <p:spPr>
           <a:xfrm>
             <a:off x="210240" y="334080"/>
-            <a:ext cx="8100720" cy="463680"/>
+            <a:ext cx="8100360" cy="463320"/>
           </a:xfrm>
           <a:prstGeom prst="rect">
             <a:avLst/>
@@ -13799,7 +13799,7 @@
         <p:spPr>
           <a:xfrm>
             <a:off x="360" y="5229360"/>
-            <a:ext cx="10076760" cy="245880"/>
+            <a:ext cx="10076400" cy="245520"/>
           </a:xfrm>
           <a:prstGeom prst="rect">
             <a:avLst/>
@@ -13850,7 +13850,7 @@
         <p:spPr>
           <a:xfrm>
             <a:off x="5938560" y="1156320"/>
-            <a:ext cx="9720360" cy="2773800"/>
+            <a:ext cx="9720000" cy="2773800"/>
           </a:xfrm>
           <a:prstGeom prst="rect">
             <a:avLst/>
@@ -14297,7 +14297,7 @@
         <p:spPr>
           <a:xfrm>
             <a:off x="180000" y="1156320"/>
-            <a:ext cx="4498200" cy="257400"/>
+            <a:ext cx="4497840" cy="257400"/>
           </a:xfrm>
           <a:prstGeom prst="rect">
             <a:avLst/>
@@ -15135,7 +15135,7 @@
         <p:spPr>
           <a:xfrm>
             <a:off x="210240" y="334080"/>
-            <a:ext cx="8100720" cy="463680"/>
+            <a:ext cx="8100360" cy="463320"/>
           </a:xfrm>
           <a:prstGeom prst="rect">
             <a:avLst/>
@@ -15247,7 +15247,7 @@
         <p:spPr>
           <a:xfrm>
             <a:off x="360" y="5229360"/>
-            <a:ext cx="10076760" cy="245880"/>
+            <a:ext cx="10076400" cy="245520"/>
           </a:xfrm>
           <a:prstGeom prst="rect">
             <a:avLst/>
@@ -15302,7 +15302,7 @@
         <p:spPr>
           <a:xfrm>
             <a:off x="1260000" y="1101600"/>
-            <a:ext cx="7558920" cy="4114080"/>
+            <a:ext cx="7558560" cy="4113720"/>
           </a:xfrm>
           <a:prstGeom prst="rect">
             <a:avLst/>
@@ -15352,7 +15352,7 @@
         <p:spPr>
           <a:xfrm>
             <a:off x="210240" y="334080"/>
-            <a:ext cx="8100720" cy="463680"/>
+            <a:ext cx="8100360" cy="463320"/>
           </a:xfrm>
           <a:prstGeom prst="rect">
             <a:avLst/>
@@ -15464,7 +15464,7 @@
         <p:spPr>
           <a:xfrm>
             <a:off x="360" y="5229360"/>
-            <a:ext cx="10076760" cy="245880"/>
+            <a:ext cx="10076400" cy="245520"/>
           </a:xfrm>
           <a:prstGeom prst="rect">
             <a:avLst/>
@@ -15515,7 +15515,7 @@
         <p:spPr>
           <a:xfrm>
             <a:off x="178560" y="1156320"/>
-            <a:ext cx="9720360" cy="2102760"/>
+            <a:ext cx="9720000" cy="2102760"/>
           </a:xfrm>
           <a:prstGeom prst="rect">
             <a:avLst/>
@@ -15858,7 +15858,7 @@
         <p:spPr>
           <a:xfrm>
             <a:off x="4858560" y="1156680"/>
-            <a:ext cx="9720360" cy="2438280"/>
+            <a:ext cx="9720000" cy="2438280"/>
           </a:xfrm>
           <a:prstGeom prst="rect">
             <a:avLst/>
@@ -16283,7 +16283,7 @@
         <p:spPr>
           <a:xfrm>
             <a:off x="210240" y="334080"/>
-            <a:ext cx="8100720" cy="463680"/>
+            <a:ext cx="8100360" cy="463320"/>
           </a:xfrm>
           <a:prstGeom prst="rect">
             <a:avLst/>
@@ -16395,7 +16395,7 @@
         <p:spPr>
           <a:xfrm>
             <a:off x="360" y="5229360"/>
-            <a:ext cx="10076760" cy="245880"/>
+            <a:ext cx="10076400" cy="245520"/>
           </a:xfrm>
           <a:prstGeom prst="rect">
             <a:avLst/>
@@ -16446,7 +16446,7 @@
         <p:spPr>
           <a:xfrm>
             <a:off x="178560" y="1156320"/>
-            <a:ext cx="9720360" cy="2270520"/>
+            <a:ext cx="9720000" cy="2270520"/>
           </a:xfrm>
           <a:prstGeom prst="rect">
             <a:avLst/>
@@ -16815,7 +16815,7 @@
         <p:spPr>
           <a:xfrm>
             <a:off x="4680000" y="1156320"/>
-            <a:ext cx="5398200" cy="1935000"/>
+            <a:ext cx="5397840" cy="1935000"/>
           </a:xfrm>
           <a:prstGeom prst="rect">
             <a:avLst/>
@@ -17162,7 +17162,7 @@
         <p:spPr>
           <a:xfrm>
             <a:off x="210240" y="334080"/>
-            <a:ext cx="8100720" cy="463680"/>
+            <a:ext cx="8100360" cy="463320"/>
           </a:xfrm>
           <a:prstGeom prst="rect">
             <a:avLst/>
@@ -17274,7 +17274,7 @@
         <p:spPr>
           <a:xfrm>
             <a:off x="360" y="5229360"/>
-            <a:ext cx="10076760" cy="245880"/>
+            <a:ext cx="10076400" cy="245520"/>
           </a:xfrm>
           <a:prstGeom prst="rect">
             <a:avLst/>
@@ -17325,7 +17325,7 @@
         <p:spPr>
           <a:xfrm>
             <a:off x="178560" y="1156320"/>
-            <a:ext cx="9720360" cy="3109320"/>
+            <a:ext cx="9720000" cy="3109320"/>
           </a:xfrm>
           <a:prstGeom prst="rect">
             <a:avLst/>
@@ -17854,7 +17854,7 @@
         <p:spPr>
           <a:xfrm>
             <a:off x="210240" y="334080"/>
-            <a:ext cx="8100720" cy="463680"/>
+            <a:ext cx="8100360" cy="463320"/>
           </a:xfrm>
           <a:prstGeom prst="rect">
             <a:avLst/>
@@ -17966,7 +17966,7 @@
         <p:spPr>
           <a:xfrm>
             <a:off x="360" y="5229360"/>
-            <a:ext cx="10076760" cy="245880"/>
+            <a:ext cx="10076400" cy="245520"/>
           </a:xfrm>
           <a:prstGeom prst="rect">
             <a:avLst/>
@@ -18017,7 +18017,7 @@
         <p:spPr>
           <a:xfrm>
             <a:off x="178560" y="1156320"/>
-            <a:ext cx="9720360" cy="4115880"/>
+            <a:ext cx="9720000" cy="4115880"/>
           </a:xfrm>
           <a:prstGeom prst="rect">
             <a:avLst/>
@@ -19183,7 +19183,7 @@
         <p:spPr>
           <a:xfrm>
             <a:off x="210240" y="334080"/>
-            <a:ext cx="8100720" cy="463680"/>
+            <a:ext cx="8100360" cy="463320"/>
           </a:xfrm>
           <a:prstGeom prst="rect">
             <a:avLst/>
@@ -19295,7 +19295,7 @@
         <p:spPr>
           <a:xfrm>
             <a:off x="360" y="5229360"/>
-            <a:ext cx="10076760" cy="245880"/>
+            <a:ext cx="10076400" cy="245520"/>
           </a:xfrm>
           <a:prstGeom prst="rect">
             <a:avLst/>
@@ -19346,7 +19346,7 @@
         <p:spPr>
           <a:xfrm>
             <a:off x="178560" y="1156320"/>
-            <a:ext cx="9720360" cy="3948120"/>
+            <a:ext cx="9720000" cy="3948120"/>
           </a:xfrm>
           <a:prstGeom prst="rect">
             <a:avLst/>
@@ -19964,7 +19964,7 @@
         <p:spPr>
           <a:xfrm>
             <a:off x="4680000" y="1156320"/>
-            <a:ext cx="4138560" cy="928440"/>
+            <a:ext cx="4138200" cy="928440"/>
           </a:xfrm>
           <a:prstGeom prst="rect">
             <a:avLst/>
@@ -20129,7 +20129,7 @@
         <p:spPr>
           <a:xfrm>
             <a:off x="2412000" y="2116800"/>
-            <a:ext cx="6046560" cy="3029760"/>
+            <a:ext cx="6046200" cy="3029400"/>
           </a:xfrm>
           <a:prstGeom prst="rect">
             <a:avLst/>
@@ -20179,7 +20179,7 @@
         <p:spPr>
           <a:xfrm>
             <a:off x="210240" y="334080"/>
-            <a:ext cx="8100720" cy="463680"/>
+            <a:ext cx="8100360" cy="463320"/>
           </a:xfrm>
           <a:prstGeom prst="rect">
             <a:avLst/>
@@ -20291,7 +20291,7 @@
         <p:spPr>
           <a:xfrm>
             <a:off x="360" y="5229360"/>
-            <a:ext cx="10076760" cy="245880"/>
+            <a:ext cx="10076400" cy="245520"/>
           </a:xfrm>
           <a:prstGeom prst="rect">
             <a:avLst/>
@@ -20342,7 +20342,7 @@
         <p:spPr>
           <a:xfrm>
             <a:off x="178560" y="1156320"/>
-            <a:ext cx="9720360" cy="2438280"/>
+            <a:ext cx="9720000" cy="2438280"/>
           </a:xfrm>
           <a:prstGeom prst="rect">
             <a:avLst/>
@@ -20741,7 +20741,7 @@
         <p:spPr>
           <a:xfrm>
             <a:off x="3024000" y="1548000"/>
-            <a:ext cx="2878560" cy="2537640"/>
+            <a:ext cx="2878200" cy="2537280"/>
           </a:xfrm>
           <a:prstGeom prst="rect">
             <a:avLst/>
@@ -20765,7 +20765,7 @@
         <p:spPr>
           <a:xfrm>
             <a:off x="5976000" y="2750400"/>
-            <a:ext cx="3382560" cy="2392920"/>
+            <a:ext cx="3382200" cy="2392560"/>
           </a:xfrm>
           <a:prstGeom prst="rect">
             <a:avLst/>
@@ -20789,7 +20789,7 @@
         <p:spPr>
           <a:xfrm>
             <a:off x="5148000" y="180000"/>
-            <a:ext cx="2878560" cy="2537280"/>
+            <a:ext cx="2878200" cy="2536920"/>
           </a:xfrm>
           <a:prstGeom prst="rect">
             <a:avLst/>
@@ -20839,7 +20839,7 @@
         <p:spPr>
           <a:xfrm>
             <a:off x="210240" y="334080"/>
-            <a:ext cx="8100720" cy="463680"/>
+            <a:ext cx="8100360" cy="463320"/>
           </a:xfrm>
           <a:prstGeom prst="rect">
             <a:avLst/>
@@ -20951,7 +20951,7 @@
         <p:spPr>
           <a:xfrm>
             <a:off x="360" y="5229360"/>
-            <a:ext cx="10076760" cy="245880"/>
+            <a:ext cx="10076400" cy="245520"/>
           </a:xfrm>
           <a:prstGeom prst="rect">
             <a:avLst/>
@@ -21002,7 +21002,7 @@
         <p:spPr>
           <a:xfrm>
             <a:off x="178560" y="1156320"/>
-            <a:ext cx="9720360" cy="3612600"/>
+            <a:ext cx="9720000" cy="3612600"/>
           </a:xfrm>
           <a:prstGeom prst="rect">
             <a:avLst/>
@@ -21583,7 +21583,7 @@
         <p:spPr>
           <a:xfrm>
             <a:off x="6300000" y="985320"/>
-            <a:ext cx="1812600" cy="3872520"/>
+            <a:ext cx="1812240" cy="3872160"/>
           </a:xfrm>
           <a:prstGeom prst="rect">
             <a:avLst/>
@@ -21633,7 +21633,7 @@
         <p:spPr>
           <a:xfrm>
             <a:off x="210240" y="334080"/>
-            <a:ext cx="8100720" cy="463680"/>
+            <a:ext cx="8100360" cy="463320"/>
           </a:xfrm>
           <a:prstGeom prst="rect">
             <a:avLst/>
@@ -21745,7 +21745,7 @@
         <p:spPr>
           <a:xfrm>
             <a:off x="360" y="5229360"/>
-            <a:ext cx="10076760" cy="245880"/>
+            <a:ext cx="10076400" cy="245520"/>
           </a:xfrm>
           <a:prstGeom prst="rect">
             <a:avLst/>
@@ -21796,7 +21796,7 @@
         <p:spPr>
           <a:xfrm>
             <a:off x="178560" y="1156320"/>
-            <a:ext cx="9720360" cy="3780360"/>
+            <a:ext cx="9720000" cy="3780360"/>
           </a:xfrm>
           <a:prstGeom prst="rect">
             <a:avLst/>
@@ -22436,7 +22436,7 @@
         <p:spPr>
           <a:xfrm>
             <a:off x="3420000" y="1493280"/>
-            <a:ext cx="6633360" cy="3176640"/>
+            <a:ext cx="6633000" cy="3176280"/>
           </a:xfrm>
           <a:prstGeom prst="rect">
             <a:avLst/>
@@ -22486,7 +22486,7 @@
         <p:spPr>
           <a:xfrm>
             <a:off x="210240" y="334080"/>
-            <a:ext cx="8100720" cy="463680"/>
+            <a:ext cx="8100360" cy="463320"/>
           </a:xfrm>
           <a:prstGeom prst="rect">
             <a:avLst/>
@@ -22598,7 +22598,7 @@
         <p:spPr>
           <a:xfrm>
             <a:off x="360" y="5229360"/>
-            <a:ext cx="10076760" cy="245880"/>
+            <a:ext cx="10076400" cy="245520"/>
           </a:xfrm>
           <a:prstGeom prst="rect">
             <a:avLst/>
@@ -22649,7 +22649,7 @@
         <p:spPr>
           <a:xfrm>
             <a:off x="178560" y="1156320"/>
-            <a:ext cx="9720360" cy="3109320"/>
+            <a:ext cx="9720000" cy="3109320"/>
           </a:xfrm>
           <a:prstGeom prst="rect">
             <a:avLst/>
@@ -23185,7 +23185,7 @@
         <p:spPr>
           <a:xfrm>
             <a:off x="3420000" y="1492920"/>
-            <a:ext cx="6633360" cy="3177000"/>
+            <a:ext cx="6633000" cy="3176640"/>
           </a:xfrm>
           <a:prstGeom prst="rect">
             <a:avLst/>
@@ -23235,7 +23235,7 @@
         <p:spPr>
           <a:xfrm>
             <a:off x="210240" y="334080"/>
-            <a:ext cx="8100720" cy="463680"/>
+            <a:ext cx="8100360" cy="463320"/>
           </a:xfrm>
           <a:prstGeom prst="rect">
             <a:avLst/>
@@ -23347,7 +23347,7 @@
         <p:spPr>
           <a:xfrm>
             <a:off x="360" y="5229360"/>
-            <a:ext cx="10076760" cy="245880"/>
+            <a:ext cx="10076400" cy="245520"/>
           </a:xfrm>
           <a:prstGeom prst="rect">
             <a:avLst/>
@@ -23398,7 +23398,7 @@
         <p:spPr>
           <a:xfrm>
             <a:off x="178560" y="1156320"/>
-            <a:ext cx="9720360" cy="3612600"/>
+            <a:ext cx="9720000" cy="3612600"/>
           </a:xfrm>
           <a:prstGeom prst="rect">
             <a:avLst/>
@@ -24001,7 +24001,7 @@
         <p:spPr>
           <a:xfrm>
             <a:off x="3420000" y="1492920"/>
-            <a:ext cx="6651720" cy="3185640"/>
+            <a:ext cx="6651360" cy="3185280"/>
           </a:xfrm>
           <a:prstGeom prst="rect">
             <a:avLst/>
@@ -24051,7 +24051,7 @@
         <p:spPr>
           <a:xfrm>
             <a:off x="210240" y="334080"/>
-            <a:ext cx="8100720" cy="463680"/>
+            <a:ext cx="8100360" cy="463320"/>
           </a:xfrm>
           <a:prstGeom prst="rect">
             <a:avLst/>
@@ -24163,7 +24163,7 @@
         <p:spPr>
           <a:xfrm>
             <a:off x="360" y="5229360"/>
-            <a:ext cx="10076760" cy="245880"/>
+            <a:ext cx="10076400" cy="245520"/>
           </a:xfrm>
           <a:prstGeom prst="rect">
             <a:avLst/>
@@ -24214,7 +24214,7 @@
         <p:spPr>
           <a:xfrm>
             <a:off x="178920" y="1156680"/>
-            <a:ext cx="9720360" cy="4115880"/>
+            <a:ext cx="9720000" cy="4115880"/>
           </a:xfrm>
           <a:prstGeom prst="rect">
             <a:avLst/>
@@ -24921,7 +24921,7 @@
         <p:spPr>
           <a:xfrm>
             <a:off x="210240" y="334080"/>
-            <a:ext cx="8100720" cy="463680"/>
+            <a:ext cx="8100360" cy="463320"/>
           </a:xfrm>
           <a:prstGeom prst="rect">
             <a:avLst/>
@@ -25033,7 +25033,7 @@
         <p:spPr>
           <a:xfrm>
             <a:off x="360" y="5229360"/>
-            <a:ext cx="10076760" cy="245880"/>
+            <a:ext cx="10076400" cy="245520"/>
           </a:xfrm>
           <a:prstGeom prst="rect">
             <a:avLst/>
@@ -25084,7 +25084,7 @@
         <p:spPr>
           <a:xfrm>
             <a:off x="178560" y="1156320"/>
-            <a:ext cx="9720360" cy="2773800"/>
+            <a:ext cx="9720000" cy="2773800"/>
           </a:xfrm>
           <a:prstGeom prst="rect">
             <a:avLst/>
@@ -25535,7 +25535,7 @@
         <p:spPr>
           <a:xfrm>
             <a:off x="2858760" y="1260000"/>
-            <a:ext cx="4771800" cy="2158560"/>
+            <a:ext cx="4771440" cy="2158200"/>
           </a:xfrm>
           <a:prstGeom prst="rect">
             <a:avLst/>
@@ -25562,7 +25562,7 @@
         <p:spPr>
           <a:xfrm>
             <a:off x="3384000" y="3492360"/>
-            <a:ext cx="1459440" cy="1618200"/>
+            <a:ext cx="1459080" cy="1617840"/>
           </a:xfrm>
           <a:prstGeom prst="rect">
             <a:avLst/>
@@ -25589,7 +25589,7 @@
         <p:spPr>
           <a:xfrm>
             <a:off x="5240880" y="3493080"/>
-            <a:ext cx="1438200" cy="1617480"/>
+            <a:ext cx="1437840" cy="1617120"/>
           </a:xfrm>
           <a:prstGeom prst="rect">
             <a:avLst/>
@@ -25641,7 +25641,7 @@
         <p:spPr>
           <a:xfrm>
             <a:off x="210240" y="334080"/>
-            <a:ext cx="8100720" cy="463680"/>
+            <a:ext cx="8100360" cy="463320"/>
           </a:xfrm>
           <a:prstGeom prst="rect">
             <a:avLst/>
@@ -25753,7 +25753,7 @@
         <p:spPr>
           <a:xfrm>
             <a:off x="360" y="5229360"/>
-            <a:ext cx="10076760" cy="245880"/>
+            <a:ext cx="10076400" cy="245520"/>
           </a:xfrm>
           <a:prstGeom prst="rect">
             <a:avLst/>
@@ -25804,7 +25804,7 @@
         <p:spPr>
           <a:xfrm>
             <a:off x="178560" y="1156320"/>
-            <a:ext cx="9720360" cy="2941560"/>
+            <a:ext cx="9720000" cy="2941560"/>
           </a:xfrm>
           <a:prstGeom prst="rect">
             <a:avLst/>
@@ -26292,7 +26292,7 @@
         <p:spPr>
           <a:xfrm>
             <a:off x="3578760" y="1156320"/>
-            <a:ext cx="4699800" cy="2126160"/>
+            <a:ext cx="4699440" cy="2125800"/>
           </a:xfrm>
           <a:prstGeom prst="rect">
             <a:avLst/>
@@ -26318,7 +26318,7 @@
         <p:spPr>
           <a:xfrm>
             <a:off x="5040000" y="2712600"/>
-            <a:ext cx="4519800" cy="2145960"/>
+            <a:ext cx="4519440" cy="2145600"/>
           </a:xfrm>
           <a:prstGeom prst="rect">
             <a:avLst/>
@@ -26370,7 +26370,7 @@
         <p:spPr>
           <a:xfrm>
             <a:off x="210240" y="334080"/>
-            <a:ext cx="8100720" cy="463680"/>
+            <a:ext cx="8100360" cy="463320"/>
           </a:xfrm>
           <a:prstGeom prst="rect">
             <a:avLst/>
@@ -26482,7 +26482,7 @@
         <p:spPr>
           <a:xfrm>
             <a:off x="360" y="5229360"/>
-            <a:ext cx="10076760" cy="245880"/>
+            <a:ext cx="10076400" cy="245520"/>
           </a:xfrm>
           <a:prstGeom prst="rect">
             <a:avLst/>
@@ -26536,8 +26536,8 @@
         </p:blipFill>
         <p:spPr>
           <a:xfrm>
-            <a:off x="1624320" y="1041120"/>
-            <a:ext cx="6832080" cy="4164480"/>
+            <a:off x="1636560" y="1053360"/>
+            <a:ext cx="6807600" cy="4140000"/>
           </a:xfrm>
           <a:prstGeom prst="rect">
             <a:avLst/>
@@ -26587,7 +26587,7 @@
         <p:spPr>
           <a:xfrm>
             <a:off x="210240" y="334080"/>
-            <a:ext cx="8100720" cy="463680"/>
+            <a:ext cx="8100360" cy="463320"/>
           </a:xfrm>
           <a:prstGeom prst="rect">
             <a:avLst/>
@@ -26699,7 +26699,7 @@
         <p:spPr>
           <a:xfrm>
             <a:off x="360" y="5229360"/>
-            <a:ext cx="10076760" cy="245880"/>
+            <a:ext cx="10076400" cy="245520"/>
           </a:xfrm>
           <a:prstGeom prst="rect">
             <a:avLst/>
@@ -26750,7 +26750,7 @@
         <p:spPr>
           <a:xfrm>
             <a:off x="178560" y="1156320"/>
-            <a:ext cx="9720360" cy="3948120"/>
+            <a:ext cx="9720000" cy="3948120"/>
           </a:xfrm>
           <a:prstGeom prst="rect">
             <a:avLst/>
@@ -27423,7 +27423,7 @@
         <p:spPr>
           <a:xfrm>
             <a:off x="4680000" y="1156320"/>
-            <a:ext cx="3599280" cy="928440"/>
+            <a:ext cx="3598920" cy="928440"/>
           </a:xfrm>
           <a:prstGeom prst="rect">
             <a:avLst/>
@@ -27614,7 +27614,7 @@
         <p:spPr>
           <a:xfrm>
             <a:off x="210240" y="334080"/>
-            <a:ext cx="8100720" cy="463680"/>
+            <a:ext cx="8100360" cy="463320"/>
           </a:xfrm>
           <a:prstGeom prst="rect">
             <a:avLst/>
@@ -27726,7 +27726,7 @@
         <p:spPr>
           <a:xfrm>
             <a:off x="360" y="5229360"/>
-            <a:ext cx="10076760" cy="245880"/>
+            <a:ext cx="10076400" cy="245520"/>
           </a:xfrm>
           <a:prstGeom prst="rect">
             <a:avLst/>
@@ -27777,7 +27777,7 @@
         <p:spPr>
           <a:xfrm>
             <a:off x="178560" y="1156320"/>
-            <a:ext cx="9720360" cy="3780360"/>
+            <a:ext cx="9720000" cy="3780360"/>
           </a:xfrm>
           <a:prstGeom prst="rect">
             <a:avLst/>
@@ -28454,7 +28454,7 @@
         <p:spPr>
           <a:xfrm>
             <a:off x="210240" y="334080"/>
-            <a:ext cx="8100720" cy="463680"/>
+            <a:ext cx="8100360" cy="463320"/>
           </a:xfrm>
           <a:prstGeom prst="rect">
             <a:avLst/>
@@ -28566,7 +28566,7 @@
         <p:spPr>
           <a:xfrm>
             <a:off x="360" y="5229360"/>
-            <a:ext cx="10076760" cy="245880"/>
+            <a:ext cx="10076400" cy="245520"/>
           </a:xfrm>
           <a:prstGeom prst="rect">
             <a:avLst/>
@@ -28617,7 +28617,7 @@
         <p:spPr>
           <a:xfrm>
             <a:off x="178560" y="1156320"/>
-            <a:ext cx="9720360" cy="2102760"/>
+            <a:ext cx="9720000" cy="2102760"/>
           </a:xfrm>
           <a:prstGeom prst="rect">
             <a:avLst/>
@@ -28949,7 +28949,7 @@
         <p:spPr>
           <a:xfrm>
             <a:off x="4680000" y="1156320"/>
-            <a:ext cx="4678920" cy="3948120"/>
+            <a:ext cx="4678560" cy="3948120"/>
           </a:xfrm>
           <a:prstGeom prst="rect">
             <a:avLst/>
@@ -29652,7 +29652,7 @@
         <p:spPr>
           <a:xfrm>
             <a:off x="210240" y="334080"/>
-            <a:ext cx="8100720" cy="463680"/>
+            <a:ext cx="8100360" cy="463320"/>
           </a:xfrm>
           <a:prstGeom prst="rect">
             <a:avLst/>
@@ -29764,7 +29764,7 @@
         <p:spPr>
           <a:xfrm>
             <a:off x="360" y="5229360"/>
-            <a:ext cx="10076760" cy="245880"/>
+            <a:ext cx="10076400" cy="245520"/>
           </a:xfrm>
           <a:prstGeom prst="rect">
             <a:avLst/>
@@ -29815,7 +29815,7 @@
         <p:spPr>
           <a:xfrm>
             <a:off x="178560" y="1156320"/>
-            <a:ext cx="9720360" cy="3277080"/>
+            <a:ext cx="9720000" cy="3277080"/>
           </a:xfrm>
           <a:prstGeom prst="rect">
             <a:avLst/>
@@ -30370,7 +30370,7 @@
         <p:spPr>
           <a:xfrm>
             <a:off x="210240" y="334080"/>
-            <a:ext cx="8100720" cy="463680"/>
+            <a:ext cx="8100360" cy="463320"/>
           </a:xfrm>
           <a:prstGeom prst="rect">
             <a:avLst/>
@@ -30482,7 +30482,7 @@
         <p:spPr>
           <a:xfrm>
             <a:off x="360" y="5229360"/>
-            <a:ext cx="10076760" cy="245880"/>
+            <a:ext cx="10076400" cy="245520"/>
           </a:xfrm>
           <a:prstGeom prst="rect">
             <a:avLst/>
@@ -30533,7 +30533,7 @@
         <p:spPr>
           <a:xfrm>
             <a:off x="178560" y="1156320"/>
-            <a:ext cx="9720360" cy="3444840"/>
+            <a:ext cx="9720000" cy="3444840"/>
           </a:xfrm>
           <a:prstGeom prst="rect">
             <a:avLst/>
@@ -30974,7 +30974,7 @@
         <p:spPr>
           <a:xfrm>
             <a:off x="4680000" y="1156320"/>
-            <a:ext cx="3238920" cy="1599480"/>
+            <a:ext cx="3238560" cy="1599480"/>
           </a:xfrm>
           <a:prstGeom prst="rect">
             <a:avLst/>
@@ -31779,7 +31779,7 @@
         <p:spPr>
           <a:xfrm>
             <a:off x="210240" y="334080"/>
-            <a:ext cx="8100720" cy="463680"/>
+            <a:ext cx="8100360" cy="463320"/>
           </a:xfrm>
           <a:prstGeom prst="rect">
             <a:avLst/>
@@ -31891,7 +31891,7 @@
         <p:spPr>
           <a:xfrm>
             <a:off x="360" y="5229360"/>
-            <a:ext cx="10076760" cy="245880"/>
+            <a:ext cx="10076400" cy="245520"/>
           </a:xfrm>
           <a:prstGeom prst="rect">
             <a:avLst/>
@@ -31942,7 +31942,7 @@
         <p:spPr>
           <a:xfrm>
             <a:off x="178560" y="1156320"/>
-            <a:ext cx="9720360" cy="3109320"/>
+            <a:ext cx="9720000" cy="3109320"/>
           </a:xfrm>
           <a:prstGeom prst="rect">
             <a:avLst/>
@@ -32482,7 +32482,7 @@
         <p:spPr>
           <a:xfrm>
             <a:off x="210240" y="334080"/>
-            <a:ext cx="8100720" cy="463680"/>
+            <a:ext cx="8100360" cy="463320"/>
           </a:xfrm>
           <a:prstGeom prst="rect">
             <a:avLst/>
@@ -32594,7 +32594,7 @@
         <p:spPr>
           <a:xfrm>
             <a:off x="360" y="5229360"/>
-            <a:ext cx="10076760" cy="245880"/>
+            <a:ext cx="10076400" cy="245520"/>
           </a:xfrm>
           <a:prstGeom prst="rect">
             <a:avLst/>
@@ -32645,7 +32645,7 @@
         <p:spPr>
           <a:xfrm>
             <a:off x="178560" y="1156320"/>
-            <a:ext cx="9720360" cy="2102760"/>
+            <a:ext cx="9720000" cy="2102760"/>
           </a:xfrm>
           <a:prstGeom prst="rect">
             <a:avLst/>
@@ -32999,7 +32999,7 @@
         <p:spPr>
           <a:xfrm>
             <a:off x="4680000" y="1156320"/>
-            <a:ext cx="4318920" cy="2270520"/>
+            <a:ext cx="4318560" cy="2270520"/>
           </a:xfrm>
           <a:prstGeom prst="rect">
             <a:avLst/>
@@ -33398,7 +33398,7 @@
         <p:spPr>
           <a:xfrm>
             <a:off x="210240" y="334080"/>
-            <a:ext cx="8100720" cy="463680"/>
+            <a:ext cx="8100360" cy="463320"/>
           </a:xfrm>
           <a:prstGeom prst="rect">
             <a:avLst/>
@@ -33510,7 +33510,7 @@
         <p:spPr>
           <a:xfrm>
             <a:off x="360" y="5229360"/>
-            <a:ext cx="10076760" cy="245880"/>
+            <a:ext cx="10076400" cy="245520"/>
           </a:xfrm>
           <a:prstGeom prst="rect">
             <a:avLst/>
@@ -33561,7 +33561,7 @@
         <p:spPr>
           <a:xfrm>
             <a:off x="178560" y="1156320"/>
-            <a:ext cx="9720360" cy="4115880"/>
+            <a:ext cx="9720000" cy="4115880"/>
           </a:xfrm>
           <a:prstGeom prst="rect">
             <a:avLst/>
@@ -34901,7 +34901,7 @@
         <p:spPr>
           <a:xfrm>
             <a:off x="210240" y="334080"/>
-            <a:ext cx="8100720" cy="463680"/>
+            <a:ext cx="8100360" cy="463320"/>
           </a:xfrm>
           <a:prstGeom prst="rect">
             <a:avLst/>
@@ -35013,7 +35013,7 @@
         <p:spPr>
           <a:xfrm>
             <a:off x="360" y="5229360"/>
-            <a:ext cx="10076760" cy="245880"/>
+            <a:ext cx="10076400" cy="245520"/>
           </a:xfrm>
           <a:prstGeom prst="rect">
             <a:avLst/>
@@ -35064,7 +35064,7 @@
         <p:spPr>
           <a:xfrm>
             <a:off x="178560" y="1156320"/>
-            <a:ext cx="9720360" cy="2773800"/>
+            <a:ext cx="9720000" cy="2773800"/>
           </a:xfrm>
           <a:prstGeom prst="rect">
             <a:avLst/>
@@ -35541,7 +35541,7 @@
         <p:spPr>
           <a:xfrm>
             <a:off x="3745080" y="2278080"/>
-            <a:ext cx="6943680" cy="3025440"/>
+            <a:ext cx="6943320" cy="3025080"/>
           </a:xfrm>
           <a:prstGeom prst="rect">
             <a:avLst/>
@@ -35587,7 +35587,7 @@
         <p:spPr>
           <a:xfrm>
             <a:off x="302760" y="2390400"/>
-            <a:ext cx="5344200" cy="1157400"/>
+            <a:ext cx="5343840" cy="1157040"/>
           </a:xfrm>
           <a:prstGeom prst="rect">
             <a:avLst/>
@@ -35670,7 +35670,7 @@
         <p:spPr>
           <a:xfrm>
             <a:off x="5650200" y="4109400"/>
-            <a:ext cx="6281640" cy="236520"/>
+            <a:ext cx="6281280" cy="236160"/>
           </a:xfrm>
           <a:prstGeom prst="rect">
             <a:avLst/>
@@ -35722,9 +35722,9 @@
         <p:grpSpPr>
           <a:xfrm>
             <a:off x="396720" y="4254840"/>
-            <a:ext cx="5351760" cy="1324800"/>
+            <a:ext cx="5351400" cy="1324440"/>
             <a:chOff x="396720" y="4254840"/>
-            <a:chExt cx="5351760" cy="1324800"/>
+            <a:chExt cx="5351400" cy="1324440"/>
           </a:xfrm>
         </p:grpSpPr>
         <p:sp>
@@ -35736,7 +35736,7 @@
           <p:spPr>
             <a:xfrm>
               <a:off x="396720" y="4254840"/>
-              <a:ext cx="5351760" cy="244080"/>
+              <a:ext cx="5351400" cy="243720"/>
             </a:xfrm>
             <a:prstGeom prst="rect">
               <a:avLst/>
@@ -35825,7 +35825,7 @@
           <p:spPr>
             <a:xfrm>
               <a:off x="396720" y="4738320"/>
-              <a:ext cx="5351760" cy="841320"/>
+              <a:ext cx="5351400" cy="840960"/>
             </a:xfrm>
             <a:prstGeom prst="rect">
               <a:avLst/>
@@ -35923,7 +35923,7 @@
         <p:spPr>
           <a:xfrm>
             <a:off x="210240" y="334080"/>
-            <a:ext cx="8100720" cy="463680"/>
+            <a:ext cx="8100360" cy="463320"/>
           </a:xfrm>
           <a:prstGeom prst="rect">
             <a:avLst/>
@@ -36035,7 +36035,7 @@
         <p:spPr>
           <a:xfrm>
             <a:off x="360" y="5229360"/>
-            <a:ext cx="10076760" cy="245880"/>
+            <a:ext cx="10076400" cy="245520"/>
           </a:xfrm>
           <a:prstGeom prst="rect">
             <a:avLst/>
@@ -36086,7 +36086,7 @@
         <p:spPr>
           <a:xfrm>
             <a:off x="178560" y="1156320"/>
-            <a:ext cx="9720360" cy="3948120"/>
+            <a:ext cx="9720000" cy="3948120"/>
           </a:xfrm>
           <a:prstGeom prst="rect">
             <a:avLst/>
@@ -36800,7 +36800,7 @@
         <p:spPr>
           <a:xfrm>
             <a:off x="210240" y="334080"/>
-            <a:ext cx="8100720" cy="463680"/>
+            <a:ext cx="8100360" cy="463320"/>
           </a:xfrm>
           <a:prstGeom prst="rect">
             <a:avLst/>
@@ -36912,7 +36912,7 @@
         <p:spPr>
           <a:xfrm>
             <a:off x="360" y="5229360"/>
-            <a:ext cx="10076760" cy="245880"/>
+            <a:ext cx="10076400" cy="245520"/>
           </a:xfrm>
           <a:prstGeom prst="rect">
             <a:avLst/>
@@ -36963,7 +36963,7 @@
         <p:spPr>
           <a:xfrm>
             <a:off x="178560" y="1156320"/>
-            <a:ext cx="9720360" cy="2941560"/>
+            <a:ext cx="9720000" cy="2941560"/>
           </a:xfrm>
           <a:prstGeom prst="rect">
             <a:avLst/>
@@ -37466,7 +37466,7 @@
         <p:spPr>
           <a:xfrm>
             <a:off x="210240" y="334080"/>
-            <a:ext cx="8100720" cy="463680"/>
+            <a:ext cx="8100360" cy="463320"/>
           </a:xfrm>
           <a:prstGeom prst="rect">
             <a:avLst/>
@@ -37578,7 +37578,7 @@
         <p:spPr>
           <a:xfrm>
             <a:off x="360" y="5229360"/>
-            <a:ext cx="10076760" cy="245880"/>
+            <a:ext cx="10076400" cy="245520"/>
           </a:xfrm>
           <a:prstGeom prst="rect">
             <a:avLst/>
@@ -37629,7 +37629,7 @@
         <p:spPr>
           <a:xfrm>
             <a:off x="178560" y="1156320"/>
-            <a:ext cx="9720360" cy="2941560"/>
+            <a:ext cx="9720000" cy="2941560"/>
           </a:xfrm>
           <a:prstGeom prst="rect">
             <a:avLst/>
@@ -38165,7 +38165,7 @@
         <p:spPr>
           <a:xfrm>
             <a:off x="210240" y="334080"/>
-            <a:ext cx="8100720" cy="463680"/>
+            <a:ext cx="8100360" cy="463320"/>
           </a:xfrm>
           <a:prstGeom prst="rect">
             <a:avLst/>
@@ -38277,7 +38277,7 @@
         <p:spPr>
           <a:xfrm>
             <a:off x="360" y="5229360"/>
-            <a:ext cx="10076760" cy="245880"/>
+            <a:ext cx="10076400" cy="245520"/>
           </a:xfrm>
           <a:prstGeom prst="rect">
             <a:avLst/>
@@ -38328,7 +38328,7 @@
         <p:spPr>
           <a:xfrm>
             <a:off x="178560" y="1156320"/>
-            <a:ext cx="9720360" cy="3780360"/>
+            <a:ext cx="9720000" cy="3780360"/>
           </a:xfrm>
           <a:prstGeom prst="rect">
             <a:avLst/>
@@ -38953,7 +38953,7 @@
         <p:spPr>
           <a:xfrm>
             <a:off x="5398920" y="1156680"/>
-            <a:ext cx="9720360" cy="1096200"/>
+            <a:ext cx="9720000" cy="1096200"/>
           </a:xfrm>
           <a:prstGeom prst="rect">
             <a:avLst/>
@@ -39170,7 +39170,7 @@
         <p:spPr>
           <a:xfrm>
             <a:off x="210240" y="334080"/>
-            <a:ext cx="8100720" cy="463680"/>
+            <a:ext cx="8100360" cy="463320"/>
           </a:xfrm>
           <a:prstGeom prst="rect">
             <a:avLst/>
@@ -39282,7 +39282,7 @@
         <p:spPr>
           <a:xfrm>
             <a:off x="360" y="5229360"/>
-            <a:ext cx="10076760" cy="245880"/>
+            <a:ext cx="10076400" cy="245520"/>
           </a:xfrm>
           <a:prstGeom prst="rect">
             <a:avLst/>
@@ -39333,7 +39333,7 @@
         <p:spPr>
           <a:xfrm>
             <a:off x="178560" y="1156320"/>
-            <a:ext cx="9720360" cy="257400"/>
+            <a:ext cx="9720000" cy="257400"/>
           </a:xfrm>
           <a:prstGeom prst="rect">
             <a:avLst/>
@@ -40510,7 +40510,7 @@
         <p:spPr>
           <a:xfrm>
             <a:off x="178920" y="3676680"/>
-            <a:ext cx="9720360" cy="1096200"/>
+            <a:ext cx="9720000" cy="1096200"/>
           </a:xfrm>
           <a:prstGeom prst="rect">
             <a:avLst/>
